--- a/content/05-teaching-resources/slides/core/08-health-and-safety-in-digital-work.pptx
+++ b/content/05-teaching-resources/slides/core/08-health-and-safety-in-digital-work.pptx
@@ -8,13 +8,19 @@
     <p:sldId id="256" r:id="rId7"/>
     <p:sldId id="257" r:id="rId8"/>
     <p:sldId id="258" r:id="rId9"/>
-    <p:sldId id="259" r:id="rId11"/>
+    <p:sldId id="259" r:id="rId10"/>
     <p:sldId id="260" r:id="rId12"/>
     <p:sldId id="261" r:id="rId13"/>
     <p:sldId id="262" r:id="rId14"/>
     <p:sldId id="263" r:id="rId15"/>
     <p:sldId id="264" r:id="rId16"/>
     <p:sldId id="265" r:id="rId17"/>
+    <p:sldId id="266" r:id="rId18"/>
+    <p:sldId id="267" r:id="rId19"/>
+    <p:sldId id="268" r:id="rId20"/>
+    <p:sldId id="269" r:id="rId21"/>
+    <p:sldId id="270" r:id="rId22"/>
+    <p:sldId id="271" r:id="rId23"/>
   </p:sldIdLst>
   <p:sldSz cx="12191695" cy="6858000" type="screen4x3"/>
   <p:notesSz cx="6858000" cy="9144000"/>
@@ -581,7 +587,22 @@
           <a:lstStyle/>
           <a:p>
             <a:r>
-              <a:t>The four mitigation themes from the specification: training, safe environment, safety equipment and supervision.</a:t>
+              <a:t>Answers:</a:t>
+            </a:r>
+          </a:p>
+          <a:p>
+            <a:r>
+              <a:t>1. Any two: safe environment, training, welfare, information, instruction, supervision.</a:t>
+            </a:r>
+          </a:p>
+          <a:p>
+            <a:r>
+              <a:t>2. Yes: take reasonable care and follow safety procedures.</a:t>
+            </a:r>
+          </a:p>
+          <a:p>
+            <a:r>
+              <a:t>3. They sit under it and cover specific risks.</a:t>
             </a:r>
           </a:p>
         </p:txBody>
@@ -651,7 +672,22 @@
           <a:lstStyle/>
           <a:p>
             <a:r>
-              <a:t>Give students a few minutes to answer on mini whiteboards or paper, then reveal the answers on the next slide.</a:t>
+              <a:t>Answers:</a:t>
+            </a:r>
+          </a:p>
+          <a:p>
+            <a:r>
+              <a:t>1. Avoid working at height where possible.</a:t>
+            </a:r>
+          </a:p>
+          <a:p>
+            <a:r>
+              <a:t>2. An eye test.</a:t>
+            </a:r>
+          </a:p>
+          <a:p>
+            <a:r>
+              <a:t>3. E.g. trolleys, team lifts, training.</a:t>
             </a:r>
           </a:p>
         </p:txBody>
@@ -721,7 +757,7 @@
           <a:lstStyle/>
           <a:p>
             <a:r>
-              <a:t>Talk through any answers the class found difficult.</a:t>
+              <a:t>The four mitigation themes from the specification: training, safe environment, safety equipment and supervision.</a:t>
             </a:r>
           </a:p>
         </p:txBody>
@@ -747,6 +783,231 @@
 </file>
 
 <file path=ppt/notesSlides/notesSlide5.xml><?xml version="1.0" encoding="utf-8"?>
+<p:notes xmlns:a="http://schemas.openxmlformats.org/drawingml/2006/main" xmlns:p="http://schemas.openxmlformats.org/presentationml/2006/main" xmlns:r="http://schemas.openxmlformats.org/officeDocument/2006/relationships">
+  <p:cSld>
+    <p:spTree>
+      <p:nvGrpSpPr>
+        <p:cNvPr id="1" name=""/>
+        <p:cNvGrpSpPr/>
+        <p:nvPr/>
+      </p:nvGrpSpPr>
+      <p:grpSpPr>
+        <a:xfrm>
+          <a:off x="0" y="0"/>
+          <a:ext cx="0" cy="0"/>
+          <a:chOff x="0" y="0"/>
+          <a:chExt cx="0" cy="0"/>
+        </a:xfrm>
+      </p:grpSpPr>
+      <p:sp>
+        <p:nvSpPr>
+          <p:cNvPr id="2" name="Slide Image Placeholder 1"/>
+          <p:cNvSpPr>
+            <a:spLocks noGrp="1"/>
+          </p:cNvSpPr>
+          <p:nvPr>
+            <p:ph type="sldImg" idx="2"/>
+          </p:nvPr>
+        </p:nvSpPr>
+        <p:spPr/>
+      </p:sp>
+      <p:sp>
+        <p:nvSpPr>
+          <p:cNvPr id="3" name="Notes Placeholder 2"/>
+          <p:cNvSpPr>
+            <a:spLocks noGrp="1"/>
+          </p:cNvSpPr>
+          <p:nvPr>
+            <p:ph type="body" idx="3" sz="quarter"/>
+          </p:nvPr>
+        </p:nvSpPr>
+        <p:spPr/>
+        <p:txBody>
+          <a:bodyPr/>
+          <a:lstStyle/>
+          <a:p>
+            <a:r>
+              <a:t>Answers:</a:t>
+            </a:r>
+          </a:p>
+          <a:p>
+            <a:r>
+              <a:t>1. Any two: eye strain, back, neck or wrist pain.</a:t>
+            </a:r>
+          </a:p>
+          <a:p>
+            <a:r>
+              <a:t>2. E.g. isolate power, wear gloves, keep cables tidy.</a:t>
+            </a:r>
+          </a:p>
+          <a:p>
+            <a:r>
+              <a:t>3. Training, safe environment, safety equipment, supervision.</a:t>
+            </a:r>
+          </a:p>
+        </p:txBody>
+      </p:sp>
+      <p:sp>
+        <p:nvSpPr>
+          <p:cNvPr id="4" name="Slide Number Placeholder 3"/>
+          <p:cNvSpPr>
+            <a:spLocks noGrp="1"/>
+          </p:cNvSpPr>
+          <p:nvPr>
+            <p:ph type="sldNum" idx="5" sz="quarter"/>
+          </p:nvPr>
+        </p:nvSpPr>
+        <p:spPr/>
+      </p:sp>
+    </p:spTree>
+  </p:cSld>
+  <p:clrMapOvr>
+    <a:masterClrMapping/>
+  </p:clrMapOvr>
+</p:notes>
+</file>
+
+<file path=ppt/notesSlides/notesSlide6.xml><?xml version="1.0" encoding="utf-8"?>
+<p:notes xmlns:a="http://schemas.openxmlformats.org/drawingml/2006/main" xmlns:p="http://schemas.openxmlformats.org/presentationml/2006/main" xmlns:r="http://schemas.openxmlformats.org/officeDocument/2006/relationships">
+  <p:cSld>
+    <p:spTree>
+      <p:nvGrpSpPr>
+        <p:cNvPr id="1" name=""/>
+        <p:cNvGrpSpPr/>
+        <p:nvPr/>
+      </p:nvGrpSpPr>
+      <p:grpSpPr>
+        <a:xfrm>
+          <a:off x="0" y="0"/>
+          <a:ext cx="0" cy="0"/>
+          <a:chOff x="0" y="0"/>
+          <a:chExt cx="0" cy="0"/>
+        </a:xfrm>
+      </p:grpSpPr>
+      <p:sp>
+        <p:nvSpPr>
+          <p:cNvPr id="2" name="Slide Image Placeholder 1"/>
+          <p:cNvSpPr>
+            <a:spLocks noGrp="1"/>
+          </p:cNvSpPr>
+          <p:nvPr>
+            <p:ph type="sldImg" idx="2"/>
+          </p:nvPr>
+        </p:nvSpPr>
+        <p:spPr/>
+      </p:sp>
+      <p:sp>
+        <p:nvSpPr>
+          <p:cNvPr id="3" name="Notes Placeholder 2"/>
+          <p:cNvSpPr>
+            <a:spLocks noGrp="1"/>
+          </p:cNvSpPr>
+          <p:nvPr>
+            <p:ph type="body" idx="3" sz="quarter"/>
+          </p:nvPr>
+        </p:nvSpPr>
+        <p:spPr/>
+        <p:txBody>
+          <a:bodyPr/>
+          <a:lstStyle/>
+          <a:p>
+            <a:r>
+              <a:t>Give students a few minutes to answer on mini whiteboards or paper, then reveal the answers on the next slide.</a:t>
+            </a:r>
+          </a:p>
+        </p:txBody>
+      </p:sp>
+      <p:sp>
+        <p:nvSpPr>
+          <p:cNvPr id="4" name="Slide Number Placeholder 3"/>
+          <p:cNvSpPr>
+            <a:spLocks noGrp="1"/>
+          </p:cNvSpPr>
+          <p:nvPr>
+            <p:ph type="sldNum" idx="5" sz="quarter"/>
+          </p:nvPr>
+        </p:nvSpPr>
+        <p:spPr/>
+      </p:sp>
+    </p:spTree>
+  </p:cSld>
+  <p:clrMapOvr>
+    <a:masterClrMapping/>
+  </p:clrMapOvr>
+</p:notes>
+</file>
+
+<file path=ppt/notesSlides/notesSlide7.xml><?xml version="1.0" encoding="utf-8"?>
+<p:notes xmlns:a="http://schemas.openxmlformats.org/drawingml/2006/main" xmlns:p="http://schemas.openxmlformats.org/presentationml/2006/main" xmlns:r="http://schemas.openxmlformats.org/officeDocument/2006/relationships">
+  <p:cSld>
+    <p:spTree>
+      <p:nvGrpSpPr>
+        <p:cNvPr id="1" name=""/>
+        <p:cNvGrpSpPr/>
+        <p:nvPr/>
+      </p:nvGrpSpPr>
+      <p:grpSpPr>
+        <a:xfrm>
+          <a:off x="0" y="0"/>
+          <a:ext cx="0" cy="0"/>
+          <a:chOff x="0" y="0"/>
+          <a:chExt cx="0" cy="0"/>
+        </a:xfrm>
+      </p:grpSpPr>
+      <p:sp>
+        <p:nvSpPr>
+          <p:cNvPr id="2" name="Slide Image Placeholder 1"/>
+          <p:cNvSpPr>
+            <a:spLocks noGrp="1"/>
+          </p:cNvSpPr>
+          <p:nvPr>
+            <p:ph type="sldImg" idx="2"/>
+          </p:nvPr>
+        </p:nvSpPr>
+        <p:spPr/>
+      </p:sp>
+      <p:sp>
+        <p:nvSpPr>
+          <p:cNvPr id="3" name="Notes Placeholder 2"/>
+          <p:cNvSpPr>
+            <a:spLocks noGrp="1"/>
+          </p:cNvSpPr>
+          <p:nvPr>
+            <p:ph type="body" idx="3" sz="quarter"/>
+          </p:nvPr>
+        </p:nvSpPr>
+        <p:spPr/>
+        <p:txBody>
+          <a:bodyPr/>
+          <a:lstStyle/>
+          <a:p>
+            <a:r>
+              <a:t>Talk through any answers the class found difficult.</a:t>
+            </a:r>
+          </a:p>
+        </p:txBody>
+      </p:sp>
+      <p:sp>
+        <p:nvSpPr>
+          <p:cNvPr id="4" name="Slide Number Placeholder 3"/>
+          <p:cNvSpPr>
+            <a:spLocks noGrp="1"/>
+          </p:cNvSpPr>
+          <p:nvPr>
+            <p:ph type="sldNum" idx="5" sz="quarter"/>
+          </p:nvPr>
+        </p:nvSpPr>
+        <p:spPr/>
+      </p:sp>
+    </p:spTree>
+  </p:cSld>
+  <p:clrMapOvr>
+    <a:masterClrMapping/>
+  </p:clrMapOvr>
+</p:notes>
+</file>
+
+<file path=ppt/notesSlides/notesSlide8.xml><?xml version="1.0" encoding="utf-8"?>
 <p:notes xmlns:a="http://schemas.openxmlformats.org/drawingml/2006/main" xmlns:p="http://schemas.openxmlformats.org/presentationml/2006/main" xmlns:r="http://schemas.openxmlformats.org/officeDocument/2006/relationships">
   <p:cSld>
     <p:spTree>
@@ -4122,532 +4383,6 @@
     <p:bg>
       <p:bgPr>
         <a:solidFill>
-          <a:srgbClr val="03306E"/>
-        </a:solidFill>
-        <a:effectLst/>
-      </p:bgPr>
-    </p:bg>
-    <p:spTree>
-      <p:nvGrpSpPr>
-        <p:cNvPr id="1" name=""/>
-        <p:cNvGrpSpPr/>
-        <p:nvPr/>
-      </p:nvGrpSpPr>
-      <p:grpSpPr/>
-      <p:sp>
-        <p:nvSpPr>
-          <p:cNvPr id="2" name="TextBox 1"/>
-          <p:cNvSpPr txBox="1"/>
-          <p:nvPr/>
-        </p:nvSpPr>
-        <p:spPr>
-          <a:xfrm>
-            <a:off x="548640" y="320040"/>
-            <a:ext cx="11094415" cy="274320"/>
-          </a:xfrm>
-          <a:prstGeom prst="rect">
-            <a:avLst/>
-          </a:prstGeom>
-          <a:noFill/>
-        </p:spPr>
-        <p:txBody>
-          <a:bodyPr wrap="square" anchor="t" lIns="0" rIns="0" tIns="0" bIns="0"/>
-          <a:lstStyle/>
-          <a:p>
-            <a:pPr algn="l"/>
-            <a:r>
-              <a:rPr sz="1100" b="1" i="0">
-                <a:solidFill>
-                  <a:srgbClr val="A9C8F0"/>
-                </a:solidFill>
-                <a:latin typeface="Calibri"/>
-              </a:rPr>
-              <a:t>CORE COMPONENT  ·  Core Paper 2</a:t>
-            </a:r>
-          </a:p>
-        </p:txBody>
-      </p:sp>
-      <p:sp>
-        <p:nvSpPr>
-          <p:cNvPr id="3" name="TextBox 2"/>
-          <p:cNvSpPr txBox="1"/>
-          <p:nvPr/>
-        </p:nvSpPr>
-        <p:spPr>
-          <a:xfrm>
-            <a:off x="548640" y="566928"/>
-            <a:ext cx="11094415" cy="822960"/>
-          </a:xfrm>
-          <a:prstGeom prst="rect">
-            <a:avLst/>
-          </a:prstGeom>
-          <a:noFill/>
-        </p:spPr>
-        <p:txBody>
-          <a:bodyPr wrap="square" anchor="ctr" lIns="0" rIns="0" tIns="0" bIns="0"/>
-          <a:lstStyle/>
-          <a:p>
-            <a:pPr algn="l"/>
-            <a:r>
-              <a:rPr sz="3200" b="1" i="0">
-                <a:solidFill>
-                  <a:srgbClr val="FFFFFF"/>
-                </a:solidFill>
-                <a:latin typeface="Cambria"/>
-              </a:rPr>
-              <a:t>Exit ticket</a:t>
-            </a:r>
-          </a:p>
-        </p:txBody>
-      </p:sp>
-      <p:sp>
-        <p:nvSpPr>
-          <p:cNvPr id="4" name="Oval 3"/>
-          <p:cNvSpPr/>
-          <p:nvPr/>
-        </p:nvSpPr>
-        <p:spPr>
-          <a:xfrm>
-            <a:off x="548640" y="1737360"/>
-            <a:ext cx="502920" cy="502920"/>
-          </a:xfrm>
-          <a:prstGeom prst="ellipse">
-            <a:avLst/>
-          </a:prstGeom>
-          <a:solidFill>
-            <a:srgbClr val="F2B705"/>
-          </a:solidFill>
-          <a:ln>
-            <a:noFill/>
-          </a:ln>
-          <a:effectLst/>
-        </p:spPr>
-        <p:style>
-          <a:lnRef idx="1">
-            <a:schemeClr val="accent1"/>
-          </a:lnRef>
-          <a:fillRef idx="3">
-            <a:schemeClr val="accent1"/>
-          </a:fillRef>
-          <a:effectRef idx="2">
-            <a:schemeClr val="accent1"/>
-          </a:effectRef>
-          <a:fontRef idx="minor">
-            <a:schemeClr val="lt1"/>
-          </a:fontRef>
-        </p:style>
-        <p:txBody>
-          <a:bodyPr rtlCol="0" anchor="ctr" lIns="0" rIns="0" tIns="0" bIns="0"/>
-          <a:lstStyle/>
-          <a:p>
-            <a:pPr algn="ctr"/>
-            <a:r>
-              <a:rPr sz="1700" b="1">
-                <a:solidFill>
-                  <a:srgbClr val="202122"/>
-                </a:solidFill>
-                <a:latin typeface="Calibri"/>
-              </a:rPr>
-              <a:t>1</a:t>
-            </a:r>
-          </a:p>
-        </p:txBody>
-      </p:sp>
-      <p:sp>
-        <p:nvSpPr>
-          <p:cNvPr id="5" name="TextBox 4"/>
-          <p:cNvSpPr txBox="1"/>
-          <p:nvPr/>
-        </p:nvSpPr>
-        <p:spPr>
-          <a:xfrm>
-            <a:off x="1325880" y="1645920"/>
-            <a:ext cx="6583680" cy="822960"/>
-          </a:xfrm>
-          <a:prstGeom prst="rect">
-            <a:avLst/>
-          </a:prstGeom>
-          <a:noFill/>
-        </p:spPr>
-        <p:txBody>
-          <a:bodyPr wrap="square" anchor="ctr" lIns="0" rIns="0" tIns="0" bIns="0"/>
-          <a:lstStyle/>
-          <a:p>
-            <a:pPr algn="l"/>
-            <a:r>
-              <a:rPr sz="2000" b="0" i="0">
-                <a:solidFill>
-                  <a:srgbClr val="FFFFFF"/>
-                </a:solidFill>
-                <a:latin typeface="Calibri"/>
-              </a:rPr>
-              <a:t>Which regulation covers lifting a server?</a:t>
-            </a:r>
-          </a:p>
-        </p:txBody>
-      </p:sp>
-      <p:sp>
-        <p:nvSpPr>
-          <p:cNvPr id="6" name="Oval 5"/>
-          <p:cNvSpPr/>
-          <p:nvPr/>
-        </p:nvSpPr>
-        <p:spPr>
-          <a:xfrm>
-            <a:off x="548640" y="2697480"/>
-            <a:ext cx="502920" cy="502920"/>
-          </a:xfrm>
-          <a:prstGeom prst="ellipse">
-            <a:avLst/>
-          </a:prstGeom>
-          <a:solidFill>
-            <a:srgbClr val="F2B705"/>
-          </a:solidFill>
-          <a:ln>
-            <a:noFill/>
-          </a:ln>
-          <a:effectLst/>
-        </p:spPr>
-        <p:style>
-          <a:lnRef idx="1">
-            <a:schemeClr val="accent1"/>
-          </a:lnRef>
-          <a:fillRef idx="3">
-            <a:schemeClr val="accent1"/>
-          </a:fillRef>
-          <a:effectRef idx="2">
-            <a:schemeClr val="accent1"/>
-          </a:effectRef>
-          <a:fontRef idx="minor">
-            <a:schemeClr val="lt1"/>
-          </a:fontRef>
-        </p:style>
-        <p:txBody>
-          <a:bodyPr rtlCol="0" anchor="ctr" lIns="0" rIns="0" tIns="0" bIns="0"/>
-          <a:lstStyle/>
-          <a:p>
-            <a:pPr algn="ctr"/>
-            <a:r>
-              <a:rPr sz="1700" b="1">
-                <a:solidFill>
-                  <a:srgbClr val="202122"/>
-                </a:solidFill>
-                <a:latin typeface="Calibri"/>
-              </a:rPr>
-              <a:t>2</a:t>
-            </a:r>
-          </a:p>
-        </p:txBody>
-      </p:sp>
-      <p:sp>
-        <p:nvSpPr>
-          <p:cNvPr id="7" name="TextBox 6"/>
-          <p:cNvSpPr txBox="1"/>
-          <p:nvPr/>
-        </p:nvSpPr>
-        <p:spPr>
-          <a:xfrm>
-            <a:off x="1325880" y="2606040"/>
-            <a:ext cx="6583680" cy="822960"/>
-          </a:xfrm>
-          <a:prstGeom prst="rect">
-            <a:avLst/>
-          </a:prstGeom>
-          <a:noFill/>
-        </p:spPr>
-        <p:txBody>
-          <a:bodyPr wrap="square" anchor="ctr" lIns="0" rIns="0" tIns="0" bIns="0"/>
-          <a:lstStyle/>
-          <a:p>
-            <a:pPr algn="l"/>
-            <a:r>
-              <a:rPr sz="2000" b="0" i="0">
-                <a:solidFill>
-                  <a:srgbClr val="FFFFFF"/>
-                </a:solidFill>
-                <a:latin typeface="Calibri"/>
-              </a:rPr>
-              <a:t>Why do DSE users need regular breaks?</a:t>
-            </a:r>
-          </a:p>
-        </p:txBody>
-      </p:sp>
-      <p:sp>
-        <p:nvSpPr>
-          <p:cNvPr id="8" name="Oval 7"/>
-          <p:cNvSpPr/>
-          <p:nvPr/>
-        </p:nvSpPr>
-        <p:spPr>
-          <a:xfrm>
-            <a:off x="548640" y="3657600"/>
-            <a:ext cx="502920" cy="502920"/>
-          </a:xfrm>
-          <a:prstGeom prst="ellipse">
-            <a:avLst/>
-          </a:prstGeom>
-          <a:solidFill>
-            <a:srgbClr val="F2B705"/>
-          </a:solidFill>
-          <a:ln>
-            <a:noFill/>
-          </a:ln>
-          <a:effectLst/>
-        </p:spPr>
-        <p:style>
-          <a:lnRef idx="1">
-            <a:schemeClr val="accent1"/>
-          </a:lnRef>
-          <a:fillRef idx="3">
-            <a:schemeClr val="accent1"/>
-          </a:fillRef>
-          <a:effectRef idx="2">
-            <a:schemeClr val="accent1"/>
-          </a:effectRef>
-          <a:fontRef idx="minor">
-            <a:schemeClr val="lt1"/>
-          </a:fontRef>
-        </p:style>
-        <p:txBody>
-          <a:bodyPr rtlCol="0" anchor="ctr" lIns="0" rIns="0" tIns="0" bIns="0"/>
-          <a:lstStyle/>
-          <a:p>
-            <a:pPr algn="ctr"/>
-            <a:r>
-              <a:rPr sz="1700" b="1">
-                <a:solidFill>
-                  <a:srgbClr val="202122"/>
-                </a:solidFill>
-                <a:latin typeface="Calibri"/>
-              </a:rPr>
-              <a:t>3</a:t>
-            </a:r>
-          </a:p>
-        </p:txBody>
-      </p:sp>
-      <p:sp>
-        <p:nvSpPr>
-          <p:cNvPr id="9" name="TextBox 8"/>
-          <p:cNvSpPr txBox="1"/>
-          <p:nvPr/>
-        </p:nvSpPr>
-        <p:spPr>
-          <a:xfrm>
-            <a:off x="1325880" y="3566160"/>
-            <a:ext cx="6583680" cy="822960"/>
-          </a:xfrm>
-          <a:prstGeom prst="rect">
-            <a:avLst/>
-          </a:prstGeom>
-          <a:noFill/>
-        </p:spPr>
-        <p:txBody>
-          <a:bodyPr wrap="square" anchor="ctr" lIns="0" rIns="0" tIns="0" bIns="0"/>
-          <a:lstStyle/>
-          <a:p>
-            <a:pPr algn="l"/>
-            <a:r>
-              <a:rPr sz="2000" b="0" i="0">
-                <a:solidFill>
-                  <a:srgbClr val="FFFFFF"/>
-                </a:solidFill>
-                <a:latin typeface="Calibri"/>
-              </a:rPr>
-              <a:t>Name one hazard of installing cabling in a ceiling.</a:t>
-            </a:r>
-          </a:p>
-        </p:txBody>
-      </p:sp>
-      <p:sp>
-        <p:nvSpPr>
-          <p:cNvPr id="10" name="Rounded Rectangle 9"/>
-          <p:cNvSpPr/>
-          <p:nvPr/>
-        </p:nvSpPr>
-        <p:spPr>
-          <a:xfrm>
-            <a:off x="8229600" y="1645920"/>
-            <a:ext cx="3410712" cy="2926080"/>
-          </a:xfrm>
-          <a:prstGeom prst="roundRect">
-            <a:avLst>
-              <a:gd name="adj" fmla="val 8000"/>
-            </a:avLst>
-          </a:prstGeom>
-          <a:solidFill>
-            <a:srgbClr val="0645AD"/>
-          </a:solidFill>
-          <a:ln>
-            <a:noFill/>
-          </a:ln>
-          <a:effectLst/>
-        </p:spPr>
-        <p:style>
-          <a:lnRef idx="1">
-            <a:schemeClr val="accent1"/>
-          </a:lnRef>
-          <a:fillRef idx="3">
-            <a:schemeClr val="accent1"/>
-          </a:fillRef>
-          <a:effectRef idx="2">
-            <a:schemeClr val="accent1"/>
-          </a:effectRef>
-          <a:fontRef idx="minor">
-            <a:schemeClr val="lt1"/>
-          </a:fontRef>
-        </p:style>
-        <p:txBody>
-          <a:bodyPr rtlCol="0" anchor="ctr"/>
-          <a:lstStyle/>
-          <a:p/>
-        </p:txBody>
-      </p:sp>
-      <p:sp>
-        <p:nvSpPr>
-          <p:cNvPr id="11" name="TextBox 10"/>
-          <p:cNvSpPr txBox="1"/>
-          <p:nvPr/>
-        </p:nvSpPr>
-        <p:spPr>
-          <a:xfrm>
-            <a:off x="8503920" y="1874519"/>
-            <a:ext cx="2926080" cy="365760"/>
-          </a:xfrm>
-          <a:prstGeom prst="rect">
-            <a:avLst/>
-          </a:prstGeom>
-          <a:noFill/>
-        </p:spPr>
-        <p:txBody>
-          <a:bodyPr wrap="square" anchor="t" lIns="0" rIns="0" tIns="0" bIns="0"/>
-          <a:lstStyle/>
-          <a:p>
-            <a:pPr algn="l"/>
-            <a:r>
-              <a:rPr sz="1300" b="1" i="0">
-                <a:solidFill>
-                  <a:srgbClr val="A9C8F0"/>
-                </a:solidFill>
-                <a:latin typeface="Calibri"/>
-              </a:rPr>
-              <a:t>REVISE THIS TOPIC</a:t>
-            </a:r>
-          </a:p>
-        </p:txBody>
-      </p:sp>
-      <p:sp>
-        <p:nvSpPr>
-          <p:cNvPr id="12" name="TextBox 11"/>
-          <p:cNvSpPr txBox="1"/>
-          <p:nvPr/>
-        </p:nvSpPr>
-        <p:spPr>
-          <a:xfrm>
-            <a:off x="8503920" y="2286000"/>
-            <a:ext cx="2926080" cy="548640"/>
-          </a:xfrm>
-          <a:prstGeom prst="rect">
-            <a:avLst/>
-          </a:prstGeom>
-          <a:noFill/>
-        </p:spPr>
-        <p:txBody>
-          <a:bodyPr wrap="square" anchor="t" lIns="0" rIns="0" tIns="0" bIns="0"/>
-          <a:lstStyle/>
-          <a:p>
-            <a:pPr algn="l"/>
-            <a:r>
-              <a:rPr sz="1400" b="0" i="0">
-                <a:solidFill>
-                  <a:srgbClr val="FFFFFF"/>
-                </a:solidFill>
-                <a:latin typeface="Calibri"/>
-              </a:rPr>
-              <a:t>Revision notes for this lesson are on the study wiki:</a:t>
-            </a:r>
-          </a:p>
-        </p:txBody>
-      </p:sp>
-      <p:sp>
-        <p:nvSpPr>
-          <p:cNvPr id="13" name="TextBox 12"/>
-          <p:cNvSpPr txBox="1"/>
-          <p:nvPr/>
-        </p:nvSpPr>
-        <p:spPr>
-          <a:xfrm>
-            <a:off x="8503920" y="2926080"/>
-            <a:ext cx="2926080" cy="1463040"/>
-          </a:xfrm>
-          <a:prstGeom prst="rect">
-            <a:avLst/>
-          </a:prstGeom>
-          <a:noFill/>
-        </p:spPr>
-        <p:txBody>
-          <a:bodyPr wrap="square" anchor="t" lIns="0" rIns="0" tIns="0" bIns="0"/>
-          <a:lstStyle/>
-          <a:p>
-            <a:pPr algn="l"/>
-            <a:r>
-              <a:rPr sz="2000" b="1" i="0">
-                <a:solidFill>
-                  <a:srgbClr val="FFFFFF"/>
-                </a:solidFill>
-                <a:latin typeface="Cambria"/>
-              </a:rPr>
-              <a:t>Core Paper 2: Legislation, Business, Emerging Issues, Environments and Security</a:t>
-            </a:r>
-          </a:p>
-        </p:txBody>
-      </p:sp>
-      <p:sp>
-        <p:nvSpPr>
-          <p:cNvPr id="14" name="TextBox 13"/>
-          <p:cNvSpPr txBox="1"/>
-          <p:nvPr/>
-        </p:nvSpPr>
-        <p:spPr>
-          <a:xfrm>
-            <a:off x="548640" y="5669280"/>
-            <a:ext cx="11094415" cy="548640"/>
-          </a:xfrm>
-          <a:prstGeom prst="rect">
-            <a:avLst/>
-          </a:prstGeom>
-          <a:noFill/>
-        </p:spPr>
-        <p:txBody>
-          <a:bodyPr wrap="square" anchor="t" lIns="0" rIns="0" tIns="0" bIns="0"/>
-          <a:lstStyle/>
-          <a:p>
-            <a:pPr algn="l"/>
-            <a:r>
-              <a:rPr sz="1200" b="0" i="0">
-                <a:solidFill>
-                  <a:srgbClr val="A9C8F0"/>
-                </a:solidFill>
-                <a:latin typeface="Calibri"/>
-              </a:rPr>
-              <a:t>https://lana6478.github.io/Digital-Suport-and-security-T-levle/#/01-core-component/02-core-paper-2.md</a:t>
-            </a:r>
-          </a:p>
-        </p:txBody>
-      </p:sp>
-    </p:spTree>
-  </p:cSld>
-  <p:clrMapOvr>
-    <a:masterClrMapping/>
-  </p:clrMapOvr>
-</p:sld>
-</file>
-
-<file path=ppt/slides/slide2.xml><?xml version="1.0" encoding="utf-8"?>
-<p:sld xmlns:a="http://schemas.openxmlformats.org/drawingml/2006/main" xmlns:p="http://schemas.openxmlformats.org/presentationml/2006/main" xmlns:r="http://schemas.openxmlformats.org/officeDocument/2006/relationships">
-  <p:cSld>
-    <p:bg>
-      <p:bgPr>
-        <a:solidFill>
           <a:srgbClr val="FFFFFF"/>
         </a:solidFill>
         <a:effectLst/>
@@ -4721,7 +4456,7 @@
                 </a:solidFill>
                 <a:latin typeface="Cambria"/>
               </a:rPr>
-              <a:t>Learning objectives</a:t>
+              <a:t>Risks in digital work and how to reduce them</a:t>
             </a:r>
           </a:p>
         </p:txBody>
@@ -4787,1727 +4522,7 @@
                 </a:solidFill>
                 <a:latin typeface="Calibri"/>
               </a:rPr>
-              <a:t>2</a:t>
-            </a:r>
-          </a:p>
-        </p:txBody>
-      </p:sp>
-      <p:sp>
-        <p:nvSpPr>
-          <p:cNvPr id="6" name="TextBox 5"/>
-          <p:cNvSpPr txBox="1"/>
-          <p:nvPr/>
-        </p:nvSpPr>
-        <p:spPr>
-          <a:xfrm>
-            <a:off x="548640" y="1508760"/>
-            <a:ext cx="6766560" cy="365760"/>
-          </a:xfrm>
-          <a:prstGeom prst="rect">
-            <a:avLst/>
-          </a:prstGeom>
-          <a:noFill/>
-        </p:spPr>
-        <p:txBody>
-          <a:bodyPr wrap="square" anchor="t" lIns="0" rIns="0" tIns="0" bIns="0"/>
-          <a:lstStyle/>
-          <a:p>
-            <a:pPr algn="l"/>
-            <a:r>
-              <a:rPr sz="1600" b="0" i="1">
-                <a:solidFill>
-                  <a:srgbClr val="54595D"/>
-                </a:solidFill>
-                <a:latin typeface="Calibri"/>
-              </a:rPr>
-              <a:t>By the end of this lesson you should be able to:</a:t>
-            </a:r>
-          </a:p>
-        </p:txBody>
-      </p:sp>
-      <p:sp>
-        <p:nvSpPr>
-          <p:cNvPr id="7" name="Oval 6"/>
-          <p:cNvSpPr/>
-          <p:nvPr/>
-        </p:nvSpPr>
-        <p:spPr>
-          <a:xfrm>
-            <a:off x="548640" y="2234565"/>
-            <a:ext cx="457200" cy="457200"/>
-          </a:xfrm>
-          <a:prstGeom prst="ellipse">
-            <a:avLst/>
-          </a:prstGeom>
-          <a:solidFill>
-            <a:srgbClr val="F2B705"/>
-          </a:solidFill>
-          <a:ln>
-            <a:noFill/>
-          </a:ln>
-          <a:effectLst/>
-        </p:spPr>
-        <p:style>
-          <a:lnRef idx="1">
-            <a:schemeClr val="accent1"/>
-          </a:lnRef>
-          <a:fillRef idx="3">
-            <a:schemeClr val="accent1"/>
-          </a:fillRef>
-          <a:effectRef idx="2">
-            <a:schemeClr val="accent1"/>
-          </a:effectRef>
-          <a:fontRef idx="minor">
-            <a:schemeClr val="lt1"/>
-          </a:fontRef>
-        </p:style>
-        <p:txBody>
-          <a:bodyPr rtlCol="0" anchor="ctr" lIns="0" rIns="0" tIns="0" bIns="0"/>
-          <a:lstStyle/>
-          <a:p>
-            <a:pPr algn="ctr"/>
-            <a:r>
-              <a:rPr sz="1600" b="1">
-                <a:solidFill>
-                  <a:srgbClr val="202122"/>
-                </a:solidFill>
-                <a:latin typeface="Calibri"/>
-              </a:rPr>
-              <a:t>1</a:t>
-            </a:r>
-          </a:p>
-        </p:txBody>
-      </p:sp>
-      <p:sp>
-        <p:nvSpPr>
-          <p:cNvPr id="8" name="TextBox 7"/>
-          <p:cNvSpPr txBox="1"/>
-          <p:nvPr/>
-        </p:nvSpPr>
-        <p:spPr>
-          <a:xfrm>
-            <a:off x="1234440" y="2011680"/>
-            <a:ext cx="6035040" cy="902969"/>
-          </a:xfrm>
-          <a:prstGeom prst="rect">
-            <a:avLst/>
-          </a:prstGeom>
-          <a:noFill/>
-        </p:spPr>
-        <p:txBody>
-          <a:bodyPr wrap="square" anchor="ctr" lIns="0" rIns="0" tIns="0" bIns="0"/>
-          <a:lstStyle/>
-          <a:p>
-            <a:pPr algn="l"/>
-            <a:r>
-              <a:rPr sz="2000" b="0" i="0">
-                <a:solidFill>
-                  <a:srgbClr val="202122"/>
-                </a:solidFill>
-                <a:latin typeface="Calibri"/>
-              </a:rPr>
-              <a:t>Describe employer duties under the Health and Safety at Work Act.</a:t>
-            </a:r>
-          </a:p>
-        </p:txBody>
-      </p:sp>
-      <p:sp>
-        <p:nvSpPr>
-          <p:cNvPr id="9" name="Oval 8"/>
-          <p:cNvSpPr/>
-          <p:nvPr/>
-        </p:nvSpPr>
-        <p:spPr>
-          <a:xfrm>
-            <a:off x="548640" y="3274695"/>
-            <a:ext cx="457200" cy="457200"/>
-          </a:xfrm>
-          <a:prstGeom prst="ellipse">
-            <a:avLst/>
-          </a:prstGeom>
-          <a:solidFill>
-            <a:srgbClr val="F2B705"/>
-          </a:solidFill>
-          <a:ln>
-            <a:noFill/>
-          </a:ln>
-          <a:effectLst/>
-        </p:spPr>
-        <p:style>
-          <a:lnRef idx="1">
-            <a:schemeClr val="accent1"/>
-          </a:lnRef>
-          <a:fillRef idx="3">
-            <a:schemeClr val="accent1"/>
-          </a:fillRef>
-          <a:effectRef idx="2">
-            <a:schemeClr val="accent1"/>
-          </a:effectRef>
-          <a:fontRef idx="minor">
-            <a:schemeClr val="lt1"/>
-          </a:fontRef>
-        </p:style>
-        <p:txBody>
-          <a:bodyPr rtlCol="0" anchor="ctr" lIns="0" rIns="0" tIns="0" bIns="0"/>
-          <a:lstStyle/>
-          <a:p>
-            <a:pPr algn="ctr"/>
-            <a:r>
-              <a:rPr sz="1600" b="1">
-                <a:solidFill>
-                  <a:srgbClr val="202122"/>
-                </a:solidFill>
-                <a:latin typeface="Calibri"/>
-              </a:rPr>
-              <a:t>2</a:t>
-            </a:r>
-          </a:p>
-        </p:txBody>
-      </p:sp>
-      <p:sp>
-        <p:nvSpPr>
-          <p:cNvPr id="10" name="TextBox 9"/>
-          <p:cNvSpPr txBox="1"/>
-          <p:nvPr/>
-        </p:nvSpPr>
-        <p:spPr>
-          <a:xfrm>
-            <a:off x="1234440" y="3051810"/>
-            <a:ext cx="6035040" cy="902969"/>
-          </a:xfrm>
-          <a:prstGeom prst="rect">
-            <a:avLst/>
-          </a:prstGeom>
-          <a:noFill/>
-        </p:spPr>
-        <p:txBody>
-          <a:bodyPr wrap="square" anchor="ctr" lIns="0" rIns="0" tIns="0" bIns="0"/>
-          <a:lstStyle/>
-          <a:p>
-            <a:pPr algn="l"/>
-            <a:r>
-              <a:rPr sz="2000" b="0" i="0">
-                <a:solidFill>
-                  <a:srgbClr val="202122"/>
-                </a:solidFill>
-                <a:latin typeface="Calibri"/>
-              </a:rPr>
-              <a:t>Explain the manual handling, work at height and DSE regulations.</a:t>
-            </a:r>
-          </a:p>
-        </p:txBody>
-      </p:sp>
-      <p:sp>
-        <p:nvSpPr>
-          <p:cNvPr id="11" name="Oval 10"/>
-          <p:cNvSpPr/>
-          <p:nvPr/>
-        </p:nvSpPr>
-        <p:spPr>
-          <a:xfrm>
-            <a:off x="548640" y="4314825"/>
-            <a:ext cx="457200" cy="457200"/>
-          </a:xfrm>
-          <a:prstGeom prst="ellipse">
-            <a:avLst/>
-          </a:prstGeom>
-          <a:solidFill>
-            <a:srgbClr val="F2B705"/>
-          </a:solidFill>
-          <a:ln>
-            <a:noFill/>
-          </a:ln>
-          <a:effectLst/>
-        </p:spPr>
-        <p:style>
-          <a:lnRef idx="1">
-            <a:schemeClr val="accent1"/>
-          </a:lnRef>
-          <a:fillRef idx="3">
-            <a:schemeClr val="accent1"/>
-          </a:fillRef>
-          <a:effectRef idx="2">
-            <a:schemeClr val="accent1"/>
-          </a:effectRef>
-          <a:fontRef idx="minor">
-            <a:schemeClr val="lt1"/>
-          </a:fontRef>
-        </p:style>
-        <p:txBody>
-          <a:bodyPr rtlCol="0" anchor="ctr" lIns="0" rIns="0" tIns="0" bIns="0"/>
-          <a:lstStyle/>
-          <a:p>
-            <a:pPr algn="ctr"/>
-            <a:r>
-              <a:rPr sz="1600" b="1">
-                <a:solidFill>
-                  <a:srgbClr val="202122"/>
-                </a:solidFill>
-                <a:latin typeface="Calibri"/>
-              </a:rPr>
-              <a:t>3</a:t>
-            </a:r>
-          </a:p>
-        </p:txBody>
-      </p:sp>
-      <p:sp>
-        <p:nvSpPr>
-          <p:cNvPr id="12" name="TextBox 11"/>
-          <p:cNvSpPr txBox="1"/>
-          <p:nvPr/>
-        </p:nvSpPr>
-        <p:spPr>
-          <a:xfrm>
-            <a:off x="1234440" y="4091939"/>
-            <a:ext cx="6035040" cy="902969"/>
-          </a:xfrm>
-          <a:prstGeom prst="rect">
-            <a:avLst/>
-          </a:prstGeom>
-          <a:noFill/>
-        </p:spPr>
-        <p:txBody>
-          <a:bodyPr wrap="square" anchor="ctr" lIns="0" rIns="0" tIns="0" bIns="0"/>
-          <a:lstStyle/>
-          <a:p>
-            <a:pPr algn="l"/>
-            <a:r>
-              <a:rPr sz="2000" b="0" i="0">
-                <a:solidFill>
-                  <a:srgbClr val="202122"/>
-                </a:solidFill>
-                <a:latin typeface="Calibri"/>
-              </a:rPr>
-              <a:t>Identify the main health and safety risks of digital work.</a:t>
-            </a:r>
-          </a:p>
-        </p:txBody>
-      </p:sp>
-      <p:sp>
-        <p:nvSpPr>
-          <p:cNvPr id="13" name="Oval 12"/>
-          <p:cNvSpPr/>
-          <p:nvPr/>
-        </p:nvSpPr>
-        <p:spPr>
-          <a:xfrm>
-            <a:off x="548640" y="5354954"/>
-            <a:ext cx="457200" cy="457200"/>
-          </a:xfrm>
-          <a:prstGeom prst="ellipse">
-            <a:avLst/>
-          </a:prstGeom>
-          <a:solidFill>
-            <a:srgbClr val="F2B705"/>
-          </a:solidFill>
-          <a:ln>
-            <a:noFill/>
-          </a:ln>
-          <a:effectLst/>
-        </p:spPr>
-        <p:style>
-          <a:lnRef idx="1">
-            <a:schemeClr val="accent1"/>
-          </a:lnRef>
-          <a:fillRef idx="3">
-            <a:schemeClr val="accent1"/>
-          </a:fillRef>
-          <a:effectRef idx="2">
-            <a:schemeClr val="accent1"/>
-          </a:effectRef>
-          <a:fontRef idx="minor">
-            <a:schemeClr val="lt1"/>
-          </a:fontRef>
-        </p:style>
-        <p:txBody>
-          <a:bodyPr rtlCol="0" anchor="ctr" lIns="0" rIns="0" tIns="0" bIns="0"/>
-          <a:lstStyle/>
-          <a:p>
-            <a:pPr algn="ctr"/>
-            <a:r>
-              <a:rPr sz="1600" b="1">
-                <a:solidFill>
-                  <a:srgbClr val="202122"/>
-                </a:solidFill>
-                <a:latin typeface="Calibri"/>
-              </a:rPr>
-              <a:t>4</a:t>
-            </a:r>
-          </a:p>
-        </p:txBody>
-      </p:sp>
-      <p:sp>
-        <p:nvSpPr>
-          <p:cNvPr id="14" name="TextBox 13"/>
-          <p:cNvSpPr txBox="1"/>
-          <p:nvPr/>
-        </p:nvSpPr>
-        <p:spPr>
-          <a:xfrm>
-            <a:off x="1234440" y="5132069"/>
-            <a:ext cx="6035040" cy="902969"/>
-          </a:xfrm>
-          <a:prstGeom prst="rect">
-            <a:avLst/>
-          </a:prstGeom>
-          <a:noFill/>
-        </p:spPr>
-        <p:txBody>
-          <a:bodyPr wrap="square" anchor="ctr" lIns="0" rIns="0" tIns="0" bIns="0"/>
-          <a:lstStyle/>
-          <a:p>
-            <a:pPr algn="l"/>
-            <a:r>
-              <a:rPr sz="2000" b="0" i="0">
-                <a:solidFill>
-                  <a:srgbClr val="202122"/>
-                </a:solidFill>
-                <a:latin typeface="Calibri"/>
-              </a:rPr>
-              <a:t>Recommend suitable mitigations for each risk.</a:t>
-            </a:r>
-          </a:p>
-        </p:txBody>
-      </p:sp>
-      <p:sp>
-        <p:nvSpPr>
-          <p:cNvPr id="15" name="Rounded Rectangle 14"/>
-          <p:cNvSpPr/>
-          <p:nvPr/>
-        </p:nvSpPr>
-        <p:spPr>
-          <a:xfrm>
-            <a:off x="7772400" y="1508760"/>
-            <a:ext cx="3867912" cy="4526280"/>
-          </a:xfrm>
-          <a:prstGeom prst="roundRect">
-            <a:avLst>
-              <a:gd name="adj" fmla="val 8000"/>
-            </a:avLst>
-          </a:prstGeom>
-          <a:solidFill>
-            <a:srgbClr val="EAF3FF"/>
-          </a:solidFill>
-          <a:ln>
-            <a:noFill/>
-          </a:ln>
-          <a:effectLst/>
-        </p:spPr>
-        <p:style>
-          <a:lnRef idx="1">
-            <a:schemeClr val="accent1"/>
-          </a:lnRef>
-          <a:fillRef idx="3">
-            <a:schemeClr val="accent1"/>
-          </a:fillRef>
-          <a:effectRef idx="2">
-            <a:schemeClr val="accent1"/>
-          </a:effectRef>
-          <a:fontRef idx="minor">
-            <a:schemeClr val="lt1"/>
-          </a:fontRef>
-        </p:style>
-        <p:txBody>
-          <a:bodyPr rtlCol="0" anchor="ctr"/>
-          <a:lstStyle/>
-          <a:p/>
-        </p:txBody>
-      </p:sp>
-      <p:sp>
-        <p:nvSpPr>
-          <p:cNvPr id="16" name="TextBox 15"/>
-          <p:cNvSpPr txBox="1"/>
-          <p:nvPr/>
-        </p:nvSpPr>
-        <p:spPr>
-          <a:xfrm>
-            <a:off x="8046720" y="1737360"/>
-            <a:ext cx="3291840" cy="365760"/>
-          </a:xfrm>
-          <a:prstGeom prst="rect">
-            <a:avLst/>
-          </a:prstGeom>
-          <a:noFill/>
-        </p:spPr>
-        <p:txBody>
-          <a:bodyPr wrap="square" anchor="t" lIns="0" rIns="0" tIns="0" bIns="0"/>
-          <a:lstStyle/>
-          <a:p>
-            <a:pPr algn="l"/>
-            <a:r>
-              <a:rPr sz="1300" b="1" i="0">
-                <a:solidFill>
-                  <a:srgbClr val="0645AD"/>
-                </a:solidFill>
-                <a:latin typeface="Calibri"/>
-              </a:rPr>
-              <a:t>STARTER</a:t>
-            </a:r>
-          </a:p>
-        </p:txBody>
-      </p:sp>
-      <p:sp>
-        <p:nvSpPr>
-          <p:cNvPr id="17" name="TextBox 16"/>
-          <p:cNvSpPr txBox="1"/>
-          <p:nvPr/>
-        </p:nvSpPr>
-        <p:spPr>
-          <a:xfrm>
-            <a:off x="8046720" y="2194560"/>
-            <a:ext cx="3291840" cy="3657600"/>
-          </a:xfrm>
-          <a:prstGeom prst="rect">
-            <a:avLst/>
-          </a:prstGeom>
-          <a:noFill/>
-        </p:spPr>
-        <p:txBody>
-          <a:bodyPr wrap="square" anchor="t" lIns="0" rIns="0" tIns="0" bIns="0"/>
-          <a:lstStyle/>
-          <a:p>
-            <a:pPr algn="l"/>
-            <a:r>
-              <a:rPr sz="2200" b="0" i="0">
-                <a:solidFill>
-                  <a:srgbClr val="03306E"/>
-                </a:solidFill>
-                <a:latin typeface="Cambria"/>
-              </a:rPr>
-              <a:t>Look around this room. List every hazard you can see that could hurt someone working in IT here.</a:t>
-            </a:r>
-          </a:p>
-        </p:txBody>
-      </p:sp>
-    </p:spTree>
-  </p:cSld>
-  <p:clrMapOvr>
-    <a:masterClrMapping/>
-  </p:clrMapOvr>
-</p:sld>
-</file>
-
-<file path=ppt/slides/slide3.xml><?xml version="1.0" encoding="utf-8"?>
-<p:sld xmlns:a="http://schemas.openxmlformats.org/drawingml/2006/main" xmlns:p="http://schemas.openxmlformats.org/presentationml/2006/main" xmlns:r="http://schemas.openxmlformats.org/officeDocument/2006/relationships">
-  <p:cSld>
-    <p:bg>
-      <p:bgPr>
-        <a:solidFill>
-          <a:srgbClr val="FFFFFF"/>
-        </a:solidFill>
-        <a:effectLst/>
-      </p:bgPr>
-    </p:bg>
-    <p:spTree>
-      <p:nvGrpSpPr>
-        <p:cNvPr id="1" name=""/>
-        <p:cNvGrpSpPr/>
-        <p:nvPr/>
-      </p:nvGrpSpPr>
-      <p:grpSpPr/>
-      <p:sp>
-        <p:nvSpPr>
-          <p:cNvPr id="2" name="TextBox 1"/>
-          <p:cNvSpPr txBox="1"/>
-          <p:nvPr/>
-        </p:nvSpPr>
-        <p:spPr>
-          <a:xfrm>
-            <a:off x="548640" y="320040"/>
-            <a:ext cx="11094415" cy="274320"/>
-          </a:xfrm>
-          <a:prstGeom prst="rect">
-            <a:avLst/>
-          </a:prstGeom>
-          <a:noFill/>
-        </p:spPr>
-        <p:txBody>
-          <a:bodyPr wrap="square" anchor="t" lIns="0" rIns="0" tIns="0" bIns="0"/>
-          <a:lstStyle/>
-          <a:p>
-            <a:pPr algn="l"/>
-            <a:r>
-              <a:rPr sz="1100" b="1" i="0">
-                <a:solidFill>
-                  <a:srgbClr val="54595D"/>
-                </a:solidFill>
-                <a:latin typeface="Calibri"/>
-              </a:rPr>
-              <a:t>CORE COMPONENT  ·  Core Paper 2</a:t>
-            </a:r>
-          </a:p>
-        </p:txBody>
-      </p:sp>
-      <p:sp>
-        <p:nvSpPr>
-          <p:cNvPr id="3" name="TextBox 2"/>
-          <p:cNvSpPr txBox="1"/>
-          <p:nvPr/>
-        </p:nvSpPr>
-        <p:spPr>
-          <a:xfrm>
-            <a:off x="548640" y="566928"/>
-            <a:ext cx="11094415" cy="822960"/>
-          </a:xfrm>
-          <a:prstGeom prst="rect">
-            <a:avLst/>
-          </a:prstGeom>
-          <a:noFill/>
-        </p:spPr>
-        <p:txBody>
-          <a:bodyPr wrap="square" anchor="ctr" lIns="0" rIns="0" tIns="0" bIns="0"/>
-          <a:lstStyle/>
-          <a:p>
-            <a:pPr algn="l"/>
-            <a:r>
-              <a:rPr sz="3200" b="1" i="0">
-                <a:solidFill>
-                  <a:srgbClr val="03306E"/>
-                </a:solidFill>
-                <a:latin typeface="Cambria"/>
-              </a:rPr>
-              <a:t>Health and Safety at Work Act</a:t>
-            </a:r>
-          </a:p>
-        </p:txBody>
-      </p:sp>
-      <p:sp>
-        <p:nvSpPr>
-          <p:cNvPr id="4" name="TextBox 3"/>
-          <p:cNvSpPr txBox="1"/>
-          <p:nvPr/>
-        </p:nvSpPr>
-        <p:spPr>
-          <a:xfrm>
-            <a:off x="548640" y="6446520"/>
-            <a:ext cx="8229600" cy="274320"/>
-          </a:xfrm>
-          <a:prstGeom prst="rect">
-            <a:avLst/>
-          </a:prstGeom>
-          <a:noFill/>
-        </p:spPr>
-        <p:txBody>
-          <a:bodyPr wrap="square" anchor="t" lIns="0" rIns="0" tIns="0" bIns="0"/>
-          <a:lstStyle/>
-          <a:p>
-            <a:pPr algn="l"/>
-            <a:r>
-              <a:rPr sz="1000" b="0" i="0">
-                <a:solidFill>
-                  <a:srgbClr val="54595D"/>
-                </a:solidFill>
-                <a:latin typeface="Calibri"/>
-              </a:rPr>
-              <a:t>Digital Support and Security T Level  ·  Health and Safety in Digital Work</a:t>
-            </a:r>
-          </a:p>
-        </p:txBody>
-      </p:sp>
-      <p:sp>
-        <p:nvSpPr>
-          <p:cNvPr id="5" name="TextBox 4"/>
-          <p:cNvSpPr txBox="1"/>
-          <p:nvPr/>
-        </p:nvSpPr>
-        <p:spPr>
-          <a:xfrm>
-            <a:off x="10728655" y="6446520"/>
-            <a:ext cx="914400" cy="274320"/>
-          </a:xfrm>
-          <a:prstGeom prst="rect">
-            <a:avLst/>
-          </a:prstGeom>
-          <a:noFill/>
-        </p:spPr>
-        <p:txBody>
-          <a:bodyPr wrap="square" anchor="t" lIns="0" rIns="0" tIns="0" bIns="0"/>
-          <a:lstStyle/>
-          <a:p>
-            <a:pPr algn="r"/>
-            <a:r>
-              <a:rPr sz="1000" b="0" i="0">
-                <a:solidFill>
-                  <a:srgbClr val="54595D"/>
-                </a:solidFill>
-                <a:latin typeface="Calibri"/>
-              </a:rPr>
-              <a:t>3</a:t>
-            </a:r>
-          </a:p>
-        </p:txBody>
-      </p:sp>
-      <p:sp>
-        <p:nvSpPr>
-          <p:cNvPr id="6" name="TextBox 5"/>
-          <p:cNvSpPr txBox="1"/>
-          <p:nvPr/>
-        </p:nvSpPr>
-        <p:spPr>
-          <a:xfrm>
-            <a:off x="548640" y="1600200"/>
-            <a:ext cx="6675120" cy="4572000"/>
-          </a:xfrm>
-          <a:prstGeom prst="rect">
-            <a:avLst/>
-          </a:prstGeom>
-          <a:noFill/>
-        </p:spPr>
-        <p:txBody>
-          <a:bodyPr wrap="square" lIns="0" rIns="0" tIns="0" bIns="0">
-            <a:spAutoFit/>
-          </a:bodyPr>
-          <a:lstStyle/>
-          <a:p>
-            <a:pPr marL="274320" indent="-274320">
-              <a:spcAft>
-                <a:spcPts val="1080"/>
-              </a:spcAft>
-              <a:buClr>
-                <a:srgbClr val="0645AD"/>
-              </a:buClr>
-              <a:buFont typeface="Arial"/>
-              <a:buChar char="•"/>
-            </a:pPr>
-            <a:r>
-              <a:rPr sz="2400" b="0">
-                <a:solidFill>
-                  <a:srgbClr val="202122"/>
-                </a:solidFill>
-                <a:latin typeface="Calibri"/>
-              </a:rPr>
-              <a:t>Provide a safe working environment</a:t>
-            </a:r>
-          </a:p>
-          <a:p>
-            <a:pPr marL="274320" indent="-274320">
-              <a:spcAft>
-                <a:spcPts val="1080"/>
-              </a:spcAft>
-              <a:buClr>
-                <a:srgbClr val="0645AD"/>
-              </a:buClr>
-              <a:buFont typeface="Arial"/>
-              <a:buChar char="•"/>
-            </a:pPr>
-            <a:r>
-              <a:rPr sz="2400" b="0">
-                <a:solidFill>
-                  <a:srgbClr val="202122"/>
-                </a:solidFill>
-                <a:latin typeface="Calibri"/>
-              </a:rPr>
-              <a:t>Train staff properly</a:t>
-            </a:r>
-          </a:p>
-          <a:p>
-            <a:pPr marL="274320" indent="-274320">
-              <a:spcAft>
-                <a:spcPts val="1080"/>
-              </a:spcAft>
-              <a:buClr>
-                <a:srgbClr val="0645AD"/>
-              </a:buClr>
-              <a:buFont typeface="Arial"/>
-              <a:buChar char="•"/>
-            </a:pPr>
-            <a:r>
-              <a:rPr sz="2400" b="0">
-                <a:solidFill>
-                  <a:srgbClr val="202122"/>
-                </a:solidFill>
-                <a:latin typeface="Calibri"/>
-              </a:rPr>
-              <a:t>Provide adequate welfare facilities</a:t>
-            </a:r>
-          </a:p>
-          <a:p>
-            <a:pPr marL="274320" indent="-274320">
-              <a:spcAft>
-                <a:spcPts val="1080"/>
-              </a:spcAft>
-              <a:buClr>
-                <a:srgbClr val="0645AD"/>
-              </a:buClr>
-              <a:buFont typeface="Arial"/>
-              <a:buChar char="•"/>
-            </a:pPr>
-            <a:r>
-              <a:rPr sz="2400" b="0">
-                <a:solidFill>
-                  <a:srgbClr val="202122"/>
-                </a:solidFill>
-                <a:latin typeface="Calibri"/>
-              </a:rPr>
-              <a:t>Give relevant information, instruction and supervision</a:t>
-            </a:r>
-          </a:p>
-        </p:txBody>
-      </p:sp>
-      <p:sp>
-        <p:nvSpPr>
-          <p:cNvPr id="7" name="Rounded Rectangle 6"/>
-          <p:cNvSpPr/>
-          <p:nvPr/>
-        </p:nvSpPr>
-        <p:spPr>
-          <a:xfrm>
-            <a:off x="7772400" y="1600200"/>
-            <a:ext cx="3867912" cy="4434840"/>
-          </a:xfrm>
-          <a:prstGeom prst="roundRect">
-            <a:avLst>
-              <a:gd name="adj" fmla="val 8000"/>
-            </a:avLst>
-          </a:prstGeom>
-          <a:solidFill>
-            <a:srgbClr val="03306E"/>
-          </a:solidFill>
-          <a:ln>
-            <a:noFill/>
-          </a:ln>
-          <a:effectLst/>
-        </p:spPr>
-        <p:style>
-          <a:lnRef idx="1">
-            <a:schemeClr val="accent1"/>
-          </a:lnRef>
-          <a:fillRef idx="3">
-            <a:schemeClr val="accent1"/>
-          </a:fillRef>
-          <a:effectRef idx="2">
-            <a:schemeClr val="accent1"/>
-          </a:effectRef>
-          <a:fontRef idx="minor">
-            <a:schemeClr val="lt1"/>
-          </a:fontRef>
-        </p:style>
-        <p:txBody>
-          <a:bodyPr rtlCol="0" anchor="ctr"/>
-          <a:lstStyle/>
-          <a:p/>
-        </p:txBody>
-      </p:sp>
-      <p:sp>
-        <p:nvSpPr>
-          <p:cNvPr id="8" name="Oval 7"/>
-          <p:cNvSpPr/>
-          <p:nvPr/>
-        </p:nvSpPr>
-        <p:spPr>
-          <a:xfrm>
-            <a:off x="8046720" y="1874519"/>
-            <a:ext cx="548640" cy="548640"/>
-          </a:xfrm>
-          <a:prstGeom prst="ellipse">
-            <a:avLst/>
-          </a:prstGeom>
-          <a:solidFill>
-            <a:srgbClr val="F2B705"/>
-          </a:solidFill>
-          <a:ln>
-            <a:noFill/>
-          </a:ln>
-          <a:effectLst/>
-        </p:spPr>
-        <p:style>
-          <a:lnRef idx="1">
-            <a:schemeClr val="accent1"/>
-          </a:lnRef>
-          <a:fillRef idx="3">
-            <a:schemeClr val="accent1"/>
-          </a:fillRef>
-          <a:effectRef idx="2">
-            <a:schemeClr val="accent1"/>
-          </a:effectRef>
-          <a:fontRef idx="minor">
-            <a:schemeClr val="lt1"/>
-          </a:fontRef>
-        </p:style>
-        <p:txBody>
-          <a:bodyPr rtlCol="0" anchor="ctr" lIns="0" rIns="0" tIns="0" bIns="0"/>
-          <a:lstStyle/>
-          <a:p>
-            <a:pPr algn="ctr"/>
-            <a:r>
-              <a:rPr sz="2000" b="1">
-                <a:solidFill>
-                  <a:srgbClr val="202122"/>
-                </a:solidFill>
-                <a:latin typeface="Calibri"/>
-              </a:rPr>
-              <a:t>!</a:t>
-            </a:r>
-          </a:p>
-        </p:txBody>
-      </p:sp>
-      <p:sp>
-        <p:nvSpPr>
-          <p:cNvPr id="9" name="TextBox 8"/>
-          <p:cNvSpPr txBox="1"/>
-          <p:nvPr/>
-        </p:nvSpPr>
-        <p:spPr>
-          <a:xfrm>
-            <a:off x="8046720" y="2606040"/>
-            <a:ext cx="3291840" cy="365760"/>
-          </a:xfrm>
-          <a:prstGeom prst="rect">
-            <a:avLst/>
-          </a:prstGeom>
-          <a:noFill/>
-        </p:spPr>
-        <p:txBody>
-          <a:bodyPr wrap="square" anchor="t" lIns="0" rIns="0" tIns="0" bIns="0"/>
-          <a:lstStyle/>
-          <a:p>
-            <a:pPr algn="l"/>
-            <a:r>
-              <a:rPr sz="1300" b="1" i="0">
-                <a:solidFill>
-                  <a:srgbClr val="A9C8F0"/>
-                </a:solidFill>
-                <a:latin typeface="Calibri"/>
-              </a:rPr>
-              <a:t>KEY IDEA</a:t>
-            </a:r>
-          </a:p>
-        </p:txBody>
-      </p:sp>
-      <p:sp>
-        <p:nvSpPr>
-          <p:cNvPr id="10" name="TextBox 9"/>
-          <p:cNvSpPr txBox="1"/>
-          <p:nvPr/>
-        </p:nvSpPr>
-        <p:spPr>
-          <a:xfrm>
-            <a:off x="8046720" y="3017520"/>
-            <a:ext cx="3291840" cy="2926080"/>
-          </a:xfrm>
-          <a:prstGeom prst="rect">
-            <a:avLst/>
-          </a:prstGeom>
-          <a:noFill/>
-        </p:spPr>
-        <p:txBody>
-          <a:bodyPr wrap="square" anchor="t" lIns="0" rIns="0" tIns="0" bIns="0"/>
-          <a:lstStyle/>
-          <a:p>
-            <a:pPr algn="l"/>
-            <a:r>
-              <a:rPr sz="2200" b="0" i="0">
-                <a:solidFill>
-                  <a:srgbClr val="FFFFFF"/>
-                </a:solidFill>
-                <a:latin typeface="Cambria"/>
-              </a:rPr>
-              <a:t>Employers carry the main duty, but employees must also take reasonable care of themselves and others.</a:t>
-            </a:r>
-          </a:p>
-        </p:txBody>
-      </p:sp>
-    </p:spTree>
-  </p:cSld>
-  <p:clrMapOvr>
-    <a:masterClrMapping/>
-  </p:clrMapOvr>
-</p:sld>
-</file>
-
-<file path=ppt/slides/slide4.xml><?xml version="1.0" encoding="utf-8"?>
-<p:sld xmlns:a="http://schemas.openxmlformats.org/drawingml/2006/main" xmlns:p="http://schemas.openxmlformats.org/presentationml/2006/main" xmlns:r="http://schemas.openxmlformats.org/officeDocument/2006/relationships">
-  <p:cSld>
-    <p:bg>
-      <p:bgPr>
-        <a:solidFill>
-          <a:srgbClr val="FFFFFF"/>
-        </a:solidFill>
-        <a:effectLst/>
-      </p:bgPr>
-    </p:bg>
-    <p:spTree>
-      <p:nvGrpSpPr>
-        <p:cNvPr id="1" name=""/>
-        <p:cNvGrpSpPr/>
-        <p:nvPr/>
-      </p:nvGrpSpPr>
-      <p:grpSpPr/>
-      <p:sp>
-        <p:nvSpPr>
-          <p:cNvPr id="2" name="TextBox 1"/>
-          <p:cNvSpPr txBox="1"/>
-          <p:nvPr/>
-        </p:nvSpPr>
-        <p:spPr>
-          <a:xfrm>
-            <a:off x="548640" y="320040"/>
-            <a:ext cx="11094415" cy="274320"/>
-          </a:xfrm>
-          <a:prstGeom prst="rect">
-            <a:avLst/>
-          </a:prstGeom>
-          <a:noFill/>
-        </p:spPr>
-        <p:txBody>
-          <a:bodyPr wrap="square" anchor="t" lIns="0" rIns="0" tIns="0" bIns="0"/>
-          <a:lstStyle/>
-          <a:p>
-            <a:pPr algn="l"/>
-            <a:r>
-              <a:rPr sz="1100" b="1" i="0">
-                <a:solidFill>
-                  <a:srgbClr val="54595D"/>
-                </a:solidFill>
-                <a:latin typeface="Calibri"/>
-              </a:rPr>
-              <a:t>CORE COMPONENT  ·  Core Paper 2</a:t>
-            </a:r>
-          </a:p>
-        </p:txBody>
-      </p:sp>
-      <p:sp>
-        <p:nvSpPr>
-          <p:cNvPr id="3" name="TextBox 2"/>
-          <p:cNvSpPr txBox="1"/>
-          <p:nvPr/>
-        </p:nvSpPr>
-        <p:spPr>
-          <a:xfrm>
-            <a:off x="548640" y="566928"/>
-            <a:ext cx="11094415" cy="822960"/>
-          </a:xfrm>
-          <a:prstGeom prst="rect">
-            <a:avLst/>
-          </a:prstGeom>
-          <a:noFill/>
-        </p:spPr>
-        <p:txBody>
-          <a:bodyPr wrap="square" anchor="ctr" lIns="0" rIns="0" tIns="0" bIns="0"/>
-          <a:lstStyle/>
-          <a:p>
-            <a:pPr algn="l"/>
-            <a:r>
-              <a:rPr sz="3200" b="1" i="0">
-                <a:solidFill>
-                  <a:srgbClr val="03306E"/>
-                </a:solidFill>
-                <a:latin typeface="Cambria"/>
-              </a:rPr>
-              <a:t>Key regulations</a:t>
-            </a:r>
-          </a:p>
-        </p:txBody>
-      </p:sp>
-      <p:sp>
-        <p:nvSpPr>
-          <p:cNvPr id="4" name="TextBox 3"/>
-          <p:cNvSpPr txBox="1"/>
-          <p:nvPr/>
-        </p:nvSpPr>
-        <p:spPr>
-          <a:xfrm>
-            <a:off x="548640" y="6446520"/>
-            <a:ext cx="8229600" cy="274320"/>
-          </a:xfrm>
-          <a:prstGeom prst="rect">
-            <a:avLst/>
-          </a:prstGeom>
-          <a:noFill/>
-        </p:spPr>
-        <p:txBody>
-          <a:bodyPr wrap="square" anchor="t" lIns="0" rIns="0" tIns="0" bIns="0"/>
-          <a:lstStyle/>
-          <a:p>
-            <a:pPr algn="l"/>
-            <a:r>
-              <a:rPr sz="1000" b="0" i="0">
-                <a:solidFill>
-                  <a:srgbClr val="54595D"/>
-                </a:solidFill>
-                <a:latin typeface="Calibri"/>
-              </a:rPr>
-              <a:t>Digital Support and Security T Level  ·  Health and Safety in Digital Work</a:t>
-            </a:r>
-          </a:p>
-        </p:txBody>
-      </p:sp>
-      <p:sp>
-        <p:nvSpPr>
-          <p:cNvPr id="5" name="TextBox 4"/>
-          <p:cNvSpPr txBox="1"/>
-          <p:nvPr/>
-        </p:nvSpPr>
-        <p:spPr>
-          <a:xfrm>
-            <a:off x="10728655" y="6446520"/>
-            <a:ext cx="914400" cy="274320"/>
-          </a:xfrm>
-          <a:prstGeom prst="rect">
-            <a:avLst/>
-          </a:prstGeom>
-          <a:noFill/>
-        </p:spPr>
-        <p:txBody>
-          <a:bodyPr wrap="square" anchor="t" lIns="0" rIns="0" tIns="0" bIns="0"/>
-          <a:lstStyle/>
-          <a:p>
-            <a:pPr algn="r"/>
-            <a:r>
-              <a:rPr sz="1000" b="0" i="0">
-                <a:solidFill>
-                  <a:srgbClr val="54595D"/>
-                </a:solidFill>
-                <a:latin typeface="Calibri"/>
-              </a:rPr>
-              <a:t>4</a:t>
-            </a:r>
-          </a:p>
-        </p:txBody>
-      </p:sp>
-      <p:sp>
-        <p:nvSpPr>
-          <p:cNvPr id="6" name="Rounded Rectangle 5"/>
-          <p:cNvSpPr/>
-          <p:nvPr/>
-        </p:nvSpPr>
-        <p:spPr>
-          <a:xfrm>
-            <a:off x="548640" y="1600200"/>
-            <a:ext cx="3515258" cy="4572000"/>
-          </a:xfrm>
-          <a:prstGeom prst="roundRect">
-            <a:avLst>
-              <a:gd name="adj" fmla="val 6000"/>
-            </a:avLst>
-          </a:prstGeom>
-          <a:solidFill>
-            <a:srgbClr val="EAF3FF"/>
-          </a:solidFill>
-          <a:ln>
-            <a:noFill/>
-          </a:ln>
-          <a:effectLst/>
-        </p:spPr>
-        <p:style>
-          <a:lnRef idx="1">
-            <a:schemeClr val="accent1"/>
-          </a:lnRef>
-          <a:fillRef idx="3">
-            <a:schemeClr val="accent1"/>
-          </a:fillRef>
-          <a:effectRef idx="2">
-            <a:schemeClr val="accent1"/>
-          </a:effectRef>
-          <a:fontRef idx="minor">
-            <a:schemeClr val="lt1"/>
-          </a:fontRef>
-        </p:style>
-        <p:txBody>
-          <a:bodyPr rtlCol="0" anchor="ctr"/>
-          <a:lstStyle/>
-          <a:p/>
-        </p:txBody>
-      </p:sp>
-      <p:sp>
-        <p:nvSpPr>
-          <p:cNvPr id="7" name="Oval 6"/>
-          <p:cNvSpPr/>
-          <p:nvPr/>
-        </p:nvSpPr>
-        <p:spPr>
-          <a:xfrm>
-            <a:off x="777240" y="1828800"/>
-            <a:ext cx="457200" cy="457200"/>
-          </a:xfrm>
-          <a:prstGeom prst="ellipse">
-            <a:avLst/>
-          </a:prstGeom>
-          <a:solidFill>
-            <a:srgbClr val="F2B705"/>
-          </a:solidFill>
-          <a:ln>
-            <a:noFill/>
-          </a:ln>
-          <a:effectLst/>
-        </p:spPr>
-        <p:style>
-          <a:lnRef idx="1">
-            <a:schemeClr val="accent1"/>
-          </a:lnRef>
-          <a:fillRef idx="3">
-            <a:schemeClr val="accent1"/>
-          </a:fillRef>
-          <a:effectRef idx="2">
-            <a:schemeClr val="accent1"/>
-          </a:effectRef>
-          <a:fontRef idx="minor">
-            <a:schemeClr val="lt1"/>
-          </a:fontRef>
-        </p:style>
-        <p:txBody>
-          <a:bodyPr rtlCol="0" anchor="ctr" lIns="0" rIns="0" tIns="0" bIns="0"/>
-          <a:lstStyle/>
-          <a:p>
-            <a:pPr algn="ctr"/>
-            <a:r>
-              <a:rPr sz="1500" b="1">
-                <a:solidFill>
-                  <a:srgbClr val="202122"/>
-                </a:solidFill>
-                <a:latin typeface="Calibri"/>
-              </a:rPr>
-              <a:t>1</a:t>
-            </a:r>
-          </a:p>
-        </p:txBody>
-      </p:sp>
-      <p:sp>
-        <p:nvSpPr>
-          <p:cNvPr id="8" name="TextBox 7"/>
-          <p:cNvSpPr txBox="1"/>
-          <p:nvPr/>
-        </p:nvSpPr>
-        <p:spPr>
-          <a:xfrm>
-            <a:off x="1371600" y="1801368"/>
-            <a:ext cx="2509418" cy="512064"/>
-          </a:xfrm>
-          <a:prstGeom prst="rect">
-            <a:avLst/>
-          </a:prstGeom>
-          <a:noFill/>
-        </p:spPr>
-        <p:txBody>
-          <a:bodyPr wrap="square" anchor="ctr" lIns="0" rIns="0" tIns="0" bIns="0"/>
-          <a:lstStyle/>
-          <a:p>
-            <a:pPr algn="l"/>
-            <a:r>
-              <a:rPr sz="1900" b="1" i="0">
-                <a:solidFill>
-                  <a:srgbClr val="03306E"/>
-                </a:solidFill>
-                <a:latin typeface="Calibri"/>
-              </a:rPr>
-              <a:t>Manual handling</a:t>
-            </a:r>
-          </a:p>
-        </p:txBody>
-      </p:sp>
-      <p:sp>
-        <p:nvSpPr>
-          <p:cNvPr id="9" name="TextBox 8"/>
-          <p:cNvSpPr txBox="1"/>
-          <p:nvPr/>
-        </p:nvSpPr>
-        <p:spPr>
-          <a:xfrm>
-            <a:off x="777240" y="2468880"/>
-            <a:ext cx="3058058" cy="3566160"/>
-          </a:xfrm>
-          <a:prstGeom prst="rect">
-            <a:avLst/>
-          </a:prstGeom>
-          <a:noFill/>
-        </p:spPr>
-        <p:txBody>
-          <a:bodyPr wrap="square" anchor="t" lIns="0" rIns="0" tIns="0" bIns="0"/>
-          <a:lstStyle/>
-          <a:p>
-            <a:pPr algn="l"/>
-            <a:r>
-              <a:rPr sz="2000" b="0" i="0">
-                <a:solidFill>
-                  <a:srgbClr val="202122"/>
-                </a:solidFill>
-                <a:latin typeface="Calibri"/>
-              </a:rPr>
-              <a:t>Avoid hazardous lifting where possible. Otherwise assess the risk, give information on the load and its centre of gravity, and reduce the risk of injury.</a:t>
-            </a:r>
-          </a:p>
-        </p:txBody>
-      </p:sp>
-      <p:sp>
-        <p:nvSpPr>
-          <p:cNvPr id="10" name="Rounded Rectangle 9"/>
-          <p:cNvSpPr/>
-          <p:nvPr/>
-        </p:nvSpPr>
-        <p:spPr>
-          <a:xfrm>
-            <a:off x="4338218" y="1600200"/>
-            <a:ext cx="3515258" cy="4572000"/>
-          </a:xfrm>
-          <a:prstGeom prst="roundRect">
-            <a:avLst>
-              <a:gd name="adj" fmla="val 6000"/>
-            </a:avLst>
-          </a:prstGeom>
-          <a:solidFill>
-            <a:srgbClr val="EAF3FF"/>
-          </a:solidFill>
-          <a:ln>
-            <a:noFill/>
-          </a:ln>
-          <a:effectLst/>
-        </p:spPr>
-        <p:style>
-          <a:lnRef idx="1">
-            <a:schemeClr val="accent1"/>
-          </a:lnRef>
-          <a:fillRef idx="3">
-            <a:schemeClr val="accent1"/>
-          </a:fillRef>
-          <a:effectRef idx="2">
-            <a:schemeClr val="accent1"/>
-          </a:effectRef>
-          <a:fontRef idx="minor">
-            <a:schemeClr val="lt1"/>
-          </a:fontRef>
-        </p:style>
-        <p:txBody>
-          <a:bodyPr rtlCol="0" anchor="ctr"/>
-          <a:lstStyle/>
-          <a:p/>
-        </p:txBody>
-      </p:sp>
-      <p:sp>
-        <p:nvSpPr>
-          <p:cNvPr id="11" name="Oval 10"/>
-          <p:cNvSpPr/>
-          <p:nvPr/>
-        </p:nvSpPr>
-        <p:spPr>
-          <a:xfrm>
-            <a:off x="4566818" y="1828800"/>
-            <a:ext cx="457200" cy="457200"/>
-          </a:xfrm>
-          <a:prstGeom prst="ellipse">
-            <a:avLst/>
-          </a:prstGeom>
-          <a:solidFill>
-            <a:srgbClr val="F2B705"/>
-          </a:solidFill>
-          <a:ln>
-            <a:noFill/>
-          </a:ln>
-          <a:effectLst/>
-        </p:spPr>
-        <p:style>
-          <a:lnRef idx="1">
-            <a:schemeClr val="accent1"/>
-          </a:lnRef>
-          <a:fillRef idx="3">
-            <a:schemeClr val="accent1"/>
-          </a:fillRef>
-          <a:effectRef idx="2">
-            <a:schemeClr val="accent1"/>
-          </a:effectRef>
-          <a:fontRef idx="minor">
-            <a:schemeClr val="lt1"/>
-          </a:fontRef>
-        </p:style>
-        <p:txBody>
-          <a:bodyPr rtlCol="0" anchor="ctr" lIns="0" rIns="0" tIns="0" bIns="0"/>
-          <a:lstStyle/>
-          <a:p>
-            <a:pPr algn="ctr"/>
-            <a:r>
-              <a:rPr sz="1500" b="1">
-                <a:solidFill>
-                  <a:srgbClr val="202122"/>
-                </a:solidFill>
-                <a:latin typeface="Calibri"/>
-              </a:rPr>
-              <a:t>2</a:t>
-            </a:r>
-          </a:p>
-        </p:txBody>
-      </p:sp>
-      <p:sp>
-        <p:nvSpPr>
-          <p:cNvPr id="12" name="TextBox 11"/>
-          <p:cNvSpPr txBox="1"/>
-          <p:nvPr/>
-        </p:nvSpPr>
-        <p:spPr>
-          <a:xfrm>
-            <a:off x="5161178" y="1801368"/>
-            <a:ext cx="2509418" cy="512064"/>
-          </a:xfrm>
-          <a:prstGeom prst="rect">
-            <a:avLst/>
-          </a:prstGeom>
-          <a:noFill/>
-        </p:spPr>
-        <p:txBody>
-          <a:bodyPr wrap="square" anchor="ctr" lIns="0" rIns="0" tIns="0" bIns="0"/>
-          <a:lstStyle/>
-          <a:p>
-            <a:pPr algn="l"/>
-            <a:r>
-              <a:rPr sz="1900" b="1" i="0">
-                <a:solidFill>
-                  <a:srgbClr val="03306E"/>
-                </a:solidFill>
-                <a:latin typeface="Calibri"/>
-              </a:rPr>
-              <a:t>Work at height</a:t>
-            </a:r>
-          </a:p>
-        </p:txBody>
-      </p:sp>
-      <p:sp>
-        <p:nvSpPr>
-          <p:cNvPr id="13" name="TextBox 12"/>
-          <p:cNvSpPr txBox="1"/>
-          <p:nvPr/>
-        </p:nvSpPr>
-        <p:spPr>
-          <a:xfrm>
-            <a:off x="4566818" y="2468880"/>
-            <a:ext cx="3058058" cy="3566160"/>
-          </a:xfrm>
-          <a:prstGeom prst="rect">
-            <a:avLst/>
-          </a:prstGeom>
-          <a:noFill/>
-        </p:spPr>
-        <p:txBody>
-          <a:bodyPr wrap="square" anchor="t" lIns="0" rIns="0" tIns="0" bIns="0"/>
-          <a:lstStyle/>
-          <a:p>
-            <a:pPr algn="l"/>
-            <a:r>
-              <a:rPr sz="2000" b="0" i="0">
-                <a:solidFill>
-                  <a:srgbClr val="202122"/>
-                </a:solidFill>
-                <a:latin typeface="Calibri"/>
-              </a:rPr>
-              <a:t>Plan and supervise the work, use competent people, do as much as possible from the ground, use suitable, stable equipment, protect against falling objects, plan for emergencies.</a:t>
-            </a:r>
-          </a:p>
-        </p:txBody>
-      </p:sp>
-      <p:sp>
-        <p:nvSpPr>
-          <p:cNvPr id="14" name="Rounded Rectangle 13"/>
-          <p:cNvSpPr/>
-          <p:nvPr/>
-        </p:nvSpPr>
-        <p:spPr>
-          <a:xfrm>
-            <a:off x="8127796" y="1600200"/>
-            <a:ext cx="3515258" cy="4572000"/>
-          </a:xfrm>
-          <a:prstGeom prst="roundRect">
-            <a:avLst>
-              <a:gd name="adj" fmla="val 6000"/>
-            </a:avLst>
-          </a:prstGeom>
-          <a:solidFill>
-            <a:srgbClr val="EAF3FF"/>
-          </a:solidFill>
-          <a:ln>
-            <a:noFill/>
-          </a:ln>
-          <a:effectLst/>
-        </p:spPr>
-        <p:style>
-          <a:lnRef idx="1">
-            <a:schemeClr val="accent1"/>
-          </a:lnRef>
-          <a:fillRef idx="3">
-            <a:schemeClr val="accent1"/>
-          </a:fillRef>
-          <a:effectRef idx="2">
-            <a:schemeClr val="accent1"/>
-          </a:effectRef>
-          <a:fontRef idx="minor">
-            <a:schemeClr val="lt1"/>
-          </a:fontRef>
-        </p:style>
-        <p:txBody>
-          <a:bodyPr rtlCol="0" anchor="ctr"/>
-          <a:lstStyle/>
-          <a:p/>
-        </p:txBody>
-      </p:sp>
-      <p:sp>
-        <p:nvSpPr>
-          <p:cNvPr id="15" name="Oval 14"/>
-          <p:cNvSpPr/>
-          <p:nvPr/>
-        </p:nvSpPr>
-        <p:spPr>
-          <a:xfrm>
-            <a:off x="8356396" y="1828800"/>
-            <a:ext cx="457200" cy="457200"/>
-          </a:xfrm>
-          <a:prstGeom prst="ellipse">
-            <a:avLst/>
-          </a:prstGeom>
-          <a:solidFill>
-            <a:srgbClr val="F2B705"/>
-          </a:solidFill>
-          <a:ln>
-            <a:noFill/>
-          </a:ln>
-          <a:effectLst/>
-        </p:spPr>
-        <p:style>
-          <a:lnRef idx="1">
-            <a:schemeClr val="accent1"/>
-          </a:lnRef>
-          <a:fillRef idx="3">
-            <a:schemeClr val="accent1"/>
-          </a:fillRef>
-          <a:effectRef idx="2">
-            <a:schemeClr val="accent1"/>
-          </a:effectRef>
-          <a:fontRef idx="minor">
-            <a:schemeClr val="lt1"/>
-          </a:fontRef>
-        </p:style>
-        <p:txBody>
-          <a:bodyPr rtlCol="0" anchor="ctr" lIns="0" rIns="0" tIns="0" bIns="0"/>
-          <a:lstStyle/>
-          <a:p>
-            <a:pPr algn="ctr"/>
-            <a:r>
-              <a:rPr sz="1500" b="1">
-                <a:solidFill>
-                  <a:srgbClr val="202122"/>
-                </a:solidFill>
-                <a:latin typeface="Calibri"/>
-              </a:rPr>
-              <a:t>3</a:t>
-            </a:r>
-          </a:p>
-        </p:txBody>
-      </p:sp>
-      <p:sp>
-        <p:nvSpPr>
-          <p:cNvPr id="16" name="TextBox 15"/>
-          <p:cNvSpPr txBox="1"/>
-          <p:nvPr/>
-        </p:nvSpPr>
-        <p:spPr>
-          <a:xfrm>
-            <a:off x="8950756" y="1801368"/>
-            <a:ext cx="2509418" cy="512064"/>
-          </a:xfrm>
-          <a:prstGeom prst="rect">
-            <a:avLst/>
-          </a:prstGeom>
-          <a:noFill/>
-        </p:spPr>
-        <p:txBody>
-          <a:bodyPr wrap="square" anchor="ctr" lIns="0" rIns="0" tIns="0" bIns="0"/>
-          <a:lstStyle/>
-          <a:p>
-            <a:pPr algn="l"/>
-            <a:r>
-              <a:rPr sz="1600" b="1" i="0">
-                <a:solidFill>
-                  <a:srgbClr val="03306E"/>
-                </a:solidFill>
-                <a:latin typeface="Calibri"/>
-              </a:rPr>
-              <a:t>Display screen equipment</a:t>
-            </a:r>
-          </a:p>
-        </p:txBody>
-      </p:sp>
-      <p:sp>
-        <p:nvSpPr>
-          <p:cNvPr id="17" name="TextBox 16"/>
-          <p:cNvSpPr txBox="1"/>
-          <p:nvPr/>
-        </p:nvSpPr>
-        <p:spPr>
-          <a:xfrm>
-            <a:off x="8356396" y="2468880"/>
-            <a:ext cx="3058058" cy="3566160"/>
-          </a:xfrm>
-          <a:prstGeom prst="rect">
-            <a:avLst/>
-          </a:prstGeom>
-          <a:noFill/>
-        </p:spPr>
-        <p:txBody>
-          <a:bodyPr wrap="square" anchor="t" lIns="0" rIns="0" tIns="0" bIns="0"/>
-          <a:lstStyle/>
-          <a:p>
-            <a:pPr algn="l"/>
-            <a:r>
-              <a:rPr sz="2000" b="0" i="0">
-                <a:solidFill>
-                  <a:srgbClr val="202122"/>
-                </a:solidFill>
-                <a:latin typeface="Calibri"/>
-              </a:rPr>
-              <a:t>Assess workstations, reduce risks including regular breaks, provide eye tests on request, and give training and information.</a:t>
-            </a:r>
-          </a:p>
-        </p:txBody>
-      </p:sp>
-    </p:spTree>
-  </p:cSld>
-  <p:clrMapOvr>
-    <a:masterClrMapping/>
-  </p:clrMapOvr>
-</p:sld>
-</file>
-
-<file path=ppt/slides/slide5.xml><?xml version="1.0" encoding="utf-8"?>
-<p:sld xmlns:a="http://schemas.openxmlformats.org/drawingml/2006/main" xmlns:p="http://schemas.openxmlformats.org/presentationml/2006/main" xmlns:r="http://schemas.openxmlformats.org/officeDocument/2006/relationships">
-  <p:cSld>
-    <p:bg>
-      <p:bgPr>
-        <a:solidFill>
-          <a:srgbClr val="FFFFFF"/>
-        </a:solidFill>
-        <a:effectLst/>
-      </p:bgPr>
-    </p:bg>
-    <p:spTree>
-      <p:nvGrpSpPr>
-        <p:cNvPr id="1" name=""/>
-        <p:cNvGrpSpPr/>
-        <p:nvPr/>
-      </p:nvGrpSpPr>
-      <p:grpSpPr/>
-      <p:sp>
-        <p:nvSpPr>
-          <p:cNvPr id="2" name="TextBox 1"/>
-          <p:cNvSpPr txBox="1"/>
-          <p:nvPr/>
-        </p:nvSpPr>
-        <p:spPr>
-          <a:xfrm>
-            <a:off x="548640" y="320040"/>
-            <a:ext cx="11094415" cy="274320"/>
-          </a:xfrm>
-          <a:prstGeom prst="rect">
-            <a:avLst/>
-          </a:prstGeom>
-          <a:noFill/>
-        </p:spPr>
-        <p:txBody>
-          <a:bodyPr wrap="square" anchor="t" lIns="0" rIns="0" tIns="0" bIns="0"/>
-          <a:lstStyle/>
-          <a:p>
-            <a:pPr algn="l"/>
-            <a:r>
-              <a:rPr sz="1100" b="1" i="0">
-                <a:solidFill>
-                  <a:srgbClr val="54595D"/>
-                </a:solidFill>
-                <a:latin typeface="Calibri"/>
-              </a:rPr>
-              <a:t>CORE COMPONENT  ·  Core Paper 2</a:t>
-            </a:r>
-          </a:p>
-        </p:txBody>
-      </p:sp>
-      <p:sp>
-        <p:nvSpPr>
-          <p:cNvPr id="3" name="TextBox 2"/>
-          <p:cNvSpPr txBox="1"/>
-          <p:nvPr/>
-        </p:nvSpPr>
-        <p:spPr>
-          <a:xfrm>
-            <a:off x="548640" y="566928"/>
-            <a:ext cx="11094415" cy="822960"/>
-          </a:xfrm>
-          <a:prstGeom prst="rect">
-            <a:avLst/>
-          </a:prstGeom>
-          <a:noFill/>
-        </p:spPr>
-        <p:txBody>
-          <a:bodyPr wrap="square" anchor="ctr" lIns="0" rIns="0" tIns="0" bIns="0"/>
-          <a:lstStyle/>
-          <a:p>
-            <a:pPr algn="l"/>
-            <a:r>
-              <a:rPr sz="3200" b="1" i="0">
-                <a:solidFill>
-                  <a:srgbClr val="03306E"/>
-                </a:solidFill>
-                <a:latin typeface="Cambria"/>
-              </a:rPr>
-              <a:t>Risks in digital work and how to reduce them</a:t>
-            </a:r>
-          </a:p>
-        </p:txBody>
-      </p:sp>
-      <p:sp>
-        <p:nvSpPr>
-          <p:cNvPr id="4" name="TextBox 3"/>
-          <p:cNvSpPr txBox="1"/>
-          <p:nvPr/>
-        </p:nvSpPr>
-        <p:spPr>
-          <a:xfrm>
-            <a:off x="548640" y="6446520"/>
-            <a:ext cx="8229600" cy="274320"/>
-          </a:xfrm>
-          <a:prstGeom prst="rect">
-            <a:avLst/>
-          </a:prstGeom>
-          <a:noFill/>
-        </p:spPr>
-        <p:txBody>
-          <a:bodyPr wrap="square" anchor="t" lIns="0" rIns="0" tIns="0" bIns="0"/>
-          <a:lstStyle/>
-          <a:p>
-            <a:pPr algn="l"/>
-            <a:r>
-              <a:rPr sz="1000" b="0" i="0">
-                <a:solidFill>
-                  <a:srgbClr val="54595D"/>
-                </a:solidFill>
-                <a:latin typeface="Calibri"/>
-              </a:rPr>
-              <a:t>Digital Support and Security T Level  ·  Health and Safety in Digital Work</a:t>
-            </a:r>
-          </a:p>
-        </p:txBody>
-      </p:sp>
-      <p:sp>
-        <p:nvSpPr>
-          <p:cNvPr id="5" name="TextBox 4"/>
-          <p:cNvSpPr txBox="1"/>
-          <p:nvPr/>
-        </p:nvSpPr>
-        <p:spPr>
-          <a:xfrm>
-            <a:off x="10728655" y="6446520"/>
-            <a:ext cx="914400" cy="274320"/>
-          </a:xfrm>
-          <a:prstGeom prst="rect">
-            <a:avLst/>
-          </a:prstGeom>
-          <a:noFill/>
-        </p:spPr>
-        <p:txBody>
-          <a:bodyPr wrap="square" anchor="t" lIns="0" rIns="0" tIns="0" bIns="0"/>
-          <a:lstStyle/>
-          <a:p>
-            <a:pPr algn="r"/>
-            <a:r>
-              <a:rPr sz="1000" b="0" i="0">
-                <a:solidFill>
-                  <a:srgbClr val="54595D"/>
-                </a:solidFill>
-                <a:latin typeface="Calibri"/>
-              </a:rPr>
-              <a:t>5</a:t>
+              <a:t>10</a:t>
             </a:r>
           </a:p>
         </p:txBody>
@@ -6887,6 +4902,5245 @@
 </p:sld>
 </file>
 
+<file path=ppt/slides/slide11.xml><?xml version="1.0" encoding="utf-8"?>
+<p:sld xmlns:a="http://schemas.openxmlformats.org/drawingml/2006/main" xmlns:p="http://schemas.openxmlformats.org/presentationml/2006/main" xmlns:r="http://schemas.openxmlformats.org/officeDocument/2006/relationships">
+  <p:cSld>
+    <p:bg>
+      <p:bgPr>
+        <a:solidFill>
+          <a:srgbClr val="FFFFFF"/>
+        </a:solidFill>
+        <a:effectLst/>
+      </p:bgPr>
+    </p:bg>
+    <p:spTree>
+      <p:nvGrpSpPr>
+        <p:cNvPr id="1" name=""/>
+        <p:cNvGrpSpPr/>
+        <p:nvPr/>
+      </p:nvGrpSpPr>
+      <p:grpSpPr/>
+      <p:sp>
+        <p:nvSpPr>
+          <p:cNvPr id="2" name="TextBox 1"/>
+          <p:cNvSpPr txBox="1"/>
+          <p:nvPr/>
+        </p:nvSpPr>
+        <p:spPr>
+          <a:xfrm>
+            <a:off x="548640" y="320040"/>
+            <a:ext cx="11094415" cy="274320"/>
+          </a:xfrm>
+          <a:prstGeom prst="rect">
+            <a:avLst/>
+          </a:prstGeom>
+          <a:noFill/>
+        </p:spPr>
+        <p:txBody>
+          <a:bodyPr wrap="square" anchor="t" lIns="0" rIns="0" tIns="0" bIns="0"/>
+          <a:lstStyle/>
+          <a:p>
+            <a:pPr algn="l"/>
+            <a:r>
+              <a:rPr sz="1100" b="1" i="0">
+                <a:solidFill>
+                  <a:srgbClr val="54595D"/>
+                </a:solidFill>
+                <a:latin typeface="Calibri"/>
+              </a:rPr>
+              <a:t>CORE COMPONENT  ·  Core Paper 2</a:t>
+            </a:r>
+          </a:p>
+        </p:txBody>
+      </p:sp>
+      <p:sp>
+        <p:nvSpPr>
+          <p:cNvPr id="3" name="TextBox 2"/>
+          <p:cNvSpPr txBox="1"/>
+          <p:nvPr/>
+        </p:nvSpPr>
+        <p:spPr>
+          <a:xfrm>
+            <a:off x="548640" y="566928"/>
+            <a:ext cx="11094415" cy="822960"/>
+          </a:xfrm>
+          <a:prstGeom prst="rect">
+            <a:avLst/>
+          </a:prstGeom>
+          <a:noFill/>
+        </p:spPr>
+        <p:txBody>
+          <a:bodyPr wrap="square" anchor="ctr" lIns="0" rIns="0" tIns="0" bIns="0"/>
+          <a:lstStyle/>
+          <a:p>
+            <a:pPr algn="l"/>
+            <a:r>
+              <a:rPr sz="2900" b="1" i="0">
+                <a:solidFill>
+                  <a:srgbClr val="03306E"/>
+                </a:solidFill>
+                <a:latin typeface="Cambria"/>
+              </a:rPr>
+              <a:t>Quick check: Risks in digital work and how to reduce them</a:t>
+            </a:r>
+          </a:p>
+        </p:txBody>
+      </p:sp>
+      <p:sp>
+        <p:nvSpPr>
+          <p:cNvPr id="4" name="TextBox 3"/>
+          <p:cNvSpPr txBox="1"/>
+          <p:nvPr/>
+        </p:nvSpPr>
+        <p:spPr>
+          <a:xfrm>
+            <a:off x="548640" y="6446520"/>
+            <a:ext cx="8229600" cy="274320"/>
+          </a:xfrm>
+          <a:prstGeom prst="rect">
+            <a:avLst/>
+          </a:prstGeom>
+          <a:noFill/>
+        </p:spPr>
+        <p:txBody>
+          <a:bodyPr wrap="square" anchor="t" lIns="0" rIns="0" tIns="0" bIns="0"/>
+          <a:lstStyle/>
+          <a:p>
+            <a:pPr algn="l"/>
+            <a:r>
+              <a:rPr sz="1000" b="0" i="0">
+                <a:solidFill>
+                  <a:srgbClr val="54595D"/>
+                </a:solidFill>
+                <a:latin typeface="Calibri"/>
+              </a:rPr>
+              <a:t>Digital Support and Security T Level  ·  Health and Safety in Digital Work</a:t>
+            </a:r>
+          </a:p>
+        </p:txBody>
+      </p:sp>
+      <p:sp>
+        <p:nvSpPr>
+          <p:cNvPr id="5" name="TextBox 4"/>
+          <p:cNvSpPr txBox="1"/>
+          <p:nvPr/>
+        </p:nvSpPr>
+        <p:spPr>
+          <a:xfrm>
+            <a:off x="10728655" y="6446520"/>
+            <a:ext cx="914400" cy="274320"/>
+          </a:xfrm>
+          <a:prstGeom prst="rect">
+            <a:avLst/>
+          </a:prstGeom>
+          <a:noFill/>
+        </p:spPr>
+        <p:txBody>
+          <a:bodyPr wrap="square" anchor="t" lIns="0" rIns="0" tIns="0" bIns="0"/>
+          <a:lstStyle/>
+          <a:p>
+            <a:pPr algn="r"/>
+            <a:r>
+              <a:rPr sz="1000" b="0" i="0">
+                <a:solidFill>
+                  <a:srgbClr val="54595D"/>
+                </a:solidFill>
+                <a:latin typeface="Calibri"/>
+              </a:rPr>
+              <a:t>11</a:t>
+            </a:r>
+          </a:p>
+        </p:txBody>
+      </p:sp>
+      <p:sp>
+        <p:nvSpPr>
+          <p:cNvPr id="6" name="Oval 5"/>
+          <p:cNvSpPr/>
+          <p:nvPr/>
+        </p:nvSpPr>
+        <p:spPr>
+          <a:xfrm>
+            <a:off x="548640" y="1691640"/>
+            <a:ext cx="502920" cy="502920"/>
+          </a:xfrm>
+          <a:prstGeom prst="ellipse">
+            <a:avLst/>
+          </a:prstGeom>
+          <a:solidFill>
+            <a:srgbClr val="F2B705"/>
+          </a:solidFill>
+          <a:ln>
+            <a:noFill/>
+          </a:ln>
+          <a:effectLst/>
+        </p:spPr>
+        <p:style>
+          <a:lnRef idx="1">
+            <a:schemeClr val="accent1"/>
+          </a:lnRef>
+          <a:fillRef idx="3">
+            <a:schemeClr val="accent1"/>
+          </a:fillRef>
+          <a:effectRef idx="2">
+            <a:schemeClr val="accent1"/>
+          </a:effectRef>
+          <a:fontRef idx="minor">
+            <a:schemeClr val="lt1"/>
+          </a:fontRef>
+        </p:style>
+        <p:txBody>
+          <a:bodyPr rtlCol="0" anchor="ctr" lIns="0" rIns="0" tIns="0" bIns="0"/>
+          <a:lstStyle/>
+          <a:p>
+            <a:pPr algn="ctr"/>
+            <a:r>
+              <a:rPr sz="1600" b="1">
+                <a:solidFill>
+                  <a:srgbClr val="202122"/>
+                </a:solidFill>
+                <a:latin typeface="Calibri"/>
+              </a:rPr>
+              <a:t>1</a:t>
+            </a:r>
+          </a:p>
+        </p:txBody>
+      </p:sp>
+      <p:sp>
+        <p:nvSpPr>
+          <p:cNvPr id="7" name="TextBox 6"/>
+          <p:cNvSpPr txBox="1"/>
+          <p:nvPr/>
+        </p:nvSpPr>
+        <p:spPr>
+          <a:xfrm>
+            <a:off x="1371600" y="1645920"/>
+            <a:ext cx="10271455" cy="1188720"/>
+          </a:xfrm>
+          <a:prstGeom prst="rect">
+            <a:avLst/>
+          </a:prstGeom>
+          <a:noFill/>
+        </p:spPr>
+        <p:txBody>
+          <a:bodyPr wrap="square" anchor="t" lIns="0" rIns="0" tIns="0" bIns="0"/>
+          <a:lstStyle/>
+          <a:p>
+            <a:pPr algn="l"/>
+            <a:r>
+              <a:rPr sz="2400" b="0" i="0">
+                <a:solidFill>
+                  <a:srgbClr val="202122"/>
+                </a:solidFill>
+                <a:latin typeface="Calibri"/>
+              </a:rPr>
+              <a:t>Name two health risks of DSE work.</a:t>
+            </a:r>
+          </a:p>
+        </p:txBody>
+      </p:sp>
+      <p:sp>
+        <p:nvSpPr>
+          <p:cNvPr id="8" name="Oval 7"/>
+          <p:cNvSpPr/>
+          <p:nvPr/>
+        </p:nvSpPr>
+        <p:spPr>
+          <a:xfrm>
+            <a:off x="548640" y="3108960"/>
+            <a:ext cx="502920" cy="502920"/>
+          </a:xfrm>
+          <a:prstGeom prst="ellipse">
+            <a:avLst/>
+          </a:prstGeom>
+          <a:solidFill>
+            <a:srgbClr val="F2B705"/>
+          </a:solidFill>
+          <a:ln>
+            <a:noFill/>
+          </a:ln>
+          <a:effectLst/>
+        </p:spPr>
+        <p:style>
+          <a:lnRef idx="1">
+            <a:schemeClr val="accent1"/>
+          </a:lnRef>
+          <a:fillRef idx="3">
+            <a:schemeClr val="accent1"/>
+          </a:fillRef>
+          <a:effectRef idx="2">
+            <a:schemeClr val="accent1"/>
+          </a:effectRef>
+          <a:fontRef idx="minor">
+            <a:schemeClr val="lt1"/>
+          </a:fontRef>
+        </p:style>
+        <p:txBody>
+          <a:bodyPr rtlCol="0" anchor="ctr" lIns="0" rIns="0" tIns="0" bIns="0"/>
+          <a:lstStyle/>
+          <a:p>
+            <a:pPr algn="ctr"/>
+            <a:r>
+              <a:rPr sz="1600" b="1">
+                <a:solidFill>
+                  <a:srgbClr val="202122"/>
+                </a:solidFill>
+                <a:latin typeface="Calibri"/>
+              </a:rPr>
+              <a:t>2</a:t>
+            </a:r>
+          </a:p>
+        </p:txBody>
+      </p:sp>
+      <p:sp>
+        <p:nvSpPr>
+          <p:cNvPr id="9" name="TextBox 8"/>
+          <p:cNvSpPr txBox="1"/>
+          <p:nvPr/>
+        </p:nvSpPr>
+        <p:spPr>
+          <a:xfrm>
+            <a:off x="1371600" y="3063240"/>
+            <a:ext cx="10271455" cy="1188720"/>
+          </a:xfrm>
+          <a:prstGeom prst="rect">
+            <a:avLst/>
+          </a:prstGeom>
+          <a:noFill/>
+        </p:spPr>
+        <p:txBody>
+          <a:bodyPr wrap="square" anchor="t" lIns="0" rIns="0" tIns="0" bIns="0"/>
+          <a:lstStyle/>
+          <a:p>
+            <a:pPr algn="l"/>
+            <a:r>
+              <a:rPr sz="2400" b="0" i="0">
+                <a:solidFill>
+                  <a:srgbClr val="202122"/>
+                </a:solidFill>
+                <a:latin typeface="Calibri"/>
+              </a:rPr>
+              <a:t>How can cable installation be made safer?</a:t>
+            </a:r>
+          </a:p>
+        </p:txBody>
+      </p:sp>
+      <p:sp>
+        <p:nvSpPr>
+          <p:cNvPr id="10" name="Oval 9"/>
+          <p:cNvSpPr/>
+          <p:nvPr/>
+        </p:nvSpPr>
+        <p:spPr>
+          <a:xfrm>
+            <a:off x="548640" y="4526280"/>
+            <a:ext cx="502920" cy="502920"/>
+          </a:xfrm>
+          <a:prstGeom prst="ellipse">
+            <a:avLst/>
+          </a:prstGeom>
+          <a:solidFill>
+            <a:srgbClr val="F2B705"/>
+          </a:solidFill>
+          <a:ln>
+            <a:noFill/>
+          </a:ln>
+          <a:effectLst/>
+        </p:spPr>
+        <p:style>
+          <a:lnRef idx="1">
+            <a:schemeClr val="accent1"/>
+          </a:lnRef>
+          <a:fillRef idx="3">
+            <a:schemeClr val="accent1"/>
+          </a:fillRef>
+          <a:effectRef idx="2">
+            <a:schemeClr val="accent1"/>
+          </a:effectRef>
+          <a:fontRef idx="minor">
+            <a:schemeClr val="lt1"/>
+          </a:fontRef>
+        </p:style>
+        <p:txBody>
+          <a:bodyPr rtlCol="0" anchor="ctr" lIns="0" rIns="0" tIns="0" bIns="0"/>
+          <a:lstStyle/>
+          <a:p>
+            <a:pPr algn="ctr"/>
+            <a:r>
+              <a:rPr sz="1600" b="1">
+                <a:solidFill>
+                  <a:srgbClr val="202122"/>
+                </a:solidFill>
+                <a:latin typeface="Calibri"/>
+              </a:rPr>
+              <a:t>3</a:t>
+            </a:r>
+          </a:p>
+        </p:txBody>
+      </p:sp>
+      <p:sp>
+        <p:nvSpPr>
+          <p:cNvPr id="11" name="TextBox 10"/>
+          <p:cNvSpPr txBox="1"/>
+          <p:nvPr/>
+        </p:nvSpPr>
+        <p:spPr>
+          <a:xfrm>
+            <a:off x="1371600" y="4480560"/>
+            <a:ext cx="10271455" cy="1188720"/>
+          </a:xfrm>
+          <a:prstGeom prst="rect">
+            <a:avLst/>
+          </a:prstGeom>
+          <a:noFill/>
+        </p:spPr>
+        <p:txBody>
+          <a:bodyPr wrap="square" anchor="t" lIns="0" rIns="0" tIns="0" bIns="0"/>
+          <a:lstStyle/>
+          <a:p>
+            <a:pPr algn="l"/>
+            <a:r>
+              <a:rPr sz="2400" b="0" i="0">
+                <a:solidFill>
+                  <a:srgbClr val="202122"/>
+                </a:solidFill>
+                <a:latin typeface="Calibri"/>
+              </a:rPr>
+              <a:t>Name the four main mitigation themes.</a:t>
+            </a:r>
+          </a:p>
+        </p:txBody>
+      </p:sp>
+      <p:sp>
+        <p:nvSpPr>
+          <p:cNvPr id="12" name="TextBox 11"/>
+          <p:cNvSpPr txBox="1"/>
+          <p:nvPr/>
+        </p:nvSpPr>
+        <p:spPr>
+          <a:xfrm>
+            <a:off x="548640" y="5852160"/>
+            <a:ext cx="11094415" cy="365760"/>
+          </a:xfrm>
+          <a:prstGeom prst="rect">
+            <a:avLst/>
+          </a:prstGeom>
+          <a:noFill/>
+        </p:spPr>
+        <p:txBody>
+          <a:bodyPr wrap="square" anchor="t" lIns="0" rIns="0" tIns="0" bIns="0"/>
+          <a:lstStyle/>
+          <a:p>
+            <a:pPr algn="l"/>
+            <a:r>
+              <a:rPr sz="1300" b="0" i="1">
+                <a:solidFill>
+                  <a:srgbClr val="54595D"/>
+                </a:solidFill>
+                <a:latin typeface="Calibri"/>
+              </a:rPr>
+              <a:t>Answer on mini whiteboards or in your book. Answers are in the speaker notes.</a:t>
+            </a:r>
+          </a:p>
+        </p:txBody>
+      </p:sp>
+    </p:spTree>
+  </p:cSld>
+  <p:clrMapOvr>
+    <a:masterClrMapping/>
+  </p:clrMapOvr>
+</p:sld>
+</file>
+
+<file path=ppt/slides/slide12.xml><?xml version="1.0" encoding="utf-8"?>
+<p:sld xmlns:a="http://schemas.openxmlformats.org/drawingml/2006/main" xmlns:p="http://schemas.openxmlformats.org/presentationml/2006/main" xmlns:r="http://schemas.openxmlformats.org/officeDocument/2006/relationships">
+  <p:cSld>
+    <p:bg>
+      <p:bgPr>
+        <a:solidFill>
+          <a:srgbClr val="FFFFFF"/>
+        </a:solidFill>
+        <a:effectLst/>
+      </p:bgPr>
+    </p:bg>
+    <p:spTree>
+      <p:nvGrpSpPr>
+        <p:cNvPr id="1" name=""/>
+        <p:cNvGrpSpPr/>
+        <p:nvPr/>
+      </p:nvGrpSpPr>
+      <p:grpSpPr/>
+      <p:sp>
+        <p:nvSpPr>
+          <p:cNvPr id="2" name="TextBox 1"/>
+          <p:cNvSpPr txBox="1"/>
+          <p:nvPr/>
+        </p:nvSpPr>
+        <p:spPr>
+          <a:xfrm>
+            <a:off x="548640" y="320040"/>
+            <a:ext cx="11094415" cy="274320"/>
+          </a:xfrm>
+          <a:prstGeom prst="rect">
+            <a:avLst/>
+          </a:prstGeom>
+          <a:noFill/>
+        </p:spPr>
+        <p:txBody>
+          <a:bodyPr wrap="square" anchor="t" lIns="0" rIns="0" tIns="0" bIns="0"/>
+          <a:lstStyle/>
+          <a:p>
+            <a:pPr algn="l"/>
+            <a:r>
+              <a:rPr sz="1100" b="1" i="0">
+                <a:solidFill>
+                  <a:srgbClr val="54595D"/>
+                </a:solidFill>
+                <a:latin typeface="Calibri"/>
+              </a:rPr>
+              <a:t>CORE COMPONENT  ·  Core Paper 2</a:t>
+            </a:r>
+          </a:p>
+        </p:txBody>
+      </p:sp>
+      <p:sp>
+        <p:nvSpPr>
+          <p:cNvPr id="3" name="TextBox 2"/>
+          <p:cNvSpPr txBox="1"/>
+          <p:nvPr/>
+        </p:nvSpPr>
+        <p:spPr>
+          <a:xfrm>
+            <a:off x="548640" y="566928"/>
+            <a:ext cx="11094415" cy="822960"/>
+          </a:xfrm>
+          <a:prstGeom prst="rect">
+            <a:avLst/>
+          </a:prstGeom>
+          <a:noFill/>
+        </p:spPr>
+        <p:txBody>
+          <a:bodyPr wrap="square" anchor="ctr" lIns="0" rIns="0" tIns="0" bIns="0"/>
+          <a:lstStyle/>
+          <a:p>
+            <a:pPr algn="l"/>
+            <a:r>
+              <a:rPr sz="3200" b="1" i="0">
+                <a:solidFill>
+                  <a:srgbClr val="03306E"/>
+                </a:solidFill>
+                <a:latin typeface="Cambria"/>
+              </a:rPr>
+              <a:t>Key terms</a:t>
+            </a:r>
+          </a:p>
+        </p:txBody>
+      </p:sp>
+      <p:sp>
+        <p:nvSpPr>
+          <p:cNvPr id="4" name="TextBox 3"/>
+          <p:cNvSpPr txBox="1"/>
+          <p:nvPr/>
+        </p:nvSpPr>
+        <p:spPr>
+          <a:xfrm>
+            <a:off x="548640" y="6446520"/>
+            <a:ext cx="8229600" cy="274320"/>
+          </a:xfrm>
+          <a:prstGeom prst="rect">
+            <a:avLst/>
+          </a:prstGeom>
+          <a:noFill/>
+        </p:spPr>
+        <p:txBody>
+          <a:bodyPr wrap="square" anchor="t" lIns="0" rIns="0" tIns="0" bIns="0"/>
+          <a:lstStyle/>
+          <a:p>
+            <a:pPr algn="l"/>
+            <a:r>
+              <a:rPr sz="1000" b="0" i="0">
+                <a:solidFill>
+                  <a:srgbClr val="54595D"/>
+                </a:solidFill>
+                <a:latin typeface="Calibri"/>
+              </a:rPr>
+              <a:t>Digital Support and Security T Level  ·  Health and Safety in Digital Work</a:t>
+            </a:r>
+          </a:p>
+        </p:txBody>
+      </p:sp>
+      <p:sp>
+        <p:nvSpPr>
+          <p:cNvPr id="5" name="TextBox 4"/>
+          <p:cNvSpPr txBox="1"/>
+          <p:nvPr/>
+        </p:nvSpPr>
+        <p:spPr>
+          <a:xfrm>
+            <a:off x="10728655" y="6446520"/>
+            <a:ext cx="914400" cy="274320"/>
+          </a:xfrm>
+          <a:prstGeom prst="rect">
+            <a:avLst/>
+          </a:prstGeom>
+          <a:noFill/>
+        </p:spPr>
+        <p:txBody>
+          <a:bodyPr wrap="square" anchor="t" lIns="0" rIns="0" tIns="0" bIns="0"/>
+          <a:lstStyle/>
+          <a:p>
+            <a:pPr algn="r"/>
+            <a:r>
+              <a:rPr sz="1000" b="0" i="0">
+                <a:solidFill>
+                  <a:srgbClr val="54595D"/>
+                </a:solidFill>
+                <a:latin typeface="Calibri"/>
+              </a:rPr>
+              <a:t>12</a:t>
+            </a:r>
+          </a:p>
+        </p:txBody>
+      </p:sp>
+      <p:sp>
+        <p:nvSpPr>
+          <p:cNvPr id="6" name="Rounded Rectangle 5"/>
+          <p:cNvSpPr/>
+          <p:nvPr/>
+        </p:nvSpPr>
+        <p:spPr>
+          <a:xfrm>
+            <a:off x="548640" y="1600200"/>
+            <a:ext cx="5432907" cy="2171700"/>
+          </a:xfrm>
+          <a:prstGeom prst="roundRect">
+            <a:avLst>
+              <a:gd name="adj" fmla="val 8000"/>
+            </a:avLst>
+          </a:prstGeom>
+          <a:solidFill>
+            <a:srgbClr val="EAF3FF"/>
+          </a:solidFill>
+          <a:ln>
+            <a:noFill/>
+          </a:ln>
+          <a:effectLst/>
+        </p:spPr>
+        <p:style>
+          <a:lnRef idx="1">
+            <a:schemeClr val="accent1"/>
+          </a:lnRef>
+          <a:fillRef idx="3">
+            <a:schemeClr val="accent1"/>
+          </a:fillRef>
+          <a:effectRef idx="2">
+            <a:schemeClr val="accent1"/>
+          </a:effectRef>
+          <a:fontRef idx="minor">
+            <a:schemeClr val="lt1"/>
+          </a:fontRef>
+        </p:style>
+        <p:txBody>
+          <a:bodyPr rtlCol="0" anchor="ctr"/>
+          <a:lstStyle/>
+          <a:p/>
+        </p:txBody>
+      </p:sp>
+      <p:sp>
+        <p:nvSpPr>
+          <p:cNvPr id="7" name="TextBox 6"/>
+          <p:cNvSpPr txBox="1"/>
+          <p:nvPr/>
+        </p:nvSpPr>
+        <p:spPr>
+          <a:xfrm>
+            <a:off x="777240" y="1691640"/>
+            <a:ext cx="4975707" cy="1988819"/>
+          </a:xfrm>
+          <a:prstGeom prst="rect">
+            <a:avLst/>
+          </a:prstGeom>
+          <a:noFill/>
+        </p:spPr>
+        <p:txBody>
+          <a:bodyPr wrap="square" anchor="ctr" lIns="0" rIns="0" tIns="0" bIns="0"/>
+          <a:lstStyle/>
+          <a:p>
+            <a:pPr algn="l"/>
+            <a:r>
+              <a:rPr sz="1900" b="1" i="0">
+                <a:solidFill>
+                  <a:srgbClr val="03306E"/>
+                </a:solidFill>
+                <a:latin typeface="Calibri"/>
+              </a:rPr>
+              <a:t>DSE</a:t>
+            </a:r>
+            <a:r>
+              <a:rPr sz="1900">
+                <a:solidFill>
+                  <a:srgbClr val="202122"/>
+                </a:solidFill>
+                <a:latin typeface="Calibri"/>
+              </a:rPr>
+              <a:t>  display screen equipment, such as monitors and laptops.</a:t>
+            </a:r>
+          </a:p>
+        </p:txBody>
+      </p:sp>
+      <p:sp>
+        <p:nvSpPr>
+          <p:cNvPr id="8" name="Rounded Rectangle 7"/>
+          <p:cNvSpPr/>
+          <p:nvPr/>
+        </p:nvSpPr>
+        <p:spPr>
+          <a:xfrm>
+            <a:off x="6210147" y="1600200"/>
+            <a:ext cx="5432907" cy="2171700"/>
+          </a:xfrm>
+          <a:prstGeom prst="roundRect">
+            <a:avLst>
+              <a:gd name="adj" fmla="val 8000"/>
+            </a:avLst>
+          </a:prstGeom>
+          <a:solidFill>
+            <a:srgbClr val="EAF3FF"/>
+          </a:solidFill>
+          <a:ln>
+            <a:noFill/>
+          </a:ln>
+          <a:effectLst/>
+        </p:spPr>
+        <p:style>
+          <a:lnRef idx="1">
+            <a:schemeClr val="accent1"/>
+          </a:lnRef>
+          <a:fillRef idx="3">
+            <a:schemeClr val="accent1"/>
+          </a:fillRef>
+          <a:effectRef idx="2">
+            <a:schemeClr val="accent1"/>
+          </a:effectRef>
+          <a:fontRef idx="minor">
+            <a:schemeClr val="lt1"/>
+          </a:fontRef>
+        </p:style>
+        <p:txBody>
+          <a:bodyPr rtlCol="0" anchor="ctr"/>
+          <a:lstStyle/>
+          <a:p/>
+        </p:txBody>
+      </p:sp>
+      <p:sp>
+        <p:nvSpPr>
+          <p:cNvPr id="9" name="TextBox 8"/>
+          <p:cNvSpPr txBox="1"/>
+          <p:nvPr/>
+        </p:nvSpPr>
+        <p:spPr>
+          <a:xfrm>
+            <a:off x="6438747" y="1691640"/>
+            <a:ext cx="4975707" cy="1988819"/>
+          </a:xfrm>
+          <a:prstGeom prst="rect">
+            <a:avLst/>
+          </a:prstGeom>
+          <a:noFill/>
+        </p:spPr>
+        <p:txBody>
+          <a:bodyPr wrap="square" anchor="ctr" lIns="0" rIns="0" tIns="0" bIns="0"/>
+          <a:lstStyle/>
+          <a:p>
+            <a:pPr algn="l"/>
+            <a:r>
+              <a:rPr sz="1900" b="1" i="0">
+                <a:solidFill>
+                  <a:srgbClr val="03306E"/>
+                </a:solidFill>
+                <a:latin typeface="Calibri"/>
+              </a:rPr>
+              <a:t>Risk assessment</a:t>
+            </a:r>
+            <a:r>
+              <a:rPr sz="1900">
+                <a:solidFill>
+                  <a:srgbClr val="202122"/>
+                </a:solidFill>
+                <a:latin typeface="Calibri"/>
+              </a:rPr>
+              <a:t>  identifying hazards and deciding how to control them.</a:t>
+            </a:r>
+          </a:p>
+        </p:txBody>
+      </p:sp>
+      <p:sp>
+        <p:nvSpPr>
+          <p:cNvPr id="10" name="Rounded Rectangle 9"/>
+          <p:cNvSpPr/>
+          <p:nvPr/>
+        </p:nvSpPr>
+        <p:spPr>
+          <a:xfrm>
+            <a:off x="548640" y="4000500"/>
+            <a:ext cx="5432907" cy="2171700"/>
+          </a:xfrm>
+          <a:prstGeom prst="roundRect">
+            <a:avLst>
+              <a:gd name="adj" fmla="val 8000"/>
+            </a:avLst>
+          </a:prstGeom>
+          <a:solidFill>
+            <a:srgbClr val="EAF3FF"/>
+          </a:solidFill>
+          <a:ln>
+            <a:noFill/>
+          </a:ln>
+          <a:effectLst/>
+        </p:spPr>
+        <p:style>
+          <a:lnRef idx="1">
+            <a:schemeClr val="accent1"/>
+          </a:lnRef>
+          <a:fillRef idx="3">
+            <a:schemeClr val="accent1"/>
+          </a:fillRef>
+          <a:effectRef idx="2">
+            <a:schemeClr val="accent1"/>
+          </a:effectRef>
+          <a:fontRef idx="minor">
+            <a:schemeClr val="lt1"/>
+          </a:fontRef>
+        </p:style>
+        <p:txBody>
+          <a:bodyPr rtlCol="0" anchor="ctr"/>
+          <a:lstStyle/>
+          <a:p/>
+        </p:txBody>
+      </p:sp>
+      <p:sp>
+        <p:nvSpPr>
+          <p:cNvPr id="11" name="TextBox 10"/>
+          <p:cNvSpPr txBox="1"/>
+          <p:nvPr/>
+        </p:nvSpPr>
+        <p:spPr>
+          <a:xfrm>
+            <a:off x="777240" y="4091939"/>
+            <a:ext cx="4975707" cy="1988819"/>
+          </a:xfrm>
+          <a:prstGeom prst="rect">
+            <a:avLst/>
+          </a:prstGeom>
+          <a:noFill/>
+        </p:spPr>
+        <p:txBody>
+          <a:bodyPr wrap="square" anchor="ctr" lIns="0" rIns="0" tIns="0" bIns="0"/>
+          <a:lstStyle/>
+          <a:p>
+            <a:pPr algn="l"/>
+            <a:r>
+              <a:rPr sz="1900" b="1" i="0">
+                <a:solidFill>
+                  <a:srgbClr val="03306E"/>
+                </a:solidFill>
+                <a:latin typeface="Calibri"/>
+              </a:rPr>
+              <a:t>PPE</a:t>
+            </a:r>
+            <a:r>
+              <a:rPr sz="1900">
+                <a:solidFill>
+                  <a:srgbClr val="202122"/>
+                </a:solidFill>
+                <a:latin typeface="Calibri"/>
+              </a:rPr>
+              <a:t>  personal protective equipment, such as gloves or hard hats.</a:t>
+            </a:r>
+          </a:p>
+        </p:txBody>
+      </p:sp>
+      <p:sp>
+        <p:nvSpPr>
+          <p:cNvPr id="12" name="Rounded Rectangle 11"/>
+          <p:cNvSpPr/>
+          <p:nvPr/>
+        </p:nvSpPr>
+        <p:spPr>
+          <a:xfrm>
+            <a:off x="6210147" y="4000500"/>
+            <a:ext cx="5432907" cy="2171700"/>
+          </a:xfrm>
+          <a:prstGeom prst="roundRect">
+            <a:avLst>
+              <a:gd name="adj" fmla="val 8000"/>
+            </a:avLst>
+          </a:prstGeom>
+          <a:solidFill>
+            <a:srgbClr val="EAF3FF"/>
+          </a:solidFill>
+          <a:ln>
+            <a:noFill/>
+          </a:ln>
+          <a:effectLst/>
+        </p:spPr>
+        <p:style>
+          <a:lnRef idx="1">
+            <a:schemeClr val="accent1"/>
+          </a:lnRef>
+          <a:fillRef idx="3">
+            <a:schemeClr val="accent1"/>
+          </a:fillRef>
+          <a:effectRef idx="2">
+            <a:schemeClr val="accent1"/>
+          </a:effectRef>
+          <a:fontRef idx="minor">
+            <a:schemeClr val="lt1"/>
+          </a:fontRef>
+        </p:style>
+        <p:txBody>
+          <a:bodyPr rtlCol="0" anchor="ctr"/>
+          <a:lstStyle/>
+          <a:p/>
+        </p:txBody>
+      </p:sp>
+      <p:sp>
+        <p:nvSpPr>
+          <p:cNvPr id="13" name="TextBox 12"/>
+          <p:cNvSpPr txBox="1"/>
+          <p:nvPr/>
+        </p:nvSpPr>
+        <p:spPr>
+          <a:xfrm>
+            <a:off x="6438747" y="4091939"/>
+            <a:ext cx="4975707" cy="1988819"/>
+          </a:xfrm>
+          <a:prstGeom prst="rect">
+            <a:avLst/>
+          </a:prstGeom>
+          <a:noFill/>
+        </p:spPr>
+        <p:txBody>
+          <a:bodyPr wrap="square" anchor="ctr" lIns="0" rIns="0" tIns="0" bIns="0"/>
+          <a:lstStyle/>
+          <a:p>
+            <a:pPr algn="l"/>
+            <a:r>
+              <a:rPr sz="1900" b="1" i="0">
+                <a:solidFill>
+                  <a:srgbClr val="03306E"/>
+                </a:solidFill>
+                <a:latin typeface="Calibri"/>
+              </a:rPr>
+              <a:t>Competent person</a:t>
+            </a:r>
+            <a:r>
+              <a:rPr sz="1900">
+                <a:solidFill>
+                  <a:srgbClr val="202122"/>
+                </a:solidFill>
+                <a:latin typeface="Calibri"/>
+              </a:rPr>
+              <a:t>  someone with the training and experience to do the task safely.</a:t>
+            </a:r>
+          </a:p>
+        </p:txBody>
+      </p:sp>
+    </p:spTree>
+  </p:cSld>
+  <p:clrMapOvr>
+    <a:masterClrMapping/>
+  </p:clrMapOvr>
+</p:sld>
+</file>
+
+<file path=ppt/slides/slide13.xml><?xml version="1.0" encoding="utf-8"?>
+<p:sld xmlns:a="http://schemas.openxmlformats.org/drawingml/2006/main" xmlns:p="http://schemas.openxmlformats.org/presentationml/2006/main" xmlns:r="http://schemas.openxmlformats.org/officeDocument/2006/relationships">
+  <p:cSld>
+    <p:bg>
+      <p:bgPr>
+        <a:solidFill>
+          <a:srgbClr val="FFFFFF"/>
+        </a:solidFill>
+        <a:effectLst/>
+      </p:bgPr>
+    </p:bg>
+    <p:spTree>
+      <p:nvGrpSpPr>
+        <p:cNvPr id="1" name=""/>
+        <p:cNvGrpSpPr/>
+        <p:nvPr/>
+      </p:nvGrpSpPr>
+      <p:grpSpPr/>
+      <p:sp>
+        <p:nvSpPr>
+          <p:cNvPr id="2" name="TextBox 1"/>
+          <p:cNvSpPr txBox="1"/>
+          <p:nvPr/>
+        </p:nvSpPr>
+        <p:spPr>
+          <a:xfrm>
+            <a:off x="548640" y="320040"/>
+            <a:ext cx="11094415" cy="274320"/>
+          </a:xfrm>
+          <a:prstGeom prst="rect">
+            <a:avLst/>
+          </a:prstGeom>
+          <a:noFill/>
+        </p:spPr>
+        <p:txBody>
+          <a:bodyPr wrap="square" anchor="t" lIns="0" rIns="0" tIns="0" bIns="0"/>
+          <a:lstStyle/>
+          <a:p>
+            <a:pPr algn="l"/>
+            <a:r>
+              <a:rPr sz="1100" b="1" i="0">
+                <a:solidFill>
+                  <a:srgbClr val="54595D"/>
+                </a:solidFill>
+                <a:latin typeface="Calibri"/>
+              </a:rPr>
+              <a:t>CORE COMPONENT  ·  Core Paper 2</a:t>
+            </a:r>
+          </a:p>
+        </p:txBody>
+      </p:sp>
+      <p:sp>
+        <p:nvSpPr>
+          <p:cNvPr id="3" name="TextBox 2"/>
+          <p:cNvSpPr txBox="1"/>
+          <p:nvPr/>
+        </p:nvSpPr>
+        <p:spPr>
+          <a:xfrm>
+            <a:off x="548640" y="566928"/>
+            <a:ext cx="11094415" cy="822960"/>
+          </a:xfrm>
+          <a:prstGeom prst="rect">
+            <a:avLst/>
+          </a:prstGeom>
+          <a:noFill/>
+        </p:spPr>
+        <p:txBody>
+          <a:bodyPr wrap="square" anchor="ctr" lIns="0" rIns="0" tIns="0" bIns="0"/>
+          <a:lstStyle/>
+          <a:p>
+            <a:pPr algn="l"/>
+            <a:r>
+              <a:rPr sz="3200" b="1" i="0">
+                <a:solidFill>
+                  <a:srgbClr val="03306E"/>
+                </a:solidFill>
+                <a:latin typeface="Cambria"/>
+              </a:rPr>
+              <a:t>Check your understanding</a:t>
+            </a:r>
+          </a:p>
+        </p:txBody>
+      </p:sp>
+      <p:sp>
+        <p:nvSpPr>
+          <p:cNvPr id="4" name="TextBox 3"/>
+          <p:cNvSpPr txBox="1"/>
+          <p:nvPr/>
+        </p:nvSpPr>
+        <p:spPr>
+          <a:xfrm>
+            <a:off x="548640" y="6446520"/>
+            <a:ext cx="8229600" cy="274320"/>
+          </a:xfrm>
+          <a:prstGeom prst="rect">
+            <a:avLst/>
+          </a:prstGeom>
+          <a:noFill/>
+        </p:spPr>
+        <p:txBody>
+          <a:bodyPr wrap="square" anchor="t" lIns="0" rIns="0" tIns="0" bIns="0"/>
+          <a:lstStyle/>
+          <a:p>
+            <a:pPr algn="l"/>
+            <a:r>
+              <a:rPr sz="1000" b="0" i="0">
+                <a:solidFill>
+                  <a:srgbClr val="54595D"/>
+                </a:solidFill>
+                <a:latin typeface="Calibri"/>
+              </a:rPr>
+              <a:t>Digital Support and Security T Level  ·  Health and Safety in Digital Work</a:t>
+            </a:r>
+          </a:p>
+        </p:txBody>
+      </p:sp>
+      <p:sp>
+        <p:nvSpPr>
+          <p:cNvPr id="5" name="TextBox 4"/>
+          <p:cNvSpPr txBox="1"/>
+          <p:nvPr/>
+        </p:nvSpPr>
+        <p:spPr>
+          <a:xfrm>
+            <a:off x="10728655" y="6446520"/>
+            <a:ext cx="914400" cy="274320"/>
+          </a:xfrm>
+          <a:prstGeom prst="rect">
+            <a:avLst/>
+          </a:prstGeom>
+          <a:noFill/>
+        </p:spPr>
+        <p:txBody>
+          <a:bodyPr wrap="square" anchor="t" lIns="0" rIns="0" tIns="0" bIns="0"/>
+          <a:lstStyle/>
+          <a:p>
+            <a:pPr algn="r"/>
+            <a:r>
+              <a:rPr sz="1000" b="0" i="0">
+                <a:solidFill>
+                  <a:srgbClr val="54595D"/>
+                </a:solidFill>
+                <a:latin typeface="Calibri"/>
+              </a:rPr>
+              <a:t>13</a:t>
+            </a:r>
+          </a:p>
+        </p:txBody>
+      </p:sp>
+      <p:sp>
+        <p:nvSpPr>
+          <p:cNvPr id="6" name="Oval 5"/>
+          <p:cNvSpPr/>
+          <p:nvPr/>
+        </p:nvSpPr>
+        <p:spPr>
+          <a:xfrm>
+            <a:off x="548640" y="1618488"/>
+            <a:ext cx="411480" cy="411480"/>
+          </a:xfrm>
+          <a:prstGeom prst="ellipse">
+            <a:avLst/>
+          </a:prstGeom>
+          <a:solidFill>
+            <a:srgbClr val="F2B705"/>
+          </a:solidFill>
+          <a:ln>
+            <a:noFill/>
+          </a:ln>
+          <a:effectLst/>
+        </p:spPr>
+        <p:style>
+          <a:lnRef idx="1">
+            <a:schemeClr val="accent1"/>
+          </a:lnRef>
+          <a:fillRef idx="3">
+            <a:schemeClr val="accent1"/>
+          </a:fillRef>
+          <a:effectRef idx="2">
+            <a:schemeClr val="accent1"/>
+          </a:effectRef>
+          <a:fontRef idx="minor">
+            <a:schemeClr val="lt1"/>
+          </a:fontRef>
+        </p:style>
+        <p:txBody>
+          <a:bodyPr rtlCol="0" anchor="ctr" lIns="0" rIns="0" tIns="0" bIns="0"/>
+          <a:lstStyle/>
+          <a:p>
+            <a:pPr algn="ctr"/>
+            <a:r>
+              <a:rPr sz="1400" b="1">
+                <a:solidFill>
+                  <a:srgbClr val="202122"/>
+                </a:solidFill>
+                <a:latin typeface="Calibri"/>
+              </a:rPr>
+              <a:t>1</a:t>
+            </a:r>
+          </a:p>
+        </p:txBody>
+      </p:sp>
+      <p:sp>
+        <p:nvSpPr>
+          <p:cNvPr id="7" name="TextBox 6"/>
+          <p:cNvSpPr txBox="1"/>
+          <p:nvPr/>
+        </p:nvSpPr>
+        <p:spPr>
+          <a:xfrm>
+            <a:off x="1234440" y="1600200"/>
+            <a:ext cx="10408615" cy="1030986"/>
+          </a:xfrm>
+          <a:prstGeom prst="rect">
+            <a:avLst/>
+          </a:prstGeom>
+          <a:noFill/>
+        </p:spPr>
+        <p:txBody>
+          <a:bodyPr wrap="square" anchor="t" lIns="0" rIns="0" tIns="0" bIns="0"/>
+          <a:lstStyle/>
+          <a:p>
+            <a:pPr algn="l"/>
+            <a:r>
+              <a:rPr sz="2200" b="0" i="0">
+                <a:solidFill>
+                  <a:srgbClr val="202122"/>
+                </a:solidFill>
+                <a:latin typeface="Calibri"/>
+              </a:rPr>
+              <a:t>Name two duties employers have under the Health and Safety at Work Act.</a:t>
+            </a:r>
+          </a:p>
+        </p:txBody>
+      </p:sp>
+      <p:sp>
+        <p:nvSpPr>
+          <p:cNvPr id="8" name="Oval 7"/>
+          <p:cNvSpPr/>
+          <p:nvPr/>
+        </p:nvSpPr>
+        <p:spPr>
+          <a:xfrm>
+            <a:off x="548640" y="2814066"/>
+            <a:ext cx="411480" cy="411480"/>
+          </a:xfrm>
+          <a:prstGeom prst="ellipse">
+            <a:avLst/>
+          </a:prstGeom>
+          <a:solidFill>
+            <a:srgbClr val="F2B705"/>
+          </a:solidFill>
+          <a:ln>
+            <a:noFill/>
+          </a:ln>
+          <a:effectLst/>
+        </p:spPr>
+        <p:style>
+          <a:lnRef idx="1">
+            <a:schemeClr val="accent1"/>
+          </a:lnRef>
+          <a:fillRef idx="3">
+            <a:schemeClr val="accent1"/>
+          </a:fillRef>
+          <a:effectRef idx="2">
+            <a:schemeClr val="accent1"/>
+          </a:effectRef>
+          <a:fontRef idx="minor">
+            <a:schemeClr val="lt1"/>
+          </a:fontRef>
+        </p:style>
+        <p:txBody>
+          <a:bodyPr rtlCol="0" anchor="ctr" lIns="0" rIns="0" tIns="0" bIns="0"/>
+          <a:lstStyle/>
+          <a:p>
+            <a:pPr algn="ctr"/>
+            <a:r>
+              <a:rPr sz="1400" b="1">
+                <a:solidFill>
+                  <a:srgbClr val="202122"/>
+                </a:solidFill>
+                <a:latin typeface="Calibri"/>
+              </a:rPr>
+              <a:t>2</a:t>
+            </a:r>
+          </a:p>
+        </p:txBody>
+      </p:sp>
+      <p:sp>
+        <p:nvSpPr>
+          <p:cNvPr id="9" name="TextBox 8"/>
+          <p:cNvSpPr txBox="1"/>
+          <p:nvPr/>
+        </p:nvSpPr>
+        <p:spPr>
+          <a:xfrm>
+            <a:off x="1234440" y="2795778"/>
+            <a:ext cx="10408615" cy="1030986"/>
+          </a:xfrm>
+          <a:prstGeom prst="rect">
+            <a:avLst/>
+          </a:prstGeom>
+          <a:noFill/>
+        </p:spPr>
+        <p:txBody>
+          <a:bodyPr wrap="square" anchor="t" lIns="0" rIns="0" tIns="0" bIns="0"/>
+          <a:lstStyle/>
+          <a:p>
+            <a:pPr algn="l"/>
+            <a:r>
+              <a:rPr sz="2200" b="0" i="0">
+                <a:solidFill>
+                  <a:srgbClr val="202122"/>
+                </a:solidFill>
+                <a:latin typeface="Calibri"/>
+              </a:rPr>
+              <a:t>What must an employer provide on request under the DSE regulations?</a:t>
+            </a:r>
+          </a:p>
+        </p:txBody>
+      </p:sp>
+      <p:sp>
+        <p:nvSpPr>
+          <p:cNvPr id="10" name="Oval 9"/>
+          <p:cNvSpPr/>
+          <p:nvPr/>
+        </p:nvSpPr>
+        <p:spPr>
+          <a:xfrm>
+            <a:off x="548640" y="4009644"/>
+            <a:ext cx="411480" cy="411480"/>
+          </a:xfrm>
+          <a:prstGeom prst="ellipse">
+            <a:avLst/>
+          </a:prstGeom>
+          <a:solidFill>
+            <a:srgbClr val="F2B705"/>
+          </a:solidFill>
+          <a:ln>
+            <a:noFill/>
+          </a:ln>
+          <a:effectLst/>
+        </p:spPr>
+        <p:style>
+          <a:lnRef idx="1">
+            <a:schemeClr val="accent1"/>
+          </a:lnRef>
+          <a:fillRef idx="3">
+            <a:schemeClr val="accent1"/>
+          </a:fillRef>
+          <a:effectRef idx="2">
+            <a:schemeClr val="accent1"/>
+          </a:effectRef>
+          <a:fontRef idx="minor">
+            <a:schemeClr val="lt1"/>
+          </a:fontRef>
+        </p:style>
+        <p:txBody>
+          <a:bodyPr rtlCol="0" anchor="ctr" lIns="0" rIns="0" tIns="0" bIns="0"/>
+          <a:lstStyle/>
+          <a:p>
+            <a:pPr algn="ctr"/>
+            <a:r>
+              <a:rPr sz="1400" b="1">
+                <a:solidFill>
+                  <a:srgbClr val="202122"/>
+                </a:solidFill>
+                <a:latin typeface="Calibri"/>
+              </a:rPr>
+              <a:t>3</a:t>
+            </a:r>
+          </a:p>
+        </p:txBody>
+      </p:sp>
+      <p:sp>
+        <p:nvSpPr>
+          <p:cNvPr id="11" name="TextBox 10"/>
+          <p:cNvSpPr txBox="1"/>
+          <p:nvPr/>
+        </p:nvSpPr>
+        <p:spPr>
+          <a:xfrm>
+            <a:off x="1234440" y="3991356"/>
+            <a:ext cx="10408615" cy="1030986"/>
+          </a:xfrm>
+          <a:prstGeom prst="rect">
+            <a:avLst/>
+          </a:prstGeom>
+          <a:noFill/>
+        </p:spPr>
+        <p:txBody>
+          <a:bodyPr wrap="square" anchor="t" lIns="0" rIns="0" tIns="0" bIns="0"/>
+          <a:lstStyle/>
+          <a:p>
+            <a:pPr algn="l"/>
+            <a:r>
+              <a:rPr sz="2200" b="0" i="0">
+                <a:solidFill>
+                  <a:srgbClr val="202122"/>
+                </a:solidFill>
+                <a:latin typeface="Calibri"/>
+              </a:rPr>
+              <a:t>What is the first rule of the Work at Height Regulations?</a:t>
+            </a:r>
+          </a:p>
+        </p:txBody>
+      </p:sp>
+      <p:sp>
+        <p:nvSpPr>
+          <p:cNvPr id="12" name="Oval 11"/>
+          <p:cNvSpPr/>
+          <p:nvPr/>
+        </p:nvSpPr>
+        <p:spPr>
+          <a:xfrm>
+            <a:off x="548640" y="5205221"/>
+            <a:ext cx="411480" cy="411480"/>
+          </a:xfrm>
+          <a:prstGeom prst="ellipse">
+            <a:avLst/>
+          </a:prstGeom>
+          <a:solidFill>
+            <a:srgbClr val="F2B705"/>
+          </a:solidFill>
+          <a:ln>
+            <a:noFill/>
+          </a:ln>
+          <a:effectLst/>
+        </p:spPr>
+        <p:style>
+          <a:lnRef idx="1">
+            <a:schemeClr val="accent1"/>
+          </a:lnRef>
+          <a:fillRef idx="3">
+            <a:schemeClr val="accent1"/>
+          </a:fillRef>
+          <a:effectRef idx="2">
+            <a:schemeClr val="accent1"/>
+          </a:effectRef>
+          <a:fontRef idx="minor">
+            <a:schemeClr val="lt1"/>
+          </a:fontRef>
+        </p:style>
+        <p:txBody>
+          <a:bodyPr rtlCol="0" anchor="ctr" lIns="0" rIns="0" tIns="0" bIns="0"/>
+          <a:lstStyle/>
+          <a:p>
+            <a:pPr algn="ctr"/>
+            <a:r>
+              <a:rPr sz="1400" b="1">
+                <a:solidFill>
+                  <a:srgbClr val="202122"/>
+                </a:solidFill>
+                <a:latin typeface="Calibri"/>
+              </a:rPr>
+              <a:t>4</a:t>
+            </a:r>
+          </a:p>
+        </p:txBody>
+      </p:sp>
+      <p:sp>
+        <p:nvSpPr>
+          <p:cNvPr id="13" name="TextBox 12"/>
+          <p:cNvSpPr txBox="1"/>
+          <p:nvPr/>
+        </p:nvSpPr>
+        <p:spPr>
+          <a:xfrm>
+            <a:off x="1234440" y="5186933"/>
+            <a:ext cx="10408615" cy="1030986"/>
+          </a:xfrm>
+          <a:prstGeom prst="rect">
+            <a:avLst/>
+          </a:prstGeom>
+          <a:noFill/>
+        </p:spPr>
+        <p:txBody>
+          <a:bodyPr wrap="square" anchor="t" lIns="0" rIns="0" tIns="0" bIns="0"/>
+          <a:lstStyle/>
+          <a:p>
+            <a:pPr algn="l"/>
+            <a:r>
+              <a:rPr sz="2200" b="0" i="0">
+                <a:solidFill>
+                  <a:srgbClr val="202122"/>
+                </a:solidFill>
+                <a:latin typeface="Calibri"/>
+              </a:rPr>
+              <a:t>Give one mitigation for manual handling risks.</a:t>
+            </a:r>
+          </a:p>
+        </p:txBody>
+      </p:sp>
+    </p:spTree>
+  </p:cSld>
+  <p:clrMapOvr>
+    <a:masterClrMapping/>
+  </p:clrMapOvr>
+</p:sld>
+</file>
+
+<file path=ppt/slides/slide14.xml><?xml version="1.0" encoding="utf-8"?>
+<p:sld xmlns:a="http://schemas.openxmlformats.org/drawingml/2006/main" xmlns:p="http://schemas.openxmlformats.org/presentationml/2006/main" xmlns:r="http://schemas.openxmlformats.org/officeDocument/2006/relationships">
+  <p:cSld>
+    <p:bg>
+      <p:bgPr>
+        <a:solidFill>
+          <a:srgbClr val="FFFFFF"/>
+        </a:solidFill>
+        <a:effectLst/>
+      </p:bgPr>
+    </p:bg>
+    <p:spTree>
+      <p:nvGrpSpPr>
+        <p:cNvPr id="1" name=""/>
+        <p:cNvGrpSpPr/>
+        <p:nvPr/>
+      </p:nvGrpSpPr>
+      <p:grpSpPr/>
+      <p:sp>
+        <p:nvSpPr>
+          <p:cNvPr id="2" name="TextBox 1"/>
+          <p:cNvSpPr txBox="1"/>
+          <p:nvPr/>
+        </p:nvSpPr>
+        <p:spPr>
+          <a:xfrm>
+            <a:off x="548640" y="320040"/>
+            <a:ext cx="11094415" cy="274320"/>
+          </a:xfrm>
+          <a:prstGeom prst="rect">
+            <a:avLst/>
+          </a:prstGeom>
+          <a:noFill/>
+        </p:spPr>
+        <p:txBody>
+          <a:bodyPr wrap="square" anchor="t" lIns="0" rIns="0" tIns="0" bIns="0"/>
+          <a:lstStyle/>
+          <a:p>
+            <a:pPr algn="l"/>
+            <a:r>
+              <a:rPr sz="1100" b="1" i="0">
+                <a:solidFill>
+                  <a:srgbClr val="54595D"/>
+                </a:solidFill>
+                <a:latin typeface="Calibri"/>
+              </a:rPr>
+              <a:t>CORE COMPONENT  ·  Core Paper 2</a:t>
+            </a:r>
+          </a:p>
+        </p:txBody>
+      </p:sp>
+      <p:sp>
+        <p:nvSpPr>
+          <p:cNvPr id="3" name="TextBox 2"/>
+          <p:cNvSpPr txBox="1"/>
+          <p:nvPr/>
+        </p:nvSpPr>
+        <p:spPr>
+          <a:xfrm>
+            <a:off x="548640" y="566928"/>
+            <a:ext cx="11094415" cy="822960"/>
+          </a:xfrm>
+          <a:prstGeom prst="rect">
+            <a:avLst/>
+          </a:prstGeom>
+          <a:noFill/>
+        </p:spPr>
+        <p:txBody>
+          <a:bodyPr wrap="square" anchor="ctr" lIns="0" rIns="0" tIns="0" bIns="0"/>
+          <a:lstStyle/>
+          <a:p>
+            <a:pPr algn="l"/>
+            <a:r>
+              <a:rPr sz="3200" b="1" i="0">
+                <a:solidFill>
+                  <a:srgbClr val="03306E"/>
+                </a:solidFill>
+                <a:latin typeface="Cambria"/>
+              </a:rPr>
+              <a:t>Answers</a:t>
+            </a:r>
+          </a:p>
+        </p:txBody>
+      </p:sp>
+      <p:sp>
+        <p:nvSpPr>
+          <p:cNvPr id="4" name="TextBox 3"/>
+          <p:cNvSpPr txBox="1"/>
+          <p:nvPr/>
+        </p:nvSpPr>
+        <p:spPr>
+          <a:xfrm>
+            <a:off x="548640" y="6446520"/>
+            <a:ext cx="8229600" cy="274320"/>
+          </a:xfrm>
+          <a:prstGeom prst="rect">
+            <a:avLst/>
+          </a:prstGeom>
+          <a:noFill/>
+        </p:spPr>
+        <p:txBody>
+          <a:bodyPr wrap="square" anchor="t" lIns="0" rIns="0" tIns="0" bIns="0"/>
+          <a:lstStyle/>
+          <a:p>
+            <a:pPr algn="l"/>
+            <a:r>
+              <a:rPr sz="1000" b="0" i="0">
+                <a:solidFill>
+                  <a:srgbClr val="54595D"/>
+                </a:solidFill>
+                <a:latin typeface="Calibri"/>
+              </a:rPr>
+              <a:t>Digital Support and Security T Level  ·  Health and Safety in Digital Work</a:t>
+            </a:r>
+          </a:p>
+        </p:txBody>
+      </p:sp>
+      <p:sp>
+        <p:nvSpPr>
+          <p:cNvPr id="5" name="TextBox 4"/>
+          <p:cNvSpPr txBox="1"/>
+          <p:nvPr/>
+        </p:nvSpPr>
+        <p:spPr>
+          <a:xfrm>
+            <a:off x="10728655" y="6446520"/>
+            <a:ext cx="914400" cy="274320"/>
+          </a:xfrm>
+          <a:prstGeom prst="rect">
+            <a:avLst/>
+          </a:prstGeom>
+          <a:noFill/>
+        </p:spPr>
+        <p:txBody>
+          <a:bodyPr wrap="square" anchor="t" lIns="0" rIns="0" tIns="0" bIns="0"/>
+          <a:lstStyle/>
+          <a:p>
+            <a:pPr algn="r"/>
+            <a:r>
+              <a:rPr sz="1000" b="0" i="0">
+                <a:solidFill>
+                  <a:srgbClr val="54595D"/>
+                </a:solidFill>
+                <a:latin typeface="Calibri"/>
+              </a:rPr>
+              <a:t>14</a:t>
+            </a:r>
+          </a:p>
+        </p:txBody>
+      </p:sp>
+      <p:sp>
+        <p:nvSpPr>
+          <p:cNvPr id="6" name="Oval 5"/>
+          <p:cNvSpPr/>
+          <p:nvPr/>
+        </p:nvSpPr>
+        <p:spPr>
+          <a:xfrm>
+            <a:off x="548640" y="1618488"/>
+            <a:ext cx="411480" cy="411480"/>
+          </a:xfrm>
+          <a:prstGeom prst="ellipse">
+            <a:avLst/>
+          </a:prstGeom>
+          <a:solidFill>
+            <a:srgbClr val="F2B705"/>
+          </a:solidFill>
+          <a:ln>
+            <a:noFill/>
+          </a:ln>
+          <a:effectLst/>
+        </p:spPr>
+        <p:style>
+          <a:lnRef idx="1">
+            <a:schemeClr val="accent1"/>
+          </a:lnRef>
+          <a:fillRef idx="3">
+            <a:schemeClr val="accent1"/>
+          </a:fillRef>
+          <a:effectRef idx="2">
+            <a:schemeClr val="accent1"/>
+          </a:effectRef>
+          <a:fontRef idx="minor">
+            <a:schemeClr val="lt1"/>
+          </a:fontRef>
+        </p:style>
+        <p:txBody>
+          <a:bodyPr rtlCol="0" anchor="ctr" lIns="0" rIns="0" tIns="0" bIns="0"/>
+          <a:lstStyle/>
+          <a:p>
+            <a:pPr algn="ctr"/>
+            <a:r>
+              <a:rPr sz="1400" b="1">
+                <a:solidFill>
+                  <a:srgbClr val="202122"/>
+                </a:solidFill>
+                <a:latin typeface="Calibri"/>
+              </a:rPr>
+              <a:t>1</a:t>
+            </a:r>
+          </a:p>
+        </p:txBody>
+      </p:sp>
+      <p:sp>
+        <p:nvSpPr>
+          <p:cNvPr id="7" name="TextBox 6"/>
+          <p:cNvSpPr txBox="1"/>
+          <p:nvPr/>
+        </p:nvSpPr>
+        <p:spPr>
+          <a:xfrm>
+            <a:off x="1234440" y="1600200"/>
+            <a:ext cx="10408615" cy="1030986"/>
+          </a:xfrm>
+          <a:prstGeom prst="rect">
+            <a:avLst/>
+          </a:prstGeom>
+          <a:noFill/>
+        </p:spPr>
+        <p:txBody>
+          <a:bodyPr wrap="square" anchor="t" lIns="0" rIns="0" tIns="0" bIns="0"/>
+          <a:lstStyle/>
+          <a:p>
+            <a:pPr algn="l"/>
+            <a:r>
+              <a:rPr sz="1800" b="0" i="0">
+                <a:solidFill>
+                  <a:srgbClr val="54595D"/>
+                </a:solidFill>
+                <a:latin typeface="Calibri"/>
+              </a:rPr>
+              <a:t>Name two duties employers have under the Health and Safety at Work Act.</a:t>
+            </a:r>
+          </a:p>
+          <a:p>
+            <a:r>
+              <a:rPr sz="1800" b="1">
+                <a:solidFill>
+                  <a:srgbClr val="03306E"/>
+                </a:solidFill>
+                <a:latin typeface="Calibri"/>
+              </a:rPr>
+              <a:t>Any two of: safe environment, training, welfare provision, information, instruction and supervision.</a:t>
+            </a:r>
+          </a:p>
+        </p:txBody>
+      </p:sp>
+      <p:sp>
+        <p:nvSpPr>
+          <p:cNvPr id="8" name="Oval 7"/>
+          <p:cNvSpPr/>
+          <p:nvPr/>
+        </p:nvSpPr>
+        <p:spPr>
+          <a:xfrm>
+            <a:off x="548640" y="2814066"/>
+            <a:ext cx="411480" cy="411480"/>
+          </a:xfrm>
+          <a:prstGeom prst="ellipse">
+            <a:avLst/>
+          </a:prstGeom>
+          <a:solidFill>
+            <a:srgbClr val="F2B705"/>
+          </a:solidFill>
+          <a:ln>
+            <a:noFill/>
+          </a:ln>
+          <a:effectLst/>
+        </p:spPr>
+        <p:style>
+          <a:lnRef idx="1">
+            <a:schemeClr val="accent1"/>
+          </a:lnRef>
+          <a:fillRef idx="3">
+            <a:schemeClr val="accent1"/>
+          </a:fillRef>
+          <a:effectRef idx="2">
+            <a:schemeClr val="accent1"/>
+          </a:effectRef>
+          <a:fontRef idx="minor">
+            <a:schemeClr val="lt1"/>
+          </a:fontRef>
+        </p:style>
+        <p:txBody>
+          <a:bodyPr rtlCol="0" anchor="ctr" lIns="0" rIns="0" tIns="0" bIns="0"/>
+          <a:lstStyle/>
+          <a:p>
+            <a:pPr algn="ctr"/>
+            <a:r>
+              <a:rPr sz="1400" b="1">
+                <a:solidFill>
+                  <a:srgbClr val="202122"/>
+                </a:solidFill>
+                <a:latin typeface="Calibri"/>
+              </a:rPr>
+              <a:t>2</a:t>
+            </a:r>
+          </a:p>
+        </p:txBody>
+      </p:sp>
+      <p:sp>
+        <p:nvSpPr>
+          <p:cNvPr id="9" name="TextBox 8"/>
+          <p:cNvSpPr txBox="1"/>
+          <p:nvPr/>
+        </p:nvSpPr>
+        <p:spPr>
+          <a:xfrm>
+            <a:off x="1234440" y="2795778"/>
+            <a:ext cx="10408615" cy="1030986"/>
+          </a:xfrm>
+          <a:prstGeom prst="rect">
+            <a:avLst/>
+          </a:prstGeom>
+          <a:noFill/>
+        </p:spPr>
+        <p:txBody>
+          <a:bodyPr wrap="square" anchor="t" lIns="0" rIns="0" tIns="0" bIns="0"/>
+          <a:lstStyle/>
+          <a:p>
+            <a:pPr algn="l"/>
+            <a:r>
+              <a:rPr sz="1800" b="0" i="0">
+                <a:solidFill>
+                  <a:srgbClr val="54595D"/>
+                </a:solidFill>
+                <a:latin typeface="Calibri"/>
+              </a:rPr>
+              <a:t>What must an employer provide on request under the DSE regulations?</a:t>
+            </a:r>
+          </a:p>
+          <a:p>
+            <a:r>
+              <a:rPr sz="1800" b="1">
+                <a:solidFill>
+                  <a:srgbClr val="03306E"/>
+                </a:solidFill>
+                <a:latin typeface="Calibri"/>
+              </a:rPr>
+              <a:t>An eye test.</a:t>
+            </a:r>
+          </a:p>
+        </p:txBody>
+      </p:sp>
+      <p:sp>
+        <p:nvSpPr>
+          <p:cNvPr id="10" name="Oval 9"/>
+          <p:cNvSpPr/>
+          <p:nvPr/>
+        </p:nvSpPr>
+        <p:spPr>
+          <a:xfrm>
+            <a:off x="548640" y="4009644"/>
+            <a:ext cx="411480" cy="411480"/>
+          </a:xfrm>
+          <a:prstGeom prst="ellipse">
+            <a:avLst/>
+          </a:prstGeom>
+          <a:solidFill>
+            <a:srgbClr val="F2B705"/>
+          </a:solidFill>
+          <a:ln>
+            <a:noFill/>
+          </a:ln>
+          <a:effectLst/>
+        </p:spPr>
+        <p:style>
+          <a:lnRef idx="1">
+            <a:schemeClr val="accent1"/>
+          </a:lnRef>
+          <a:fillRef idx="3">
+            <a:schemeClr val="accent1"/>
+          </a:fillRef>
+          <a:effectRef idx="2">
+            <a:schemeClr val="accent1"/>
+          </a:effectRef>
+          <a:fontRef idx="minor">
+            <a:schemeClr val="lt1"/>
+          </a:fontRef>
+        </p:style>
+        <p:txBody>
+          <a:bodyPr rtlCol="0" anchor="ctr" lIns="0" rIns="0" tIns="0" bIns="0"/>
+          <a:lstStyle/>
+          <a:p>
+            <a:pPr algn="ctr"/>
+            <a:r>
+              <a:rPr sz="1400" b="1">
+                <a:solidFill>
+                  <a:srgbClr val="202122"/>
+                </a:solidFill>
+                <a:latin typeface="Calibri"/>
+              </a:rPr>
+              <a:t>3</a:t>
+            </a:r>
+          </a:p>
+        </p:txBody>
+      </p:sp>
+      <p:sp>
+        <p:nvSpPr>
+          <p:cNvPr id="11" name="TextBox 10"/>
+          <p:cNvSpPr txBox="1"/>
+          <p:nvPr/>
+        </p:nvSpPr>
+        <p:spPr>
+          <a:xfrm>
+            <a:off x="1234440" y="3991356"/>
+            <a:ext cx="10408615" cy="1030986"/>
+          </a:xfrm>
+          <a:prstGeom prst="rect">
+            <a:avLst/>
+          </a:prstGeom>
+          <a:noFill/>
+        </p:spPr>
+        <p:txBody>
+          <a:bodyPr wrap="square" anchor="t" lIns="0" rIns="0" tIns="0" bIns="0"/>
+          <a:lstStyle/>
+          <a:p>
+            <a:pPr algn="l"/>
+            <a:r>
+              <a:rPr sz="1800" b="0" i="0">
+                <a:solidFill>
+                  <a:srgbClr val="54595D"/>
+                </a:solidFill>
+                <a:latin typeface="Calibri"/>
+              </a:rPr>
+              <a:t>What is the first rule of the Work at Height Regulations?</a:t>
+            </a:r>
+          </a:p>
+          <a:p>
+            <a:r>
+              <a:rPr sz="1800" b="1">
+                <a:solidFill>
+                  <a:srgbClr val="03306E"/>
+                </a:solidFill>
+                <a:latin typeface="Calibri"/>
+              </a:rPr>
+              <a:t>Avoid working at height where possible; do as much as possible from the ground.</a:t>
+            </a:r>
+          </a:p>
+        </p:txBody>
+      </p:sp>
+      <p:sp>
+        <p:nvSpPr>
+          <p:cNvPr id="12" name="Oval 11"/>
+          <p:cNvSpPr/>
+          <p:nvPr/>
+        </p:nvSpPr>
+        <p:spPr>
+          <a:xfrm>
+            <a:off x="548640" y="5205221"/>
+            <a:ext cx="411480" cy="411480"/>
+          </a:xfrm>
+          <a:prstGeom prst="ellipse">
+            <a:avLst/>
+          </a:prstGeom>
+          <a:solidFill>
+            <a:srgbClr val="F2B705"/>
+          </a:solidFill>
+          <a:ln>
+            <a:noFill/>
+          </a:ln>
+          <a:effectLst/>
+        </p:spPr>
+        <p:style>
+          <a:lnRef idx="1">
+            <a:schemeClr val="accent1"/>
+          </a:lnRef>
+          <a:fillRef idx="3">
+            <a:schemeClr val="accent1"/>
+          </a:fillRef>
+          <a:effectRef idx="2">
+            <a:schemeClr val="accent1"/>
+          </a:effectRef>
+          <a:fontRef idx="minor">
+            <a:schemeClr val="lt1"/>
+          </a:fontRef>
+        </p:style>
+        <p:txBody>
+          <a:bodyPr rtlCol="0" anchor="ctr" lIns="0" rIns="0" tIns="0" bIns="0"/>
+          <a:lstStyle/>
+          <a:p>
+            <a:pPr algn="ctr"/>
+            <a:r>
+              <a:rPr sz="1400" b="1">
+                <a:solidFill>
+                  <a:srgbClr val="202122"/>
+                </a:solidFill>
+                <a:latin typeface="Calibri"/>
+              </a:rPr>
+              <a:t>4</a:t>
+            </a:r>
+          </a:p>
+        </p:txBody>
+      </p:sp>
+      <p:sp>
+        <p:nvSpPr>
+          <p:cNvPr id="13" name="TextBox 12"/>
+          <p:cNvSpPr txBox="1"/>
+          <p:nvPr/>
+        </p:nvSpPr>
+        <p:spPr>
+          <a:xfrm>
+            <a:off x="1234440" y="5186933"/>
+            <a:ext cx="10408615" cy="1030986"/>
+          </a:xfrm>
+          <a:prstGeom prst="rect">
+            <a:avLst/>
+          </a:prstGeom>
+          <a:noFill/>
+        </p:spPr>
+        <p:txBody>
+          <a:bodyPr wrap="square" anchor="t" lIns="0" rIns="0" tIns="0" bIns="0"/>
+          <a:lstStyle/>
+          <a:p>
+            <a:pPr algn="l"/>
+            <a:r>
+              <a:rPr sz="1800" b="0" i="0">
+                <a:solidFill>
+                  <a:srgbClr val="54595D"/>
+                </a:solidFill>
+                <a:latin typeface="Calibri"/>
+              </a:rPr>
+              <a:t>Give one mitigation for manual handling risks.</a:t>
+            </a:r>
+          </a:p>
+          <a:p>
+            <a:r>
+              <a:rPr sz="1800" b="1">
+                <a:solidFill>
+                  <a:srgbClr val="03306E"/>
+                </a:solidFill>
+                <a:latin typeface="Calibri"/>
+              </a:rPr>
+              <a:t>Trolleys, team lifts or manual handling training.</a:t>
+            </a:r>
+          </a:p>
+        </p:txBody>
+      </p:sp>
+    </p:spTree>
+  </p:cSld>
+  <p:clrMapOvr>
+    <a:masterClrMapping/>
+  </p:clrMapOvr>
+</p:sld>
+</file>
+
+<file path=ppt/slides/slide15.xml><?xml version="1.0" encoding="utf-8"?>
+<p:sld xmlns:a="http://schemas.openxmlformats.org/drawingml/2006/main" xmlns:p="http://schemas.openxmlformats.org/presentationml/2006/main" xmlns:r="http://schemas.openxmlformats.org/officeDocument/2006/relationships">
+  <p:cSld>
+    <p:bg>
+      <p:bgPr>
+        <a:solidFill>
+          <a:srgbClr val="FFFFFF"/>
+        </a:solidFill>
+        <a:effectLst/>
+      </p:bgPr>
+    </p:bg>
+    <p:spTree>
+      <p:nvGrpSpPr>
+        <p:cNvPr id="1" name=""/>
+        <p:cNvGrpSpPr/>
+        <p:nvPr/>
+      </p:nvGrpSpPr>
+      <p:grpSpPr/>
+      <p:sp>
+        <p:nvSpPr>
+          <p:cNvPr id="2" name="TextBox 1"/>
+          <p:cNvSpPr txBox="1"/>
+          <p:nvPr/>
+        </p:nvSpPr>
+        <p:spPr>
+          <a:xfrm>
+            <a:off x="548640" y="320040"/>
+            <a:ext cx="11094415" cy="274320"/>
+          </a:xfrm>
+          <a:prstGeom prst="rect">
+            <a:avLst/>
+          </a:prstGeom>
+          <a:noFill/>
+        </p:spPr>
+        <p:txBody>
+          <a:bodyPr wrap="square" anchor="t" lIns="0" rIns="0" tIns="0" bIns="0"/>
+          <a:lstStyle/>
+          <a:p>
+            <a:pPr algn="l"/>
+            <a:r>
+              <a:rPr sz="1100" b="1" i="0">
+                <a:solidFill>
+                  <a:srgbClr val="54595D"/>
+                </a:solidFill>
+                <a:latin typeface="Calibri"/>
+              </a:rPr>
+              <a:t>CORE COMPONENT  ·  Core Paper 2</a:t>
+            </a:r>
+          </a:p>
+        </p:txBody>
+      </p:sp>
+      <p:sp>
+        <p:nvSpPr>
+          <p:cNvPr id="3" name="TextBox 2"/>
+          <p:cNvSpPr txBox="1"/>
+          <p:nvPr/>
+        </p:nvSpPr>
+        <p:spPr>
+          <a:xfrm>
+            <a:off x="548640" y="566928"/>
+            <a:ext cx="11094415" cy="822960"/>
+          </a:xfrm>
+          <a:prstGeom prst="rect">
+            <a:avLst/>
+          </a:prstGeom>
+          <a:noFill/>
+        </p:spPr>
+        <p:txBody>
+          <a:bodyPr wrap="square" anchor="ctr" lIns="0" rIns="0" tIns="0" bIns="0"/>
+          <a:lstStyle/>
+          <a:p>
+            <a:pPr algn="l"/>
+            <a:r>
+              <a:rPr sz="3200" b="1" i="0">
+                <a:solidFill>
+                  <a:srgbClr val="03306E"/>
+                </a:solidFill>
+                <a:latin typeface="Cambria"/>
+              </a:rPr>
+              <a:t>Activity: Risk assess a server room move</a:t>
+            </a:r>
+          </a:p>
+        </p:txBody>
+      </p:sp>
+      <p:sp>
+        <p:nvSpPr>
+          <p:cNvPr id="4" name="TextBox 3"/>
+          <p:cNvSpPr txBox="1"/>
+          <p:nvPr/>
+        </p:nvSpPr>
+        <p:spPr>
+          <a:xfrm>
+            <a:off x="548640" y="6446520"/>
+            <a:ext cx="8229600" cy="274320"/>
+          </a:xfrm>
+          <a:prstGeom prst="rect">
+            <a:avLst/>
+          </a:prstGeom>
+          <a:noFill/>
+        </p:spPr>
+        <p:txBody>
+          <a:bodyPr wrap="square" anchor="t" lIns="0" rIns="0" tIns="0" bIns="0"/>
+          <a:lstStyle/>
+          <a:p>
+            <a:pPr algn="l"/>
+            <a:r>
+              <a:rPr sz="1000" b="0" i="0">
+                <a:solidFill>
+                  <a:srgbClr val="54595D"/>
+                </a:solidFill>
+                <a:latin typeface="Calibri"/>
+              </a:rPr>
+              <a:t>Digital Support and Security T Level  ·  Health and Safety in Digital Work</a:t>
+            </a:r>
+          </a:p>
+        </p:txBody>
+      </p:sp>
+      <p:sp>
+        <p:nvSpPr>
+          <p:cNvPr id="5" name="TextBox 4"/>
+          <p:cNvSpPr txBox="1"/>
+          <p:nvPr/>
+        </p:nvSpPr>
+        <p:spPr>
+          <a:xfrm>
+            <a:off x="10728655" y="6446520"/>
+            <a:ext cx="914400" cy="274320"/>
+          </a:xfrm>
+          <a:prstGeom prst="rect">
+            <a:avLst/>
+          </a:prstGeom>
+          <a:noFill/>
+        </p:spPr>
+        <p:txBody>
+          <a:bodyPr wrap="square" anchor="t" lIns="0" rIns="0" tIns="0" bIns="0"/>
+          <a:lstStyle/>
+          <a:p>
+            <a:pPr algn="r"/>
+            <a:r>
+              <a:rPr sz="1000" b="0" i="0">
+                <a:solidFill>
+                  <a:srgbClr val="54595D"/>
+                </a:solidFill>
+                <a:latin typeface="Calibri"/>
+              </a:rPr>
+              <a:t>15</a:t>
+            </a:r>
+          </a:p>
+        </p:txBody>
+      </p:sp>
+      <p:sp>
+        <p:nvSpPr>
+          <p:cNvPr id="6" name="Rounded Rectangle 5"/>
+          <p:cNvSpPr/>
+          <p:nvPr/>
+        </p:nvSpPr>
+        <p:spPr>
+          <a:xfrm>
+            <a:off x="548640" y="1508760"/>
+            <a:ext cx="2011680" cy="457200"/>
+          </a:xfrm>
+          <a:prstGeom prst="roundRect">
+            <a:avLst>
+              <a:gd name="adj" fmla="val 50000"/>
+            </a:avLst>
+          </a:prstGeom>
+          <a:solidFill>
+            <a:srgbClr val="F2B705"/>
+          </a:solidFill>
+          <a:ln>
+            <a:noFill/>
+          </a:ln>
+          <a:effectLst/>
+        </p:spPr>
+        <p:style>
+          <a:lnRef idx="1">
+            <a:schemeClr val="accent1"/>
+          </a:lnRef>
+          <a:fillRef idx="3">
+            <a:schemeClr val="accent1"/>
+          </a:fillRef>
+          <a:effectRef idx="2">
+            <a:schemeClr val="accent1"/>
+          </a:effectRef>
+          <a:fontRef idx="minor">
+            <a:schemeClr val="lt1"/>
+          </a:fontRef>
+        </p:style>
+        <p:txBody>
+          <a:bodyPr rtlCol="0" anchor="ctr"/>
+          <a:lstStyle/>
+          <a:p/>
+        </p:txBody>
+      </p:sp>
+      <p:sp>
+        <p:nvSpPr>
+          <p:cNvPr id="7" name="TextBox 6"/>
+          <p:cNvSpPr txBox="1"/>
+          <p:nvPr/>
+        </p:nvSpPr>
+        <p:spPr>
+          <a:xfrm>
+            <a:off x="548640" y="1508760"/>
+            <a:ext cx="2011680" cy="457200"/>
+          </a:xfrm>
+          <a:prstGeom prst="rect">
+            <a:avLst/>
+          </a:prstGeom>
+          <a:noFill/>
+        </p:spPr>
+        <p:txBody>
+          <a:bodyPr wrap="square" anchor="ctr" lIns="0" rIns="0" tIns="0" bIns="0"/>
+          <a:lstStyle/>
+          <a:p>
+            <a:pPr algn="ctr"/>
+            <a:r>
+              <a:rPr sz="1400" b="1" i="0">
+                <a:solidFill>
+                  <a:srgbClr val="202122"/>
+                </a:solidFill>
+                <a:latin typeface="Calibri"/>
+              </a:rPr>
+              <a:t>20 minutes</a:t>
+            </a:r>
+          </a:p>
+        </p:txBody>
+      </p:sp>
+      <p:sp>
+        <p:nvSpPr>
+          <p:cNvPr id="8" name="TextBox 7"/>
+          <p:cNvSpPr txBox="1"/>
+          <p:nvPr/>
+        </p:nvSpPr>
+        <p:spPr>
+          <a:xfrm>
+            <a:off x="2743200" y="1508760"/>
+            <a:ext cx="4754880" cy="457200"/>
+          </a:xfrm>
+          <a:prstGeom prst="rect">
+            <a:avLst/>
+          </a:prstGeom>
+          <a:noFill/>
+        </p:spPr>
+        <p:txBody>
+          <a:bodyPr wrap="square" anchor="ctr" lIns="0" rIns="0" tIns="0" bIns="0"/>
+          <a:lstStyle/>
+          <a:p>
+            <a:pPr algn="l"/>
+            <a:r>
+              <a:rPr sz="1400" b="0" i="1">
+                <a:solidFill>
+                  <a:srgbClr val="54595D"/>
+                </a:solidFill>
+                <a:latin typeface="Calibri"/>
+              </a:rPr>
+              <a:t>Small groups</a:t>
+            </a:r>
+          </a:p>
+        </p:txBody>
+      </p:sp>
+      <p:sp>
+        <p:nvSpPr>
+          <p:cNvPr id="9" name="Oval 8"/>
+          <p:cNvSpPr/>
+          <p:nvPr/>
+        </p:nvSpPr>
+        <p:spPr>
+          <a:xfrm>
+            <a:off x="548640" y="2482596"/>
+            <a:ext cx="384048" cy="384048"/>
+          </a:xfrm>
+          <a:prstGeom prst="ellipse">
+            <a:avLst/>
+          </a:prstGeom>
+          <a:solidFill>
+            <a:srgbClr val="0645AD"/>
+          </a:solidFill>
+          <a:ln>
+            <a:noFill/>
+          </a:ln>
+          <a:effectLst/>
+        </p:spPr>
+        <p:style>
+          <a:lnRef idx="1">
+            <a:schemeClr val="accent1"/>
+          </a:lnRef>
+          <a:fillRef idx="3">
+            <a:schemeClr val="accent1"/>
+          </a:fillRef>
+          <a:effectRef idx="2">
+            <a:schemeClr val="accent1"/>
+          </a:effectRef>
+          <a:fontRef idx="minor">
+            <a:schemeClr val="lt1"/>
+          </a:fontRef>
+        </p:style>
+        <p:txBody>
+          <a:bodyPr rtlCol="0" anchor="ctr" lIns="0" rIns="0" tIns="0" bIns="0"/>
+          <a:lstStyle/>
+          <a:p>
+            <a:pPr algn="ctr"/>
+            <a:r>
+              <a:rPr sz="1300" b="1">
+                <a:solidFill>
+                  <a:srgbClr val="FFFFFF"/>
+                </a:solidFill>
+                <a:latin typeface="Calibri"/>
+              </a:rPr>
+              <a:t>1</a:t>
+            </a:r>
+          </a:p>
+        </p:txBody>
+      </p:sp>
+      <p:sp>
+        <p:nvSpPr>
+          <p:cNvPr id="10" name="TextBox 9"/>
+          <p:cNvSpPr txBox="1"/>
+          <p:nvPr/>
+        </p:nvSpPr>
+        <p:spPr>
+          <a:xfrm>
+            <a:off x="1143000" y="2240280"/>
+            <a:ext cx="5943600" cy="868680"/>
+          </a:xfrm>
+          <a:prstGeom prst="rect">
+            <a:avLst/>
+          </a:prstGeom>
+          <a:noFill/>
+        </p:spPr>
+        <p:txBody>
+          <a:bodyPr wrap="square" anchor="ctr" lIns="0" rIns="0" tIns="0" bIns="0"/>
+          <a:lstStyle/>
+          <a:p>
+            <a:pPr algn="l"/>
+            <a:r>
+              <a:rPr sz="1700" b="0" i="0">
+                <a:solidFill>
+                  <a:srgbClr val="202122"/>
+                </a:solidFill>
+                <a:latin typeface="Calibri"/>
+              </a:rPr>
+              <a:t>Your team is moving three rack servers and re-cabling a comms cabinet on a mezzanine floor.</a:t>
+            </a:r>
+          </a:p>
+        </p:txBody>
+      </p:sp>
+      <p:sp>
+        <p:nvSpPr>
+          <p:cNvPr id="11" name="Oval 10"/>
+          <p:cNvSpPr/>
+          <p:nvPr/>
+        </p:nvSpPr>
+        <p:spPr>
+          <a:xfrm>
+            <a:off x="548640" y="3461004"/>
+            <a:ext cx="384048" cy="384048"/>
+          </a:xfrm>
+          <a:prstGeom prst="ellipse">
+            <a:avLst/>
+          </a:prstGeom>
+          <a:solidFill>
+            <a:srgbClr val="0645AD"/>
+          </a:solidFill>
+          <a:ln>
+            <a:noFill/>
+          </a:ln>
+          <a:effectLst/>
+        </p:spPr>
+        <p:style>
+          <a:lnRef idx="1">
+            <a:schemeClr val="accent1"/>
+          </a:lnRef>
+          <a:fillRef idx="3">
+            <a:schemeClr val="accent1"/>
+          </a:fillRef>
+          <a:effectRef idx="2">
+            <a:schemeClr val="accent1"/>
+          </a:effectRef>
+          <a:fontRef idx="minor">
+            <a:schemeClr val="lt1"/>
+          </a:fontRef>
+        </p:style>
+        <p:txBody>
+          <a:bodyPr rtlCol="0" anchor="ctr" lIns="0" rIns="0" tIns="0" bIns="0"/>
+          <a:lstStyle/>
+          <a:p>
+            <a:pPr algn="ctr"/>
+            <a:r>
+              <a:rPr sz="1300" b="1">
+                <a:solidFill>
+                  <a:srgbClr val="FFFFFF"/>
+                </a:solidFill>
+                <a:latin typeface="Calibri"/>
+              </a:rPr>
+              <a:t>2</a:t>
+            </a:r>
+          </a:p>
+        </p:txBody>
+      </p:sp>
+      <p:sp>
+        <p:nvSpPr>
+          <p:cNvPr id="12" name="TextBox 11"/>
+          <p:cNvSpPr txBox="1"/>
+          <p:nvPr/>
+        </p:nvSpPr>
+        <p:spPr>
+          <a:xfrm>
+            <a:off x="1143000" y="3218688"/>
+            <a:ext cx="5943600" cy="868680"/>
+          </a:xfrm>
+          <a:prstGeom prst="rect">
+            <a:avLst/>
+          </a:prstGeom>
+          <a:noFill/>
+        </p:spPr>
+        <p:txBody>
+          <a:bodyPr wrap="square" anchor="ctr" lIns="0" rIns="0" tIns="0" bIns="0"/>
+          <a:lstStyle/>
+          <a:p>
+            <a:pPr algn="l"/>
+            <a:r>
+              <a:rPr sz="1700" b="0" i="0">
+                <a:solidFill>
+                  <a:srgbClr val="202122"/>
+                </a:solidFill>
+                <a:latin typeface="Calibri"/>
+              </a:rPr>
+              <a:t>Identify at least five hazards.</a:t>
+            </a:r>
+          </a:p>
+        </p:txBody>
+      </p:sp>
+      <p:sp>
+        <p:nvSpPr>
+          <p:cNvPr id="13" name="Oval 12"/>
+          <p:cNvSpPr/>
+          <p:nvPr/>
+        </p:nvSpPr>
+        <p:spPr>
+          <a:xfrm>
+            <a:off x="548640" y="4439412"/>
+            <a:ext cx="384048" cy="384048"/>
+          </a:xfrm>
+          <a:prstGeom prst="ellipse">
+            <a:avLst/>
+          </a:prstGeom>
+          <a:solidFill>
+            <a:srgbClr val="0645AD"/>
+          </a:solidFill>
+          <a:ln>
+            <a:noFill/>
+          </a:ln>
+          <a:effectLst/>
+        </p:spPr>
+        <p:style>
+          <a:lnRef idx="1">
+            <a:schemeClr val="accent1"/>
+          </a:lnRef>
+          <a:fillRef idx="3">
+            <a:schemeClr val="accent1"/>
+          </a:fillRef>
+          <a:effectRef idx="2">
+            <a:schemeClr val="accent1"/>
+          </a:effectRef>
+          <a:fontRef idx="minor">
+            <a:schemeClr val="lt1"/>
+          </a:fontRef>
+        </p:style>
+        <p:txBody>
+          <a:bodyPr rtlCol="0" anchor="ctr" lIns="0" rIns="0" tIns="0" bIns="0"/>
+          <a:lstStyle/>
+          <a:p>
+            <a:pPr algn="ctr"/>
+            <a:r>
+              <a:rPr sz="1300" b="1">
+                <a:solidFill>
+                  <a:srgbClr val="FFFFFF"/>
+                </a:solidFill>
+                <a:latin typeface="Calibri"/>
+              </a:rPr>
+              <a:t>3</a:t>
+            </a:r>
+          </a:p>
+        </p:txBody>
+      </p:sp>
+      <p:sp>
+        <p:nvSpPr>
+          <p:cNvPr id="14" name="TextBox 13"/>
+          <p:cNvSpPr txBox="1"/>
+          <p:nvPr/>
+        </p:nvSpPr>
+        <p:spPr>
+          <a:xfrm>
+            <a:off x="1143000" y="4197096"/>
+            <a:ext cx="5943600" cy="868680"/>
+          </a:xfrm>
+          <a:prstGeom prst="rect">
+            <a:avLst/>
+          </a:prstGeom>
+          <a:noFill/>
+        </p:spPr>
+        <p:txBody>
+          <a:bodyPr wrap="square" anchor="ctr" lIns="0" rIns="0" tIns="0" bIns="0"/>
+          <a:lstStyle/>
+          <a:p>
+            <a:pPr algn="l"/>
+            <a:r>
+              <a:rPr sz="1700" b="0" i="0">
+                <a:solidFill>
+                  <a:srgbClr val="202122"/>
+                </a:solidFill>
+                <a:latin typeface="Calibri"/>
+              </a:rPr>
+              <a:t>Link each one to the law or regulation that applies.</a:t>
+            </a:r>
+          </a:p>
+        </p:txBody>
+      </p:sp>
+      <p:sp>
+        <p:nvSpPr>
+          <p:cNvPr id="15" name="Oval 14"/>
+          <p:cNvSpPr/>
+          <p:nvPr/>
+        </p:nvSpPr>
+        <p:spPr>
+          <a:xfrm>
+            <a:off x="548640" y="5417820"/>
+            <a:ext cx="384048" cy="384048"/>
+          </a:xfrm>
+          <a:prstGeom prst="ellipse">
+            <a:avLst/>
+          </a:prstGeom>
+          <a:solidFill>
+            <a:srgbClr val="0645AD"/>
+          </a:solidFill>
+          <a:ln>
+            <a:noFill/>
+          </a:ln>
+          <a:effectLst/>
+        </p:spPr>
+        <p:style>
+          <a:lnRef idx="1">
+            <a:schemeClr val="accent1"/>
+          </a:lnRef>
+          <a:fillRef idx="3">
+            <a:schemeClr val="accent1"/>
+          </a:fillRef>
+          <a:effectRef idx="2">
+            <a:schemeClr val="accent1"/>
+          </a:effectRef>
+          <a:fontRef idx="minor">
+            <a:schemeClr val="lt1"/>
+          </a:fontRef>
+        </p:style>
+        <p:txBody>
+          <a:bodyPr rtlCol="0" anchor="ctr" lIns="0" rIns="0" tIns="0" bIns="0"/>
+          <a:lstStyle/>
+          <a:p>
+            <a:pPr algn="ctr"/>
+            <a:r>
+              <a:rPr sz="1300" b="1">
+                <a:solidFill>
+                  <a:srgbClr val="FFFFFF"/>
+                </a:solidFill>
+                <a:latin typeface="Calibri"/>
+              </a:rPr>
+              <a:t>4</a:t>
+            </a:r>
+          </a:p>
+        </p:txBody>
+      </p:sp>
+      <p:sp>
+        <p:nvSpPr>
+          <p:cNvPr id="16" name="TextBox 15"/>
+          <p:cNvSpPr txBox="1"/>
+          <p:nvPr/>
+        </p:nvSpPr>
+        <p:spPr>
+          <a:xfrm>
+            <a:off x="1143000" y="5175504"/>
+            <a:ext cx="5943600" cy="868680"/>
+          </a:xfrm>
+          <a:prstGeom prst="rect">
+            <a:avLst/>
+          </a:prstGeom>
+          <a:noFill/>
+        </p:spPr>
+        <p:txBody>
+          <a:bodyPr wrap="square" anchor="ctr" lIns="0" rIns="0" tIns="0" bIns="0"/>
+          <a:lstStyle/>
+          <a:p>
+            <a:pPr algn="l"/>
+            <a:r>
+              <a:rPr sz="1700" b="0" i="0">
+                <a:solidFill>
+                  <a:srgbClr val="202122"/>
+                </a:solidFill>
+                <a:latin typeface="Calibri"/>
+              </a:rPr>
+              <a:t>Suggest a mitigation for each.</a:t>
+            </a:r>
+          </a:p>
+        </p:txBody>
+      </p:sp>
+      <p:sp>
+        <p:nvSpPr>
+          <p:cNvPr id="17" name="Rounded Rectangle 16"/>
+          <p:cNvSpPr/>
+          <p:nvPr/>
+        </p:nvSpPr>
+        <p:spPr>
+          <a:xfrm>
+            <a:off x="7772400" y="1508760"/>
+            <a:ext cx="3867912" cy="4572000"/>
+          </a:xfrm>
+          <a:prstGeom prst="roundRect">
+            <a:avLst>
+              <a:gd name="adj" fmla="val 8000"/>
+            </a:avLst>
+          </a:prstGeom>
+          <a:solidFill>
+            <a:srgbClr val="EAF3FF"/>
+          </a:solidFill>
+          <a:ln>
+            <a:noFill/>
+          </a:ln>
+          <a:effectLst/>
+        </p:spPr>
+        <p:style>
+          <a:lnRef idx="1">
+            <a:schemeClr val="accent1"/>
+          </a:lnRef>
+          <a:fillRef idx="3">
+            <a:schemeClr val="accent1"/>
+          </a:fillRef>
+          <a:effectRef idx="2">
+            <a:schemeClr val="accent1"/>
+          </a:effectRef>
+          <a:fontRef idx="minor">
+            <a:schemeClr val="lt1"/>
+          </a:fontRef>
+        </p:style>
+        <p:txBody>
+          <a:bodyPr rtlCol="0" anchor="ctr"/>
+          <a:lstStyle/>
+          <a:p/>
+        </p:txBody>
+      </p:sp>
+      <p:sp>
+        <p:nvSpPr>
+          <p:cNvPr id="18" name="TextBox 17"/>
+          <p:cNvSpPr txBox="1"/>
+          <p:nvPr/>
+        </p:nvSpPr>
+        <p:spPr>
+          <a:xfrm>
+            <a:off x="8046720" y="1737360"/>
+            <a:ext cx="3291840" cy="365760"/>
+          </a:xfrm>
+          <a:prstGeom prst="rect">
+            <a:avLst/>
+          </a:prstGeom>
+          <a:noFill/>
+        </p:spPr>
+        <p:txBody>
+          <a:bodyPr wrap="square" anchor="t" lIns="0" rIns="0" tIns="0" bIns="0"/>
+          <a:lstStyle/>
+          <a:p>
+            <a:pPr algn="l"/>
+            <a:r>
+              <a:rPr sz="1300" b="1" i="0">
+                <a:solidFill>
+                  <a:srgbClr val="0645AD"/>
+                </a:solidFill>
+                <a:latin typeface="Calibri"/>
+              </a:rPr>
+              <a:t>SUCCESS CRITERIA</a:t>
+            </a:r>
+          </a:p>
+        </p:txBody>
+      </p:sp>
+      <p:sp>
+        <p:nvSpPr>
+          <p:cNvPr id="19" name="TextBox 18"/>
+          <p:cNvSpPr txBox="1"/>
+          <p:nvPr/>
+        </p:nvSpPr>
+        <p:spPr>
+          <a:xfrm>
+            <a:off x="8046720" y="2240280"/>
+            <a:ext cx="3337560" cy="3657600"/>
+          </a:xfrm>
+          <a:prstGeom prst="rect">
+            <a:avLst/>
+          </a:prstGeom>
+          <a:noFill/>
+        </p:spPr>
+        <p:txBody>
+          <a:bodyPr wrap="square" lIns="0" rIns="0" tIns="0" bIns="0">
+            <a:spAutoFit/>
+          </a:bodyPr>
+          <a:lstStyle/>
+          <a:p>
+            <a:pPr marL="274320" indent="-274320">
+              <a:spcAft>
+                <a:spcPts val="810"/>
+              </a:spcAft>
+              <a:buClr>
+                <a:srgbClr val="0645AD"/>
+              </a:buClr>
+              <a:buFont typeface="Arial"/>
+              <a:buChar char="•"/>
+            </a:pPr>
+            <a:r>
+              <a:rPr sz="1800" b="0">
+                <a:solidFill>
+                  <a:srgbClr val="202122"/>
+                </a:solidFill>
+                <a:latin typeface="Calibri"/>
+              </a:rPr>
+              <a:t>Covers lifting, height and electrical hazards</a:t>
+            </a:r>
+          </a:p>
+          <a:p>
+            <a:pPr marL="274320" indent="-274320">
+              <a:spcAft>
+                <a:spcPts val="810"/>
+              </a:spcAft>
+              <a:buClr>
+                <a:srgbClr val="0645AD"/>
+              </a:buClr>
+              <a:buFont typeface="Arial"/>
+              <a:buChar char="•"/>
+            </a:pPr>
+            <a:r>
+              <a:rPr sz="1800" b="0">
+                <a:solidFill>
+                  <a:srgbClr val="202122"/>
+                </a:solidFill>
+                <a:latin typeface="Calibri"/>
+              </a:rPr>
+              <a:t>Correct regulation named for each</a:t>
+            </a:r>
+          </a:p>
+          <a:p>
+            <a:pPr marL="274320" indent="-274320">
+              <a:spcAft>
+                <a:spcPts val="810"/>
+              </a:spcAft>
+              <a:buClr>
+                <a:srgbClr val="0645AD"/>
+              </a:buClr>
+              <a:buFont typeface="Arial"/>
+              <a:buChar char="•"/>
+            </a:pPr>
+            <a:r>
+              <a:rPr sz="1800" b="0">
+                <a:solidFill>
+                  <a:srgbClr val="202122"/>
+                </a:solidFill>
+                <a:latin typeface="Calibri"/>
+              </a:rPr>
+              <a:t>Mitigations are practical</a:t>
+            </a:r>
+          </a:p>
+        </p:txBody>
+      </p:sp>
+    </p:spTree>
+  </p:cSld>
+  <p:clrMapOvr>
+    <a:masterClrMapping/>
+  </p:clrMapOvr>
+</p:sld>
+</file>
+
+<file path=ppt/slides/slide16.xml><?xml version="1.0" encoding="utf-8"?>
+<p:sld xmlns:a="http://schemas.openxmlformats.org/drawingml/2006/main" xmlns:p="http://schemas.openxmlformats.org/presentationml/2006/main" xmlns:r="http://schemas.openxmlformats.org/officeDocument/2006/relationships">
+  <p:cSld>
+    <p:bg>
+      <p:bgPr>
+        <a:solidFill>
+          <a:srgbClr val="03306E"/>
+        </a:solidFill>
+        <a:effectLst/>
+      </p:bgPr>
+    </p:bg>
+    <p:spTree>
+      <p:nvGrpSpPr>
+        <p:cNvPr id="1" name=""/>
+        <p:cNvGrpSpPr/>
+        <p:nvPr/>
+      </p:nvGrpSpPr>
+      <p:grpSpPr/>
+      <p:sp>
+        <p:nvSpPr>
+          <p:cNvPr id="2" name="TextBox 1"/>
+          <p:cNvSpPr txBox="1"/>
+          <p:nvPr/>
+        </p:nvSpPr>
+        <p:spPr>
+          <a:xfrm>
+            <a:off x="548640" y="320040"/>
+            <a:ext cx="11094415" cy="274320"/>
+          </a:xfrm>
+          <a:prstGeom prst="rect">
+            <a:avLst/>
+          </a:prstGeom>
+          <a:noFill/>
+        </p:spPr>
+        <p:txBody>
+          <a:bodyPr wrap="square" anchor="t" lIns="0" rIns="0" tIns="0" bIns="0"/>
+          <a:lstStyle/>
+          <a:p>
+            <a:pPr algn="l"/>
+            <a:r>
+              <a:rPr sz="1100" b="1" i="0">
+                <a:solidFill>
+                  <a:srgbClr val="A9C8F0"/>
+                </a:solidFill>
+                <a:latin typeface="Calibri"/>
+              </a:rPr>
+              <a:t>CORE COMPONENT  ·  Core Paper 2</a:t>
+            </a:r>
+          </a:p>
+        </p:txBody>
+      </p:sp>
+      <p:sp>
+        <p:nvSpPr>
+          <p:cNvPr id="3" name="TextBox 2"/>
+          <p:cNvSpPr txBox="1"/>
+          <p:nvPr/>
+        </p:nvSpPr>
+        <p:spPr>
+          <a:xfrm>
+            <a:off x="548640" y="566928"/>
+            <a:ext cx="11094415" cy="822960"/>
+          </a:xfrm>
+          <a:prstGeom prst="rect">
+            <a:avLst/>
+          </a:prstGeom>
+          <a:noFill/>
+        </p:spPr>
+        <p:txBody>
+          <a:bodyPr wrap="square" anchor="ctr" lIns="0" rIns="0" tIns="0" bIns="0"/>
+          <a:lstStyle/>
+          <a:p>
+            <a:pPr algn="l"/>
+            <a:r>
+              <a:rPr sz="3200" b="1" i="0">
+                <a:solidFill>
+                  <a:srgbClr val="FFFFFF"/>
+                </a:solidFill>
+                <a:latin typeface="Cambria"/>
+              </a:rPr>
+              <a:t>Exit ticket</a:t>
+            </a:r>
+          </a:p>
+        </p:txBody>
+      </p:sp>
+      <p:sp>
+        <p:nvSpPr>
+          <p:cNvPr id="4" name="Oval 3"/>
+          <p:cNvSpPr/>
+          <p:nvPr/>
+        </p:nvSpPr>
+        <p:spPr>
+          <a:xfrm>
+            <a:off x="548640" y="1737360"/>
+            <a:ext cx="502920" cy="502920"/>
+          </a:xfrm>
+          <a:prstGeom prst="ellipse">
+            <a:avLst/>
+          </a:prstGeom>
+          <a:solidFill>
+            <a:srgbClr val="F2B705"/>
+          </a:solidFill>
+          <a:ln>
+            <a:noFill/>
+          </a:ln>
+          <a:effectLst/>
+        </p:spPr>
+        <p:style>
+          <a:lnRef idx="1">
+            <a:schemeClr val="accent1"/>
+          </a:lnRef>
+          <a:fillRef idx="3">
+            <a:schemeClr val="accent1"/>
+          </a:fillRef>
+          <a:effectRef idx="2">
+            <a:schemeClr val="accent1"/>
+          </a:effectRef>
+          <a:fontRef idx="minor">
+            <a:schemeClr val="lt1"/>
+          </a:fontRef>
+        </p:style>
+        <p:txBody>
+          <a:bodyPr rtlCol="0" anchor="ctr" lIns="0" rIns="0" tIns="0" bIns="0"/>
+          <a:lstStyle/>
+          <a:p>
+            <a:pPr algn="ctr"/>
+            <a:r>
+              <a:rPr sz="1700" b="1">
+                <a:solidFill>
+                  <a:srgbClr val="202122"/>
+                </a:solidFill>
+                <a:latin typeface="Calibri"/>
+              </a:rPr>
+              <a:t>1</a:t>
+            </a:r>
+          </a:p>
+        </p:txBody>
+      </p:sp>
+      <p:sp>
+        <p:nvSpPr>
+          <p:cNvPr id="5" name="TextBox 4"/>
+          <p:cNvSpPr txBox="1"/>
+          <p:nvPr/>
+        </p:nvSpPr>
+        <p:spPr>
+          <a:xfrm>
+            <a:off x="1325880" y="1645920"/>
+            <a:ext cx="6583680" cy="822960"/>
+          </a:xfrm>
+          <a:prstGeom prst="rect">
+            <a:avLst/>
+          </a:prstGeom>
+          <a:noFill/>
+        </p:spPr>
+        <p:txBody>
+          <a:bodyPr wrap="square" anchor="ctr" lIns="0" rIns="0" tIns="0" bIns="0"/>
+          <a:lstStyle/>
+          <a:p>
+            <a:pPr algn="l"/>
+            <a:r>
+              <a:rPr sz="2000" b="0" i="0">
+                <a:solidFill>
+                  <a:srgbClr val="FFFFFF"/>
+                </a:solidFill>
+                <a:latin typeface="Calibri"/>
+              </a:rPr>
+              <a:t>Which regulation covers lifting a server?</a:t>
+            </a:r>
+          </a:p>
+        </p:txBody>
+      </p:sp>
+      <p:sp>
+        <p:nvSpPr>
+          <p:cNvPr id="6" name="Oval 5"/>
+          <p:cNvSpPr/>
+          <p:nvPr/>
+        </p:nvSpPr>
+        <p:spPr>
+          <a:xfrm>
+            <a:off x="548640" y="2697480"/>
+            <a:ext cx="502920" cy="502920"/>
+          </a:xfrm>
+          <a:prstGeom prst="ellipse">
+            <a:avLst/>
+          </a:prstGeom>
+          <a:solidFill>
+            <a:srgbClr val="F2B705"/>
+          </a:solidFill>
+          <a:ln>
+            <a:noFill/>
+          </a:ln>
+          <a:effectLst/>
+        </p:spPr>
+        <p:style>
+          <a:lnRef idx="1">
+            <a:schemeClr val="accent1"/>
+          </a:lnRef>
+          <a:fillRef idx="3">
+            <a:schemeClr val="accent1"/>
+          </a:fillRef>
+          <a:effectRef idx="2">
+            <a:schemeClr val="accent1"/>
+          </a:effectRef>
+          <a:fontRef idx="minor">
+            <a:schemeClr val="lt1"/>
+          </a:fontRef>
+        </p:style>
+        <p:txBody>
+          <a:bodyPr rtlCol="0" anchor="ctr" lIns="0" rIns="0" tIns="0" bIns="0"/>
+          <a:lstStyle/>
+          <a:p>
+            <a:pPr algn="ctr"/>
+            <a:r>
+              <a:rPr sz="1700" b="1">
+                <a:solidFill>
+                  <a:srgbClr val="202122"/>
+                </a:solidFill>
+                <a:latin typeface="Calibri"/>
+              </a:rPr>
+              <a:t>2</a:t>
+            </a:r>
+          </a:p>
+        </p:txBody>
+      </p:sp>
+      <p:sp>
+        <p:nvSpPr>
+          <p:cNvPr id="7" name="TextBox 6"/>
+          <p:cNvSpPr txBox="1"/>
+          <p:nvPr/>
+        </p:nvSpPr>
+        <p:spPr>
+          <a:xfrm>
+            <a:off x="1325880" y="2606040"/>
+            <a:ext cx="6583680" cy="822960"/>
+          </a:xfrm>
+          <a:prstGeom prst="rect">
+            <a:avLst/>
+          </a:prstGeom>
+          <a:noFill/>
+        </p:spPr>
+        <p:txBody>
+          <a:bodyPr wrap="square" anchor="ctr" lIns="0" rIns="0" tIns="0" bIns="0"/>
+          <a:lstStyle/>
+          <a:p>
+            <a:pPr algn="l"/>
+            <a:r>
+              <a:rPr sz="2000" b="0" i="0">
+                <a:solidFill>
+                  <a:srgbClr val="FFFFFF"/>
+                </a:solidFill>
+                <a:latin typeface="Calibri"/>
+              </a:rPr>
+              <a:t>Why do DSE users need regular breaks?</a:t>
+            </a:r>
+          </a:p>
+        </p:txBody>
+      </p:sp>
+      <p:sp>
+        <p:nvSpPr>
+          <p:cNvPr id="8" name="Oval 7"/>
+          <p:cNvSpPr/>
+          <p:nvPr/>
+        </p:nvSpPr>
+        <p:spPr>
+          <a:xfrm>
+            <a:off x="548640" y="3657600"/>
+            <a:ext cx="502920" cy="502920"/>
+          </a:xfrm>
+          <a:prstGeom prst="ellipse">
+            <a:avLst/>
+          </a:prstGeom>
+          <a:solidFill>
+            <a:srgbClr val="F2B705"/>
+          </a:solidFill>
+          <a:ln>
+            <a:noFill/>
+          </a:ln>
+          <a:effectLst/>
+        </p:spPr>
+        <p:style>
+          <a:lnRef idx="1">
+            <a:schemeClr val="accent1"/>
+          </a:lnRef>
+          <a:fillRef idx="3">
+            <a:schemeClr val="accent1"/>
+          </a:fillRef>
+          <a:effectRef idx="2">
+            <a:schemeClr val="accent1"/>
+          </a:effectRef>
+          <a:fontRef idx="minor">
+            <a:schemeClr val="lt1"/>
+          </a:fontRef>
+        </p:style>
+        <p:txBody>
+          <a:bodyPr rtlCol="0" anchor="ctr" lIns="0" rIns="0" tIns="0" bIns="0"/>
+          <a:lstStyle/>
+          <a:p>
+            <a:pPr algn="ctr"/>
+            <a:r>
+              <a:rPr sz="1700" b="1">
+                <a:solidFill>
+                  <a:srgbClr val="202122"/>
+                </a:solidFill>
+                <a:latin typeface="Calibri"/>
+              </a:rPr>
+              <a:t>3</a:t>
+            </a:r>
+          </a:p>
+        </p:txBody>
+      </p:sp>
+      <p:sp>
+        <p:nvSpPr>
+          <p:cNvPr id="9" name="TextBox 8"/>
+          <p:cNvSpPr txBox="1"/>
+          <p:nvPr/>
+        </p:nvSpPr>
+        <p:spPr>
+          <a:xfrm>
+            <a:off x="1325880" y="3566160"/>
+            <a:ext cx="6583680" cy="822960"/>
+          </a:xfrm>
+          <a:prstGeom prst="rect">
+            <a:avLst/>
+          </a:prstGeom>
+          <a:noFill/>
+        </p:spPr>
+        <p:txBody>
+          <a:bodyPr wrap="square" anchor="ctr" lIns="0" rIns="0" tIns="0" bIns="0"/>
+          <a:lstStyle/>
+          <a:p>
+            <a:pPr algn="l"/>
+            <a:r>
+              <a:rPr sz="2000" b="0" i="0">
+                <a:solidFill>
+                  <a:srgbClr val="FFFFFF"/>
+                </a:solidFill>
+                <a:latin typeface="Calibri"/>
+              </a:rPr>
+              <a:t>Name one hazard of installing cabling in a ceiling.</a:t>
+            </a:r>
+          </a:p>
+        </p:txBody>
+      </p:sp>
+      <p:sp>
+        <p:nvSpPr>
+          <p:cNvPr id="10" name="Rounded Rectangle 9"/>
+          <p:cNvSpPr/>
+          <p:nvPr/>
+        </p:nvSpPr>
+        <p:spPr>
+          <a:xfrm>
+            <a:off x="8229600" y="1645920"/>
+            <a:ext cx="3410712" cy="2926080"/>
+          </a:xfrm>
+          <a:prstGeom prst="roundRect">
+            <a:avLst>
+              <a:gd name="adj" fmla="val 8000"/>
+            </a:avLst>
+          </a:prstGeom>
+          <a:solidFill>
+            <a:srgbClr val="0645AD"/>
+          </a:solidFill>
+          <a:ln>
+            <a:noFill/>
+          </a:ln>
+          <a:effectLst/>
+        </p:spPr>
+        <p:style>
+          <a:lnRef idx="1">
+            <a:schemeClr val="accent1"/>
+          </a:lnRef>
+          <a:fillRef idx="3">
+            <a:schemeClr val="accent1"/>
+          </a:fillRef>
+          <a:effectRef idx="2">
+            <a:schemeClr val="accent1"/>
+          </a:effectRef>
+          <a:fontRef idx="minor">
+            <a:schemeClr val="lt1"/>
+          </a:fontRef>
+        </p:style>
+        <p:txBody>
+          <a:bodyPr rtlCol="0" anchor="ctr"/>
+          <a:lstStyle/>
+          <a:p/>
+        </p:txBody>
+      </p:sp>
+      <p:sp>
+        <p:nvSpPr>
+          <p:cNvPr id="11" name="TextBox 10"/>
+          <p:cNvSpPr txBox="1"/>
+          <p:nvPr/>
+        </p:nvSpPr>
+        <p:spPr>
+          <a:xfrm>
+            <a:off x="8503920" y="1874519"/>
+            <a:ext cx="2926080" cy="365760"/>
+          </a:xfrm>
+          <a:prstGeom prst="rect">
+            <a:avLst/>
+          </a:prstGeom>
+          <a:noFill/>
+        </p:spPr>
+        <p:txBody>
+          <a:bodyPr wrap="square" anchor="t" lIns="0" rIns="0" tIns="0" bIns="0"/>
+          <a:lstStyle/>
+          <a:p>
+            <a:pPr algn="l"/>
+            <a:r>
+              <a:rPr sz="1300" b="1" i="0">
+                <a:solidFill>
+                  <a:srgbClr val="A9C8F0"/>
+                </a:solidFill>
+                <a:latin typeface="Calibri"/>
+              </a:rPr>
+              <a:t>REVISE THIS TOPIC</a:t>
+            </a:r>
+          </a:p>
+        </p:txBody>
+      </p:sp>
+      <p:sp>
+        <p:nvSpPr>
+          <p:cNvPr id="12" name="TextBox 11"/>
+          <p:cNvSpPr txBox="1"/>
+          <p:nvPr/>
+        </p:nvSpPr>
+        <p:spPr>
+          <a:xfrm>
+            <a:off x="8503920" y="2286000"/>
+            <a:ext cx="2926080" cy="548640"/>
+          </a:xfrm>
+          <a:prstGeom prst="rect">
+            <a:avLst/>
+          </a:prstGeom>
+          <a:noFill/>
+        </p:spPr>
+        <p:txBody>
+          <a:bodyPr wrap="square" anchor="t" lIns="0" rIns="0" tIns="0" bIns="0"/>
+          <a:lstStyle/>
+          <a:p>
+            <a:pPr algn="l"/>
+            <a:r>
+              <a:rPr sz="1400" b="0" i="0">
+                <a:solidFill>
+                  <a:srgbClr val="FFFFFF"/>
+                </a:solidFill>
+                <a:latin typeface="Calibri"/>
+              </a:rPr>
+              <a:t>Revision notes for this lesson are on the study wiki:</a:t>
+            </a:r>
+          </a:p>
+        </p:txBody>
+      </p:sp>
+      <p:sp>
+        <p:nvSpPr>
+          <p:cNvPr id="13" name="TextBox 12"/>
+          <p:cNvSpPr txBox="1"/>
+          <p:nvPr/>
+        </p:nvSpPr>
+        <p:spPr>
+          <a:xfrm>
+            <a:off x="8503920" y="2926080"/>
+            <a:ext cx="2926080" cy="1463040"/>
+          </a:xfrm>
+          <a:prstGeom prst="rect">
+            <a:avLst/>
+          </a:prstGeom>
+          <a:noFill/>
+        </p:spPr>
+        <p:txBody>
+          <a:bodyPr wrap="square" anchor="t" lIns="0" rIns="0" tIns="0" bIns="0"/>
+          <a:lstStyle/>
+          <a:p>
+            <a:pPr algn="l"/>
+            <a:r>
+              <a:rPr sz="2000" b="1" i="0">
+                <a:solidFill>
+                  <a:srgbClr val="FFFFFF"/>
+                </a:solidFill>
+                <a:latin typeface="Cambria"/>
+              </a:rPr>
+              <a:t>Core Paper 2: Legislation, Business, Emerging Issues, Environments and Security</a:t>
+            </a:r>
+          </a:p>
+        </p:txBody>
+      </p:sp>
+      <p:sp>
+        <p:nvSpPr>
+          <p:cNvPr id="14" name="TextBox 13"/>
+          <p:cNvSpPr txBox="1"/>
+          <p:nvPr/>
+        </p:nvSpPr>
+        <p:spPr>
+          <a:xfrm>
+            <a:off x="548640" y="5669280"/>
+            <a:ext cx="11094415" cy="548640"/>
+          </a:xfrm>
+          <a:prstGeom prst="rect">
+            <a:avLst/>
+          </a:prstGeom>
+          <a:noFill/>
+        </p:spPr>
+        <p:txBody>
+          <a:bodyPr wrap="square" anchor="t" lIns="0" rIns="0" tIns="0" bIns="0"/>
+          <a:lstStyle/>
+          <a:p>
+            <a:pPr algn="l"/>
+            <a:r>
+              <a:rPr sz="1200" b="0" i="0">
+                <a:solidFill>
+                  <a:srgbClr val="A9C8F0"/>
+                </a:solidFill>
+                <a:latin typeface="Calibri"/>
+              </a:rPr>
+              <a:t>https://lana6478.github.io/Digital-Suport-and-security-T-levle/#/01-core-component/02-core-paper-2.md</a:t>
+            </a:r>
+          </a:p>
+        </p:txBody>
+      </p:sp>
+    </p:spTree>
+  </p:cSld>
+  <p:clrMapOvr>
+    <a:masterClrMapping/>
+  </p:clrMapOvr>
+</p:sld>
+</file>
+
+<file path=ppt/slides/slide2.xml><?xml version="1.0" encoding="utf-8"?>
+<p:sld xmlns:a="http://schemas.openxmlformats.org/drawingml/2006/main" xmlns:p="http://schemas.openxmlformats.org/presentationml/2006/main" xmlns:r="http://schemas.openxmlformats.org/officeDocument/2006/relationships">
+  <p:cSld>
+    <p:bg>
+      <p:bgPr>
+        <a:solidFill>
+          <a:srgbClr val="FFFFFF"/>
+        </a:solidFill>
+        <a:effectLst/>
+      </p:bgPr>
+    </p:bg>
+    <p:spTree>
+      <p:nvGrpSpPr>
+        <p:cNvPr id="1" name=""/>
+        <p:cNvGrpSpPr/>
+        <p:nvPr/>
+      </p:nvGrpSpPr>
+      <p:grpSpPr/>
+      <p:sp>
+        <p:nvSpPr>
+          <p:cNvPr id="2" name="TextBox 1"/>
+          <p:cNvSpPr txBox="1"/>
+          <p:nvPr/>
+        </p:nvSpPr>
+        <p:spPr>
+          <a:xfrm>
+            <a:off x="548640" y="320040"/>
+            <a:ext cx="11094415" cy="274320"/>
+          </a:xfrm>
+          <a:prstGeom prst="rect">
+            <a:avLst/>
+          </a:prstGeom>
+          <a:noFill/>
+        </p:spPr>
+        <p:txBody>
+          <a:bodyPr wrap="square" anchor="t" lIns="0" rIns="0" tIns="0" bIns="0"/>
+          <a:lstStyle/>
+          <a:p>
+            <a:pPr algn="l"/>
+            <a:r>
+              <a:rPr sz="1100" b="1" i="0">
+                <a:solidFill>
+                  <a:srgbClr val="54595D"/>
+                </a:solidFill>
+                <a:latin typeface="Calibri"/>
+              </a:rPr>
+              <a:t>CORE COMPONENT  ·  Core Paper 2</a:t>
+            </a:r>
+          </a:p>
+        </p:txBody>
+      </p:sp>
+      <p:sp>
+        <p:nvSpPr>
+          <p:cNvPr id="3" name="TextBox 2"/>
+          <p:cNvSpPr txBox="1"/>
+          <p:nvPr/>
+        </p:nvSpPr>
+        <p:spPr>
+          <a:xfrm>
+            <a:off x="548640" y="566928"/>
+            <a:ext cx="11094415" cy="822960"/>
+          </a:xfrm>
+          <a:prstGeom prst="rect">
+            <a:avLst/>
+          </a:prstGeom>
+          <a:noFill/>
+        </p:spPr>
+        <p:txBody>
+          <a:bodyPr wrap="square" anchor="ctr" lIns="0" rIns="0" tIns="0" bIns="0"/>
+          <a:lstStyle/>
+          <a:p>
+            <a:pPr algn="l"/>
+            <a:r>
+              <a:rPr sz="3200" b="1" i="0">
+                <a:solidFill>
+                  <a:srgbClr val="03306E"/>
+                </a:solidFill>
+                <a:latin typeface="Cambria"/>
+              </a:rPr>
+              <a:t>Learning objectives</a:t>
+            </a:r>
+          </a:p>
+        </p:txBody>
+      </p:sp>
+      <p:sp>
+        <p:nvSpPr>
+          <p:cNvPr id="4" name="TextBox 3"/>
+          <p:cNvSpPr txBox="1"/>
+          <p:nvPr/>
+        </p:nvSpPr>
+        <p:spPr>
+          <a:xfrm>
+            <a:off x="548640" y="6446520"/>
+            <a:ext cx="8229600" cy="274320"/>
+          </a:xfrm>
+          <a:prstGeom prst="rect">
+            <a:avLst/>
+          </a:prstGeom>
+          <a:noFill/>
+        </p:spPr>
+        <p:txBody>
+          <a:bodyPr wrap="square" anchor="t" lIns="0" rIns="0" tIns="0" bIns="0"/>
+          <a:lstStyle/>
+          <a:p>
+            <a:pPr algn="l"/>
+            <a:r>
+              <a:rPr sz="1000" b="0" i="0">
+                <a:solidFill>
+                  <a:srgbClr val="54595D"/>
+                </a:solidFill>
+                <a:latin typeface="Calibri"/>
+              </a:rPr>
+              <a:t>Digital Support and Security T Level  ·  Health and Safety in Digital Work</a:t>
+            </a:r>
+          </a:p>
+        </p:txBody>
+      </p:sp>
+      <p:sp>
+        <p:nvSpPr>
+          <p:cNvPr id="5" name="TextBox 4"/>
+          <p:cNvSpPr txBox="1"/>
+          <p:nvPr/>
+        </p:nvSpPr>
+        <p:spPr>
+          <a:xfrm>
+            <a:off x="10728655" y="6446520"/>
+            <a:ext cx="914400" cy="274320"/>
+          </a:xfrm>
+          <a:prstGeom prst="rect">
+            <a:avLst/>
+          </a:prstGeom>
+          <a:noFill/>
+        </p:spPr>
+        <p:txBody>
+          <a:bodyPr wrap="square" anchor="t" lIns="0" rIns="0" tIns="0" bIns="0"/>
+          <a:lstStyle/>
+          <a:p>
+            <a:pPr algn="r"/>
+            <a:r>
+              <a:rPr sz="1000" b="0" i="0">
+                <a:solidFill>
+                  <a:srgbClr val="54595D"/>
+                </a:solidFill>
+                <a:latin typeface="Calibri"/>
+              </a:rPr>
+              <a:t>2</a:t>
+            </a:r>
+          </a:p>
+        </p:txBody>
+      </p:sp>
+      <p:sp>
+        <p:nvSpPr>
+          <p:cNvPr id="6" name="TextBox 5"/>
+          <p:cNvSpPr txBox="1"/>
+          <p:nvPr/>
+        </p:nvSpPr>
+        <p:spPr>
+          <a:xfrm>
+            <a:off x="548640" y="1508760"/>
+            <a:ext cx="6766560" cy="365760"/>
+          </a:xfrm>
+          <a:prstGeom prst="rect">
+            <a:avLst/>
+          </a:prstGeom>
+          <a:noFill/>
+        </p:spPr>
+        <p:txBody>
+          <a:bodyPr wrap="square" anchor="t" lIns="0" rIns="0" tIns="0" bIns="0"/>
+          <a:lstStyle/>
+          <a:p>
+            <a:pPr algn="l"/>
+            <a:r>
+              <a:rPr sz="1600" b="0" i="1">
+                <a:solidFill>
+                  <a:srgbClr val="54595D"/>
+                </a:solidFill>
+                <a:latin typeface="Calibri"/>
+              </a:rPr>
+              <a:t>By the end of this lesson you should be able to:</a:t>
+            </a:r>
+          </a:p>
+        </p:txBody>
+      </p:sp>
+      <p:sp>
+        <p:nvSpPr>
+          <p:cNvPr id="7" name="Oval 6"/>
+          <p:cNvSpPr/>
+          <p:nvPr/>
+        </p:nvSpPr>
+        <p:spPr>
+          <a:xfrm>
+            <a:off x="548640" y="2234565"/>
+            <a:ext cx="457200" cy="457200"/>
+          </a:xfrm>
+          <a:prstGeom prst="ellipse">
+            <a:avLst/>
+          </a:prstGeom>
+          <a:solidFill>
+            <a:srgbClr val="F2B705"/>
+          </a:solidFill>
+          <a:ln>
+            <a:noFill/>
+          </a:ln>
+          <a:effectLst/>
+        </p:spPr>
+        <p:style>
+          <a:lnRef idx="1">
+            <a:schemeClr val="accent1"/>
+          </a:lnRef>
+          <a:fillRef idx="3">
+            <a:schemeClr val="accent1"/>
+          </a:fillRef>
+          <a:effectRef idx="2">
+            <a:schemeClr val="accent1"/>
+          </a:effectRef>
+          <a:fontRef idx="minor">
+            <a:schemeClr val="lt1"/>
+          </a:fontRef>
+        </p:style>
+        <p:txBody>
+          <a:bodyPr rtlCol="0" anchor="ctr" lIns="0" rIns="0" tIns="0" bIns="0"/>
+          <a:lstStyle/>
+          <a:p>
+            <a:pPr algn="ctr"/>
+            <a:r>
+              <a:rPr sz="1600" b="1">
+                <a:solidFill>
+                  <a:srgbClr val="202122"/>
+                </a:solidFill>
+                <a:latin typeface="Calibri"/>
+              </a:rPr>
+              <a:t>1</a:t>
+            </a:r>
+          </a:p>
+        </p:txBody>
+      </p:sp>
+      <p:sp>
+        <p:nvSpPr>
+          <p:cNvPr id="8" name="TextBox 7"/>
+          <p:cNvSpPr txBox="1"/>
+          <p:nvPr/>
+        </p:nvSpPr>
+        <p:spPr>
+          <a:xfrm>
+            <a:off x="1234440" y="2011680"/>
+            <a:ext cx="6035040" cy="902969"/>
+          </a:xfrm>
+          <a:prstGeom prst="rect">
+            <a:avLst/>
+          </a:prstGeom>
+          <a:noFill/>
+        </p:spPr>
+        <p:txBody>
+          <a:bodyPr wrap="square" anchor="ctr" lIns="0" rIns="0" tIns="0" bIns="0"/>
+          <a:lstStyle/>
+          <a:p>
+            <a:pPr algn="l"/>
+            <a:r>
+              <a:rPr sz="2000" b="0" i="0">
+                <a:solidFill>
+                  <a:srgbClr val="202122"/>
+                </a:solidFill>
+                <a:latin typeface="Calibri"/>
+              </a:rPr>
+              <a:t>Describe employer duties under the Health and Safety at Work Act.</a:t>
+            </a:r>
+          </a:p>
+        </p:txBody>
+      </p:sp>
+      <p:sp>
+        <p:nvSpPr>
+          <p:cNvPr id="9" name="Oval 8"/>
+          <p:cNvSpPr/>
+          <p:nvPr/>
+        </p:nvSpPr>
+        <p:spPr>
+          <a:xfrm>
+            <a:off x="548640" y="3274695"/>
+            <a:ext cx="457200" cy="457200"/>
+          </a:xfrm>
+          <a:prstGeom prst="ellipse">
+            <a:avLst/>
+          </a:prstGeom>
+          <a:solidFill>
+            <a:srgbClr val="F2B705"/>
+          </a:solidFill>
+          <a:ln>
+            <a:noFill/>
+          </a:ln>
+          <a:effectLst/>
+        </p:spPr>
+        <p:style>
+          <a:lnRef idx="1">
+            <a:schemeClr val="accent1"/>
+          </a:lnRef>
+          <a:fillRef idx="3">
+            <a:schemeClr val="accent1"/>
+          </a:fillRef>
+          <a:effectRef idx="2">
+            <a:schemeClr val="accent1"/>
+          </a:effectRef>
+          <a:fontRef idx="minor">
+            <a:schemeClr val="lt1"/>
+          </a:fontRef>
+        </p:style>
+        <p:txBody>
+          <a:bodyPr rtlCol="0" anchor="ctr" lIns="0" rIns="0" tIns="0" bIns="0"/>
+          <a:lstStyle/>
+          <a:p>
+            <a:pPr algn="ctr"/>
+            <a:r>
+              <a:rPr sz="1600" b="1">
+                <a:solidFill>
+                  <a:srgbClr val="202122"/>
+                </a:solidFill>
+                <a:latin typeface="Calibri"/>
+              </a:rPr>
+              <a:t>2</a:t>
+            </a:r>
+          </a:p>
+        </p:txBody>
+      </p:sp>
+      <p:sp>
+        <p:nvSpPr>
+          <p:cNvPr id="10" name="TextBox 9"/>
+          <p:cNvSpPr txBox="1"/>
+          <p:nvPr/>
+        </p:nvSpPr>
+        <p:spPr>
+          <a:xfrm>
+            <a:off x="1234440" y="3051810"/>
+            <a:ext cx="6035040" cy="902969"/>
+          </a:xfrm>
+          <a:prstGeom prst="rect">
+            <a:avLst/>
+          </a:prstGeom>
+          <a:noFill/>
+        </p:spPr>
+        <p:txBody>
+          <a:bodyPr wrap="square" anchor="ctr" lIns="0" rIns="0" tIns="0" bIns="0"/>
+          <a:lstStyle/>
+          <a:p>
+            <a:pPr algn="l"/>
+            <a:r>
+              <a:rPr sz="2000" b="0" i="0">
+                <a:solidFill>
+                  <a:srgbClr val="202122"/>
+                </a:solidFill>
+                <a:latin typeface="Calibri"/>
+              </a:rPr>
+              <a:t>Explain the manual handling, work at height and DSE regulations.</a:t>
+            </a:r>
+          </a:p>
+        </p:txBody>
+      </p:sp>
+      <p:sp>
+        <p:nvSpPr>
+          <p:cNvPr id="11" name="Oval 10"/>
+          <p:cNvSpPr/>
+          <p:nvPr/>
+        </p:nvSpPr>
+        <p:spPr>
+          <a:xfrm>
+            <a:off x="548640" y="4314825"/>
+            <a:ext cx="457200" cy="457200"/>
+          </a:xfrm>
+          <a:prstGeom prst="ellipse">
+            <a:avLst/>
+          </a:prstGeom>
+          <a:solidFill>
+            <a:srgbClr val="F2B705"/>
+          </a:solidFill>
+          <a:ln>
+            <a:noFill/>
+          </a:ln>
+          <a:effectLst/>
+        </p:spPr>
+        <p:style>
+          <a:lnRef idx="1">
+            <a:schemeClr val="accent1"/>
+          </a:lnRef>
+          <a:fillRef idx="3">
+            <a:schemeClr val="accent1"/>
+          </a:fillRef>
+          <a:effectRef idx="2">
+            <a:schemeClr val="accent1"/>
+          </a:effectRef>
+          <a:fontRef idx="minor">
+            <a:schemeClr val="lt1"/>
+          </a:fontRef>
+        </p:style>
+        <p:txBody>
+          <a:bodyPr rtlCol="0" anchor="ctr" lIns="0" rIns="0" tIns="0" bIns="0"/>
+          <a:lstStyle/>
+          <a:p>
+            <a:pPr algn="ctr"/>
+            <a:r>
+              <a:rPr sz="1600" b="1">
+                <a:solidFill>
+                  <a:srgbClr val="202122"/>
+                </a:solidFill>
+                <a:latin typeface="Calibri"/>
+              </a:rPr>
+              <a:t>3</a:t>
+            </a:r>
+          </a:p>
+        </p:txBody>
+      </p:sp>
+      <p:sp>
+        <p:nvSpPr>
+          <p:cNvPr id="12" name="TextBox 11"/>
+          <p:cNvSpPr txBox="1"/>
+          <p:nvPr/>
+        </p:nvSpPr>
+        <p:spPr>
+          <a:xfrm>
+            <a:off x="1234440" y="4091939"/>
+            <a:ext cx="6035040" cy="902969"/>
+          </a:xfrm>
+          <a:prstGeom prst="rect">
+            <a:avLst/>
+          </a:prstGeom>
+          <a:noFill/>
+        </p:spPr>
+        <p:txBody>
+          <a:bodyPr wrap="square" anchor="ctr" lIns="0" rIns="0" tIns="0" bIns="0"/>
+          <a:lstStyle/>
+          <a:p>
+            <a:pPr algn="l"/>
+            <a:r>
+              <a:rPr sz="2000" b="0" i="0">
+                <a:solidFill>
+                  <a:srgbClr val="202122"/>
+                </a:solidFill>
+                <a:latin typeface="Calibri"/>
+              </a:rPr>
+              <a:t>Identify the main health and safety risks of digital work.</a:t>
+            </a:r>
+          </a:p>
+        </p:txBody>
+      </p:sp>
+      <p:sp>
+        <p:nvSpPr>
+          <p:cNvPr id="13" name="Oval 12"/>
+          <p:cNvSpPr/>
+          <p:nvPr/>
+        </p:nvSpPr>
+        <p:spPr>
+          <a:xfrm>
+            <a:off x="548640" y="5354954"/>
+            <a:ext cx="457200" cy="457200"/>
+          </a:xfrm>
+          <a:prstGeom prst="ellipse">
+            <a:avLst/>
+          </a:prstGeom>
+          <a:solidFill>
+            <a:srgbClr val="F2B705"/>
+          </a:solidFill>
+          <a:ln>
+            <a:noFill/>
+          </a:ln>
+          <a:effectLst/>
+        </p:spPr>
+        <p:style>
+          <a:lnRef idx="1">
+            <a:schemeClr val="accent1"/>
+          </a:lnRef>
+          <a:fillRef idx="3">
+            <a:schemeClr val="accent1"/>
+          </a:fillRef>
+          <a:effectRef idx="2">
+            <a:schemeClr val="accent1"/>
+          </a:effectRef>
+          <a:fontRef idx="minor">
+            <a:schemeClr val="lt1"/>
+          </a:fontRef>
+        </p:style>
+        <p:txBody>
+          <a:bodyPr rtlCol="0" anchor="ctr" lIns="0" rIns="0" tIns="0" bIns="0"/>
+          <a:lstStyle/>
+          <a:p>
+            <a:pPr algn="ctr"/>
+            <a:r>
+              <a:rPr sz="1600" b="1">
+                <a:solidFill>
+                  <a:srgbClr val="202122"/>
+                </a:solidFill>
+                <a:latin typeface="Calibri"/>
+              </a:rPr>
+              <a:t>4</a:t>
+            </a:r>
+          </a:p>
+        </p:txBody>
+      </p:sp>
+      <p:sp>
+        <p:nvSpPr>
+          <p:cNvPr id="14" name="TextBox 13"/>
+          <p:cNvSpPr txBox="1"/>
+          <p:nvPr/>
+        </p:nvSpPr>
+        <p:spPr>
+          <a:xfrm>
+            <a:off x="1234440" y="5132069"/>
+            <a:ext cx="6035040" cy="902969"/>
+          </a:xfrm>
+          <a:prstGeom prst="rect">
+            <a:avLst/>
+          </a:prstGeom>
+          <a:noFill/>
+        </p:spPr>
+        <p:txBody>
+          <a:bodyPr wrap="square" anchor="ctr" lIns="0" rIns="0" tIns="0" bIns="0"/>
+          <a:lstStyle/>
+          <a:p>
+            <a:pPr algn="l"/>
+            <a:r>
+              <a:rPr sz="2000" b="0" i="0">
+                <a:solidFill>
+                  <a:srgbClr val="202122"/>
+                </a:solidFill>
+                <a:latin typeface="Calibri"/>
+              </a:rPr>
+              <a:t>Recommend suitable mitigations for each risk.</a:t>
+            </a:r>
+          </a:p>
+        </p:txBody>
+      </p:sp>
+      <p:sp>
+        <p:nvSpPr>
+          <p:cNvPr id="15" name="Rounded Rectangle 14"/>
+          <p:cNvSpPr/>
+          <p:nvPr/>
+        </p:nvSpPr>
+        <p:spPr>
+          <a:xfrm>
+            <a:off x="7772400" y="1508760"/>
+            <a:ext cx="3867912" cy="4526280"/>
+          </a:xfrm>
+          <a:prstGeom prst="roundRect">
+            <a:avLst>
+              <a:gd name="adj" fmla="val 8000"/>
+            </a:avLst>
+          </a:prstGeom>
+          <a:solidFill>
+            <a:srgbClr val="EAF3FF"/>
+          </a:solidFill>
+          <a:ln>
+            <a:noFill/>
+          </a:ln>
+          <a:effectLst/>
+        </p:spPr>
+        <p:style>
+          <a:lnRef idx="1">
+            <a:schemeClr val="accent1"/>
+          </a:lnRef>
+          <a:fillRef idx="3">
+            <a:schemeClr val="accent1"/>
+          </a:fillRef>
+          <a:effectRef idx="2">
+            <a:schemeClr val="accent1"/>
+          </a:effectRef>
+          <a:fontRef idx="minor">
+            <a:schemeClr val="lt1"/>
+          </a:fontRef>
+        </p:style>
+        <p:txBody>
+          <a:bodyPr rtlCol="0" anchor="ctr"/>
+          <a:lstStyle/>
+          <a:p/>
+        </p:txBody>
+      </p:sp>
+      <p:sp>
+        <p:nvSpPr>
+          <p:cNvPr id="16" name="TextBox 15"/>
+          <p:cNvSpPr txBox="1"/>
+          <p:nvPr/>
+        </p:nvSpPr>
+        <p:spPr>
+          <a:xfrm>
+            <a:off x="8046720" y="1737360"/>
+            <a:ext cx="3291840" cy="365760"/>
+          </a:xfrm>
+          <a:prstGeom prst="rect">
+            <a:avLst/>
+          </a:prstGeom>
+          <a:noFill/>
+        </p:spPr>
+        <p:txBody>
+          <a:bodyPr wrap="square" anchor="t" lIns="0" rIns="0" tIns="0" bIns="0"/>
+          <a:lstStyle/>
+          <a:p>
+            <a:pPr algn="l"/>
+            <a:r>
+              <a:rPr sz="1300" b="1" i="0">
+                <a:solidFill>
+                  <a:srgbClr val="0645AD"/>
+                </a:solidFill>
+                <a:latin typeface="Calibri"/>
+              </a:rPr>
+              <a:t>STARTER</a:t>
+            </a:r>
+          </a:p>
+        </p:txBody>
+      </p:sp>
+      <p:sp>
+        <p:nvSpPr>
+          <p:cNvPr id="17" name="TextBox 16"/>
+          <p:cNvSpPr txBox="1"/>
+          <p:nvPr/>
+        </p:nvSpPr>
+        <p:spPr>
+          <a:xfrm>
+            <a:off x="8046720" y="2194560"/>
+            <a:ext cx="3291840" cy="3657600"/>
+          </a:xfrm>
+          <a:prstGeom prst="rect">
+            <a:avLst/>
+          </a:prstGeom>
+          <a:noFill/>
+        </p:spPr>
+        <p:txBody>
+          <a:bodyPr wrap="square" anchor="t" lIns="0" rIns="0" tIns="0" bIns="0"/>
+          <a:lstStyle/>
+          <a:p>
+            <a:pPr algn="l"/>
+            <a:r>
+              <a:rPr sz="2200" b="0" i="0">
+                <a:solidFill>
+                  <a:srgbClr val="03306E"/>
+                </a:solidFill>
+                <a:latin typeface="Cambria"/>
+              </a:rPr>
+              <a:t>Look around this room. List every hazard you can see that could hurt someone working in IT here.</a:t>
+            </a:r>
+          </a:p>
+        </p:txBody>
+      </p:sp>
+    </p:spTree>
+  </p:cSld>
+  <p:clrMapOvr>
+    <a:masterClrMapping/>
+  </p:clrMapOvr>
+</p:sld>
+</file>
+
+<file path=ppt/slides/slide3.xml><?xml version="1.0" encoding="utf-8"?>
+<p:sld xmlns:a="http://schemas.openxmlformats.org/drawingml/2006/main" xmlns:p="http://schemas.openxmlformats.org/presentationml/2006/main" xmlns:r="http://schemas.openxmlformats.org/officeDocument/2006/relationships">
+  <p:cSld>
+    <p:bg>
+      <p:bgPr>
+        <a:solidFill>
+          <a:srgbClr val="FFFFFF"/>
+        </a:solidFill>
+        <a:effectLst/>
+      </p:bgPr>
+    </p:bg>
+    <p:spTree>
+      <p:nvGrpSpPr>
+        <p:cNvPr id="1" name=""/>
+        <p:cNvGrpSpPr/>
+        <p:nvPr/>
+      </p:nvGrpSpPr>
+      <p:grpSpPr/>
+      <p:sp>
+        <p:nvSpPr>
+          <p:cNvPr id="2" name="TextBox 1"/>
+          <p:cNvSpPr txBox="1"/>
+          <p:nvPr/>
+        </p:nvSpPr>
+        <p:spPr>
+          <a:xfrm>
+            <a:off x="548640" y="320040"/>
+            <a:ext cx="11094415" cy="274320"/>
+          </a:xfrm>
+          <a:prstGeom prst="rect">
+            <a:avLst/>
+          </a:prstGeom>
+          <a:noFill/>
+        </p:spPr>
+        <p:txBody>
+          <a:bodyPr wrap="square" anchor="t" lIns="0" rIns="0" tIns="0" bIns="0"/>
+          <a:lstStyle/>
+          <a:p>
+            <a:pPr algn="l"/>
+            <a:r>
+              <a:rPr sz="1100" b="1" i="0">
+                <a:solidFill>
+                  <a:srgbClr val="54595D"/>
+                </a:solidFill>
+                <a:latin typeface="Calibri"/>
+              </a:rPr>
+              <a:t>CORE COMPONENT  ·  Core Paper 2</a:t>
+            </a:r>
+          </a:p>
+        </p:txBody>
+      </p:sp>
+      <p:sp>
+        <p:nvSpPr>
+          <p:cNvPr id="3" name="TextBox 2"/>
+          <p:cNvSpPr txBox="1"/>
+          <p:nvPr/>
+        </p:nvSpPr>
+        <p:spPr>
+          <a:xfrm>
+            <a:off x="548640" y="566928"/>
+            <a:ext cx="11094415" cy="822960"/>
+          </a:xfrm>
+          <a:prstGeom prst="rect">
+            <a:avLst/>
+          </a:prstGeom>
+          <a:noFill/>
+        </p:spPr>
+        <p:txBody>
+          <a:bodyPr wrap="square" anchor="ctr" lIns="0" rIns="0" tIns="0" bIns="0"/>
+          <a:lstStyle/>
+          <a:p>
+            <a:pPr algn="l"/>
+            <a:r>
+              <a:rPr sz="3200" b="1" i="0">
+                <a:solidFill>
+                  <a:srgbClr val="03306E"/>
+                </a:solidFill>
+                <a:latin typeface="Cambria"/>
+              </a:rPr>
+              <a:t>Health and Safety at Work Act</a:t>
+            </a:r>
+          </a:p>
+        </p:txBody>
+      </p:sp>
+      <p:sp>
+        <p:nvSpPr>
+          <p:cNvPr id="4" name="TextBox 3"/>
+          <p:cNvSpPr txBox="1"/>
+          <p:nvPr/>
+        </p:nvSpPr>
+        <p:spPr>
+          <a:xfrm>
+            <a:off x="548640" y="6446520"/>
+            <a:ext cx="8229600" cy="274320"/>
+          </a:xfrm>
+          <a:prstGeom prst="rect">
+            <a:avLst/>
+          </a:prstGeom>
+          <a:noFill/>
+        </p:spPr>
+        <p:txBody>
+          <a:bodyPr wrap="square" anchor="t" lIns="0" rIns="0" tIns="0" bIns="0"/>
+          <a:lstStyle/>
+          <a:p>
+            <a:pPr algn="l"/>
+            <a:r>
+              <a:rPr sz="1000" b="0" i="0">
+                <a:solidFill>
+                  <a:srgbClr val="54595D"/>
+                </a:solidFill>
+                <a:latin typeface="Calibri"/>
+              </a:rPr>
+              <a:t>Digital Support and Security T Level  ·  Health and Safety in Digital Work</a:t>
+            </a:r>
+          </a:p>
+        </p:txBody>
+      </p:sp>
+      <p:sp>
+        <p:nvSpPr>
+          <p:cNvPr id="5" name="TextBox 4"/>
+          <p:cNvSpPr txBox="1"/>
+          <p:nvPr/>
+        </p:nvSpPr>
+        <p:spPr>
+          <a:xfrm>
+            <a:off x="10728655" y="6446520"/>
+            <a:ext cx="914400" cy="274320"/>
+          </a:xfrm>
+          <a:prstGeom prst="rect">
+            <a:avLst/>
+          </a:prstGeom>
+          <a:noFill/>
+        </p:spPr>
+        <p:txBody>
+          <a:bodyPr wrap="square" anchor="t" lIns="0" rIns="0" tIns="0" bIns="0"/>
+          <a:lstStyle/>
+          <a:p>
+            <a:pPr algn="r"/>
+            <a:r>
+              <a:rPr sz="1000" b="0" i="0">
+                <a:solidFill>
+                  <a:srgbClr val="54595D"/>
+                </a:solidFill>
+                <a:latin typeface="Calibri"/>
+              </a:rPr>
+              <a:t>3</a:t>
+            </a:r>
+          </a:p>
+        </p:txBody>
+      </p:sp>
+      <p:sp>
+        <p:nvSpPr>
+          <p:cNvPr id="6" name="TextBox 5"/>
+          <p:cNvSpPr txBox="1"/>
+          <p:nvPr/>
+        </p:nvSpPr>
+        <p:spPr>
+          <a:xfrm>
+            <a:off x="548640" y="1554480"/>
+            <a:ext cx="6720840" cy="4617720"/>
+          </a:xfrm>
+          <a:prstGeom prst="rect">
+            <a:avLst/>
+          </a:prstGeom>
+          <a:noFill/>
+        </p:spPr>
+        <p:txBody>
+          <a:bodyPr wrap="square" lIns="0" rIns="0" tIns="0" bIns="0">
+            <a:spAutoFit/>
+          </a:bodyPr>
+          <a:lstStyle/>
+          <a:p>
+            <a:pPr>
+              <a:spcAft>
+                <a:spcPts val="1260"/>
+              </a:spcAft>
+            </a:pPr>
+            <a:r>
+              <a:rPr sz="2100" b="0">
+                <a:solidFill>
+                  <a:srgbClr val="202122"/>
+                </a:solidFill>
+                <a:latin typeface="Calibri"/>
+              </a:rPr>
+              <a:t>The Health and Safety at Work Act is the main law protecting people at work, including in IT.</a:t>
+            </a:r>
+          </a:p>
+          <a:p>
+            <a:pPr>
+              <a:spcAft>
+                <a:spcPts val="1260"/>
+              </a:spcAft>
+            </a:pPr>
+            <a:r>
+              <a:rPr sz="2100" b="0">
+                <a:solidFill>
+                  <a:srgbClr val="202122"/>
+                </a:solidFill>
+                <a:latin typeface="Calibri"/>
+              </a:rPr>
+              <a:t>Employers must provide a safe working environment, train staff properly, provide adequate welfare facilities such as toilets and drinking water, and give the information, instruction and supervision people need to work safely.</a:t>
+            </a:r>
+          </a:p>
+          <a:p>
+            <a:pPr>
+              <a:spcAft>
+                <a:spcPts val="1260"/>
+              </a:spcAft>
+            </a:pPr>
+            <a:r>
+              <a:rPr sz="2100" b="1">
+                <a:solidFill>
+                  <a:srgbClr val="202122"/>
+                </a:solidFill>
+                <a:latin typeface="Calibri"/>
+              </a:rPr>
+              <a:t>Employees have duties too:</a:t>
+            </a:r>
+            <a:r>
+              <a:rPr sz="2100" b="0">
+                <a:solidFill>
+                  <a:srgbClr val="202122"/>
+                </a:solidFill>
+                <a:latin typeface="Calibri"/>
+              </a:rPr>
+              <a:t> take reasonable care of themselves and others, follow training and safety procedures, and not misuse safety equipment.</a:t>
+            </a:r>
+          </a:p>
+          <a:p>
+            <a:pPr>
+              <a:spcAft>
+                <a:spcPts val="1260"/>
+              </a:spcAft>
+            </a:pPr>
+            <a:r>
+              <a:rPr sz="2100" b="0">
+                <a:solidFill>
+                  <a:srgbClr val="202122"/>
+                </a:solidFill>
+                <a:latin typeface="Calibri"/>
+              </a:rPr>
+              <a:t>More specific regulations, such as those for display screens and manual handling, sit underneath it.</a:t>
+            </a:r>
+          </a:p>
+        </p:txBody>
+      </p:sp>
+      <p:sp>
+        <p:nvSpPr>
+          <p:cNvPr id="7" name="Rounded Rectangle 6"/>
+          <p:cNvSpPr/>
+          <p:nvPr/>
+        </p:nvSpPr>
+        <p:spPr>
+          <a:xfrm>
+            <a:off x="7772400" y="1554480"/>
+            <a:ext cx="3867912" cy="4526280"/>
+          </a:xfrm>
+          <a:prstGeom prst="roundRect">
+            <a:avLst>
+              <a:gd name="adj" fmla="val 8000"/>
+            </a:avLst>
+          </a:prstGeom>
+          <a:solidFill>
+            <a:srgbClr val="03306E"/>
+          </a:solidFill>
+          <a:ln>
+            <a:noFill/>
+          </a:ln>
+          <a:effectLst/>
+        </p:spPr>
+        <p:style>
+          <a:lnRef idx="1">
+            <a:schemeClr val="accent1"/>
+          </a:lnRef>
+          <a:fillRef idx="3">
+            <a:schemeClr val="accent1"/>
+          </a:fillRef>
+          <a:effectRef idx="2">
+            <a:schemeClr val="accent1"/>
+          </a:effectRef>
+          <a:fontRef idx="minor">
+            <a:schemeClr val="lt1"/>
+          </a:fontRef>
+        </p:style>
+        <p:txBody>
+          <a:bodyPr rtlCol="0" anchor="ctr"/>
+          <a:lstStyle/>
+          <a:p/>
+        </p:txBody>
+      </p:sp>
+      <p:sp>
+        <p:nvSpPr>
+          <p:cNvPr id="8" name="Oval 7"/>
+          <p:cNvSpPr/>
+          <p:nvPr/>
+        </p:nvSpPr>
+        <p:spPr>
+          <a:xfrm>
+            <a:off x="8046720" y="1828800"/>
+            <a:ext cx="548640" cy="548640"/>
+          </a:xfrm>
+          <a:prstGeom prst="ellipse">
+            <a:avLst/>
+          </a:prstGeom>
+          <a:solidFill>
+            <a:srgbClr val="F2B705"/>
+          </a:solidFill>
+          <a:ln>
+            <a:noFill/>
+          </a:ln>
+          <a:effectLst/>
+        </p:spPr>
+        <p:style>
+          <a:lnRef idx="1">
+            <a:schemeClr val="accent1"/>
+          </a:lnRef>
+          <a:fillRef idx="3">
+            <a:schemeClr val="accent1"/>
+          </a:fillRef>
+          <a:effectRef idx="2">
+            <a:schemeClr val="accent1"/>
+          </a:effectRef>
+          <a:fontRef idx="minor">
+            <a:schemeClr val="lt1"/>
+          </a:fontRef>
+        </p:style>
+        <p:txBody>
+          <a:bodyPr rtlCol="0" anchor="ctr" lIns="0" rIns="0" tIns="0" bIns="0"/>
+          <a:lstStyle/>
+          <a:p>
+            <a:pPr algn="ctr"/>
+            <a:r>
+              <a:rPr sz="1300" b="1">
+                <a:solidFill>
+                  <a:srgbClr val="202122"/>
+                </a:solidFill>
+                <a:latin typeface="Calibri"/>
+              </a:rPr>
+              <a:t>e.g.</a:t>
+            </a:r>
+          </a:p>
+        </p:txBody>
+      </p:sp>
+      <p:sp>
+        <p:nvSpPr>
+          <p:cNvPr id="9" name="TextBox 8"/>
+          <p:cNvSpPr txBox="1"/>
+          <p:nvPr/>
+        </p:nvSpPr>
+        <p:spPr>
+          <a:xfrm>
+            <a:off x="8046720" y="2560320"/>
+            <a:ext cx="3291840" cy="365760"/>
+          </a:xfrm>
+          <a:prstGeom prst="rect">
+            <a:avLst/>
+          </a:prstGeom>
+          <a:noFill/>
+        </p:spPr>
+        <p:txBody>
+          <a:bodyPr wrap="square" anchor="t" lIns="0" rIns="0" tIns="0" bIns="0"/>
+          <a:lstStyle/>
+          <a:p>
+            <a:pPr algn="l"/>
+            <a:r>
+              <a:rPr sz="1300" b="1" i="0">
+                <a:solidFill>
+                  <a:srgbClr val="A9C8F0"/>
+                </a:solidFill>
+                <a:latin typeface="Calibri"/>
+              </a:rPr>
+              <a:t>EXAMPLE</a:t>
+            </a:r>
+          </a:p>
+        </p:txBody>
+      </p:sp>
+      <p:sp>
+        <p:nvSpPr>
+          <p:cNvPr id="10" name="TextBox 9"/>
+          <p:cNvSpPr txBox="1"/>
+          <p:nvPr/>
+        </p:nvSpPr>
+        <p:spPr>
+          <a:xfrm>
+            <a:off x="8046720" y="2971800"/>
+            <a:ext cx="3291840" cy="2971800"/>
+          </a:xfrm>
+          <a:prstGeom prst="rect">
+            <a:avLst/>
+          </a:prstGeom>
+          <a:noFill/>
+        </p:spPr>
+        <p:txBody>
+          <a:bodyPr wrap="square" anchor="t" lIns="0" rIns="0" tIns="0" bIns="0"/>
+          <a:lstStyle/>
+          <a:p>
+            <a:pPr algn="l"/>
+            <a:r>
+              <a:rPr sz="1900" b="0" i="0">
+                <a:solidFill>
+                  <a:srgbClr val="FFFFFF"/>
+                </a:solidFill>
+                <a:latin typeface="Cambria"/>
+              </a:rPr>
+              <a:t>A new technician must be trained before working in the server room, shown the fire exits and emergency power-off, and supervised until they're competent.</a:t>
+            </a:r>
+          </a:p>
+        </p:txBody>
+      </p:sp>
+    </p:spTree>
+  </p:cSld>
+  <p:clrMapOvr>
+    <a:masterClrMapping/>
+  </p:clrMapOvr>
+</p:sld>
+</file>
+
+<file path=ppt/slides/slide4.xml><?xml version="1.0" encoding="utf-8"?>
+<p:sld xmlns:a="http://schemas.openxmlformats.org/drawingml/2006/main" xmlns:p="http://schemas.openxmlformats.org/presentationml/2006/main" xmlns:r="http://schemas.openxmlformats.org/officeDocument/2006/relationships">
+  <p:cSld>
+    <p:bg>
+      <p:bgPr>
+        <a:solidFill>
+          <a:srgbClr val="FFFFFF"/>
+        </a:solidFill>
+        <a:effectLst/>
+      </p:bgPr>
+    </p:bg>
+    <p:spTree>
+      <p:nvGrpSpPr>
+        <p:cNvPr id="1" name=""/>
+        <p:cNvGrpSpPr/>
+        <p:nvPr/>
+      </p:nvGrpSpPr>
+      <p:grpSpPr/>
+      <p:sp>
+        <p:nvSpPr>
+          <p:cNvPr id="2" name="TextBox 1"/>
+          <p:cNvSpPr txBox="1"/>
+          <p:nvPr/>
+        </p:nvSpPr>
+        <p:spPr>
+          <a:xfrm>
+            <a:off x="548640" y="320040"/>
+            <a:ext cx="11094415" cy="274320"/>
+          </a:xfrm>
+          <a:prstGeom prst="rect">
+            <a:avLst/>
+          </a:prstGeom>
+          <a:noFill/>
+        </p:spPr>
+        <p:txBody>
+          <a:bodyPr wrap="square" anchor="t" lIns="0" rIns="0" tIns="0" bIns="0"/>
+          <a:lstStyle/>
+          <a:p>
+            <a:pPr algn="l"/>
+            <a:r>
+              <a:rPr sz="1100" b="1" i="0">
+                <a:solidFill>
+                  <a:srgbClr val="54595D"/>
+                </a:solidFill>
+                <a:latin typeface="Calibri"/>
+              </a:rPr>
+              <a:t>CORE COMPONENT  ·  Core Paper 2</a:t>
+            </a:r>
+          </a:p>
+        </p:txBody>
+      </p:sp>
+      <p:sp>
+        <p:nvSpPr>
+          <p:cNvPr id="3" name="TextBox 2"/>
+          <p:cNvSpPr txBox="1"/>
+          <p:nvPr/>
+        </p:nvSpPr>
+        <p:spPr>
+          <a:xfrm>
+            <a:off x="548640" y="566928"/>
+            <a:ext cx="11094415" cy="822960"/>
+          </a:xfrm>
+          <a:prstGeom prst="rect">
+            <a:avLst/>
+          </a:prstGeom>
+          <a:noFill/>
+        </p:spPr>
+        <p:txBody>
+          <a:bodyPr wrap="square" anchor="ctr" lIns="0" rIns="0" tIns="0" bIns="0"/>
+          <a:lstStyle/>
+          <a:p>
+            <a:pPr algn="l"/>
+            <a:r>
+              <a:rPr sz="3200" b="1" i="0">
+                <a:solidFill>
+                  <a:srgbClr val="03306E"/>
+                </a:solidFill>
+                <a:latin typeface="Cambria"/>
+              </a:rPr>
+              <a:t>Health and Safety at Work Act</a:t>
+            </a:r>
+          </a:p>
+        </p:txBody>
+      </p:sp>
+      <p:sp>
+        <p:nvSpPr>
+          <p:cNvPr id="4" name="TextBox 3"/>
+          <p:cNvSpPr txBox="1"/>
+          <p:nvPr/>
+        </p:nvSpPr>
+        <p:spPr>
+          <a:xfrm>
+            <a:off x="548640" y="6446520"/>
+            <a:ext cx="8229600" cy="274320"/>
+          </a:xfrm>
+          <a:prstGeom prst="rect">
+            <a:avLst/>
+          </a:prstGeom>
+          <a:noFill/>
+        </p:spPr>
+        <p:txBody>
+          <a:bodyPr wrap="square" anchor="t" lIns="0" rIns="0" tIns="0" bIns="0"/>
+          <a:lstStyle/>
+          <a:p>
+            <a:pPr algn="l"/>
+            <a:r>
+              <a:rPr sz="1000" b="0" i="0">
+                <a:solidFill>
+                  <a:srgbClr val="54595D"/>
+                </a:solidFill>
+                <a:latin typeface="Calibri"/>
+              </a:rPr>
+              <a:t>Digital Support and Security T Level  ·  Health and Safety in Digital Work</a:t>
+            </a:r>
+          </a:p>
+        </p:txBody>
+      </p:sp>
+      <p:sp>
+        <p:nvSpPr>
+          <p:cNvPr id="5" name="TextBox 4"/>
+          <p:cNvSpPr txBox="1"/>
+          <p:nvPr/>
+        </p:nvSpPr>
+        <p:spPr>
+          <a:xfrm>
+            <a:off x="10728655" y="6446520"/>
+            <a:ext cx="914400" cy="274320"/>
+          </a:xfrm>
+          <a:prstGeom prst="rect">
+            <a:avLst/>
+          </a:prstGeom>
+          <a:noFill/>
+        </p:spPr>
+        <p:txBody>
+          <a:bodyPr wrap="square" anchor="t" lIns="0" rIns="0" tIns="0" bIns="0"/>
+          <a:lstStyle/>
+          <a:p>
+            <a:pPr algn="r"/>
+            <a:r>
+              <a:rPr sz="1000" b="0" i="0">
+                <a:solidFill>
+                  <a:srgbClr val="54595D"/>
+                </a:solidFill>
+                <a:latin typeface="Calibri"/>
+              </a:rPr>
+              <a:t>4</a:t>
+            </a:r>
+          </a:p>
+        </p:txBody>
+      </p:sp>
+      <p:sp>
+        <p:nvSpPr>
+          <p:cNvPr id="6" name="TextBox 5"/>
+          <p:cNvSpPr txBox="1"/>
+          <p:nvPr/>
+        </p:nvSpPr>
+        <p:spPr>
+          <a:xfrm>
+            <a:off x="548640" y="1600200"/>
+            <a:ext cx="6675120" cy="4572000"/>
+          </a:xfrm>
+          <a:prstGeom prst="rect">
+            <a:avLst/>
+          </a:prstGeom>
+          <a:noFill/>
+        </p:spPr>
+        <p:txBody>
+          <a:bodyPr wrap="square" lIns="0" rIns="0" tIns="0" bIns="0">
+            <a:spAutoFit/>
+          </a:bodyPr>
+          <a:lstStyle/>
+          <a:p>
+            <a:pPr marL="274320" indent="-274320">
+              <a:spcAft>
+                <a:spcPts val="1080"/>
+              </a:spcAft>
+              <a:buClr>
+                <a:srgbClr val="0645AD"/>
+              </a:buClr>
+              <a:buFont typeface="Arial"/>
+              <a:buChar char="•"/>
+            </a:pPr>
+            <a:r>
+              <a:rPr sz="2400" b="0">
+                <a:solidFill>
+                  <a:srgbClr val="202122"/>
+                </a:solidFill>
+                <a:latin typeface="Calibri"/>
+              </a:rPr>
+              <a:t>Provide a safe working environment</a:t>
+            </a:r>
+          </a:p>
+          <a:p>
+            <a:pPr marL="274320" indent="-274320">
+              <a:spcAft>
+                <a:spcPts val="1080"/>
+              </a:spcAft>
+              <a:buClr>
+                <a:srgbClr val="0645AD"/>
+              </a:buClr>
+              <a:buFont typeface="Arial"/>
+              <a:buChar char="•"/>
+            </a:pPr>
+            <a:r>
+              <a:rPr sz="2400" b="0">
+                <a:solidFill>
+                  <a:srgbClr val="202122"/>
+                </a:solidFill>
+                <a:latin typeface="Calibri"/>
+              </a:rPr>
+              <a:t>Train staff properly</a:t>
+            </a:r>
+          </a:p>
+          <a:p>
+            <a:pPr marL="274320" indent="-274320">
+              <a:spcAft>
+                <a:spcPts val="1080"/>
+              </a:spcAft>
+              <a:buClr>
+                <a:srgbClr val="0645AD"/>
+              </a:buClr>
+              <a:buFont typeface="Arial"/>
+              <a:buChar char="•"/>
+            </a:pPr>
+            <a:r>
+              <a:rPr sz="2400" b="0">
+                <a:solidFill>
+                  <a:srgbClr val="202122"/>
+                </a:solidFill>
+                <a:latin typeface="Calibri"/>
+              </a:rPr>
+              <a:t>Provide adequate welfare facilities</a:t>
+            </a:r>
+          </a:p>
+          <a:p>
+            <a:pPr marL="274320" indent="-274320">
+              <a:spcAft>
+                <a:spcPts val="1080"/>
+              </a:spcAft>
+              <a:buClr>
+                <a:srgbClr val="0645AD"/>
+              </a:buClr>
+              <a:buFont typeface="Arial"/>
+              <a:buChar char="•"/>
+            </a:pPr>
+            <a:r>
+              <a:rPr sz="2400" b="0">
+                <a:solidFill>
+                  <a:srgbClr val="202122"/>
+                </a:solidFill>
+                <a:latin typeface="Calibri"/>
+              </a:rPr>
+              <a:t>Give relevant information, instruction and supervision</a:t>
+            </a:r>
+          </a:p>
+        </p:txBody>
+      </p:sp>
+      <p:sp>
+        <p:nvSpPr>
+          <p:cNvPr id="7" name="Rounded Rectangle 6"/>
+          <p:cNvSpPr/>
+          <p:nvPr/>
+        </p:nvSpPr>
+        <p:spPr>
+          <a:xfrm>
+            <a:off x="7772400" y="1600200"/>
+            <a:ext cx="3867912" cy="4434840"/>
+          </a:xfrm>
+          <a:prstGeom prst="roundRect">
+            <a:avLst>
+              <a:gd name="adj" fmla="val 8000"/>
+            </a:avLst>
+          </a:prstGeom>
+          <a:solidFill>
+            <a:srgbClr val="03306E"/>
+          </a:solidFill>
+          <a:ln>
+            <a:noFill/>
+          </a:ln>
+          <a:effectLst/>
+        </p:spPr>
+        <p:style>
+          <a:lnRef idx="1">
+            <a:schemeClr val="accent1"/>
+          </a:lnRef>
+          <a:fillRef idx="3">
+            <a:schemeClr val="accent1"/>
+          </a:fillRef>
+          <a:effectRef idx="2">
+            <a:schemeClr val="accent1"/>
+          </a:effectRef>
+          <a:fontRef idx="minor">
+            <a:schemeClr val="lt1"/>
+          </a:fontRef>
+        </p:style>
+        <p:txBody>
+          <a:bodyPr rtlCol="0" anchor="ctr"/>
+          <a:lstStyle/>
+          <a:p/>
+        </p:txBody>
+      </p:sp>
+      <p:sp>
+        <p:nvSpPr>
+          <p:cNvPr id="8" name="Oval 7"/>
+          <p:cNvSpPr/>
+          <p:nvPr/>
+        </p:nvSpPr>
+        <p:spPr>
+          <a:xfrm>
+            <a:off x="8046720" y="1874519"/>
+            <a:ext cx="548640" cy="548640"/>
+          </a:xfrm>
+          <a:prstGeom prst="ellipse">
+            <a:avLst/>
+          </a:prstGeom>
+          <a:solidFill>
+            <a:srgbClr val="F2B705"/>
+          </a:solidFill>
+          <a:ln>
+            <a:noFill/>
+          </a:ln>
+          <a:effectLst/>
+        </p:spPr>
+        <p:style>
+          <a:lnRef idx="1">
+            <a:schemeClr val="accent1"/>
+          </a:lnRef>
+          <a:fillRef idx="3">
+            <a:schemeClr val="accent1"/>
+          </a:fillRef>
+          <a:effectRef idx="2">
+            <a:schemeClr val="accent1"/>
+          </a:effectRef>
+          <a:fontRef idx="minor">
+            <a:schemeClr val="lt1"/>
+          </a:fontRef>
+        </p:style>
+        <p:txBody>
+          <a:bodyPr rtlCol="0" anchor="ctr" lIns="0" rIns="0" tIns="0" bIns="0"/>
+          <a:lstStyle/>
+          <a:p>
+            <a:pPr algn="ctr"/>
+            <a:r>
+              <a:rPr sz="2000" b="1">
+                <a:solidFill>
+                  <a:srgbClr val="202122"/>
+                </a:solidFill>
+                <a:latin typeface="Calibri"/>
+              </a:rPr>
+              <a:t>!</a:t>
+            </a:r>
+          </a:p>
+        </p:txBody>
+      </p:sp>
+      <p:sp>
+        <p:nvSpPr>
+          <p:cNvPr id="9" name="TextBox 8"/>
+          <p:cNvSpPr txBox="1"/>
+          <p:nvPr/>
+        </p:nvSpPr>
+        <p:spPr>
+          <a:xfrm>
+            <a:off x="8046720" y="2606040"/>
+            <a:ext cx="3291840" cy="365760"/>
+          </a:xfrm>
+          <a:prstGeom prst="rect">
+            <a:avLst/>
+          </a:prstGeom>
+          <a:noFill/>
+        </p:spPr>
+        <p:txBody>
+          <a:bodyPr wrap="square" anchor="t" lIns="0" rIns="0" tIns="0" bIns="0"/>
+          <a:lstStyle/>
+          <a:p>
+            <a:pPr algn="l"/>
+            <a:r>
+              <a:rPr sz="1300" b="1" i="0">
+                <a:solidFill>
+                  <a:srgbClr val="A9C8F0"/>
+                </a:solidFill>
+                <a:latin typeface="Calibri"/>
+              </a:rPr>
+              <a:t>KEY IDEA</a:t>
+            </a:r>
+          </a:p>
+        </p:txBody>
+      </p:sp>
+      <p:sp>
+        <p:nvSpPr>
+          <p:cNvPr id="10" name="TextBox 9"/>
+          <p:cNvSpPr txBox="1"/>
+          <p:nvPr/>
+        </p:nvSpPr>
+        <p:spPr>
+          <a:xfrm>
+            <a:off x="8046720" y="3017520"/>
+            <a:ext cx="3291840" cy="2926080"/>
+          </a:xfrm>
+          <a:prstGeom prst="rect">
+            <a:avLst/>
+          </a:prstGeom>
+          <a:noFill/>
+        </p:spPr>
+        <p:txBody>
+          <a:bodyPr wrap="square" anchor="t" lIns="0" rIns="0" tIns="0" bIns="0"/>
+          <a:lstStyle/>
+          <a:p>
+            <a:pPr algn="l"/>
+            <a:r>
+              <a:rPr sz="2200" b="0" i="0">
+                <a:solidFill>
+                  <a:srgbClr val="FFFFFF"/>
+                </a:solidFill>
+                <a:latin typeface="Cambria"/>
+              </a:rPr>
+              <a:t>Employers carry the main duty, but employees must also take reasonable care of themselves and others.</a:t>
+            </a:r>
+          </a:p>
+        </p:txBody>
+      </p:sp>
+    </p:spTree>
+  </p:cSld>
+  <p:clrMapOvr>
+    <a:masterClrMapping/>
+  </p:clrMapOvr>
+</p:sld>
+</file>
+
+<file path=ppt/slides/slide5.xml><?xml version="1.0" encoding="utf-8"?>
+<p:sld xmlns:a="http://schemas.openxmlformats.org/drawingml/2006/main" xmlns:p="http://schemas.openxmlformats.org/presentationml/2006/main" xmlns:r="http://schemas.openxmlformats.org/officeDocument/2006/relationships">
+  <p:cSld>
+    <p:bg>
+      <p:bgPr>
+        <a:solidFill>
+          <a:srgbClr val="FFFFFF"/>
+        </a:solidFill>
+        <a:effectLst/>
+      </p:bgPr>
+    </p:bg>
+    <p:spTree>
+      <p:nvGrpSpPr>
+        <p:cNvPr id="1" name=""/>
+        <p:cNvGrpSpPr/>
+        <p:nvPr/>
+      </p:nvGrpSpPr>
+      <p:grpSpPr/>
+      <p:sp>
+        <p:nvSpPr>
+          <p:cNvPr id="2" name="TextBox 1"/>
+          <p:cNvSpPr txBox="1"/>
+          <p:nvPr/>
+        </p:nvSpPr>
+        <p:spPr>
+          <a:xfrm>
+            <a:off x="548640" y="320040"/>
+            <a:ext cx="11094415" cy="274320"/>
+          </a:xfrm>
+          <a:prstGeom prst="rect">
+            <a:avLst/>
+          </a:prstGeom>
+          <a:noFill/>
+        </p:spPr>
+        <p:txBody>
+          <a:bodyPr wrap="square" anchor="t" lIns="0" rIns="0" tIns="0" bIns="0"/>
+          <a:lstStyle/>
+          <a:p>
+            <a:pPr algn="l"/>
+            <a:r>
+              <a:rPr sz="1100" b="1" i="0">
+                <a:solidFill>
+                  <a:srgbClr val="54595D"/>
+                </a:solidFill>
+                <a:latin typeface="Calibri"/>
+              </a:rPr>
+              <a:t>CORE COMPONENT  ·  Core Paper 2</a:t>
+            </a:r>
+          </a:p>
+        </p:txBody>
+      </p:sp>
+      <p:sp>
+        <p:nvSpPr>
+          <p:cNvPr id="3" name="TextBox 2"/>
+          <p:cNvSpPr txBox="1"/>
+          <p:nvPr/>
+        </p:nvSpPr>
+        <p:spPr>
+          <a:xfrm>
+            <a:off x="548640" y="566928"/>
+            <a:ext cx="11094415" cy="822960"/>
+          </a:xfrm>
+          <a:prstGeom prst="rect">
+            <a:avLst/>
+          </a:prstGeom>
+          <a:noFill/>
+        </p:spPr>
+        <p:txBody>
+          <a:bodyPr wrap="square" anchor="ctr" lIns="0" rIns="0" tIns="0" bIns="0"/>
+          <a:lstStyle/>
+          <a:p>
+            <a:pPr algn="l"/>
+            <a:r>
+              <a:rPr sz="3200" b="1" i="0">
+                <a:solidFill>
+                  <a:srgbClr val="03306E"/>
+                </a:solidFill>
+                <a:latin typeface="Cambria"/>
+              </a:rPr>
+              <a:t>Quick check: Health and Safety at Work Act</a:t>
+            </a:r>
+          </a:p>
+        </p:txBody>
+      </p:sp>
+      <p:sp>
+        <p:nvSpPr>
+          <p:cNvPr id="4" name="TextBox 3"/>
+          <p:cNvSpPr txBox="1"/>
+          <p:nvPr/>
+        </p:nvSpPr>
+        <p:spPr>
+          <a:xfrm>
+            <a:off x="548640" y="6446520"/>
+            <a:ext cx="8229600" cy="274320"/>
+          </a:xfrm>
+          <a:prstGeom prst="rect">
+            <a:avLst/>
+          </a:prstGeom>
+          <a:noFill/>
+        </p:spPr>
+        <p:txBody>
+          <a:bodyPr wrap="square" anchor="t" lIns="0" rIns="0" tIns="0" bIns="0"/>
+          <a:lstStyle/>
+          <a:p>
+            <a:pPr algn="l"/>
+            <a:r>
+              <a:rPr sz="1000" b="0" i="0">
+                <a:solidFill>
+                  <a:srgbClr val="54595D"/>
+                </a:solidFill>
+                <a:latin typeface="Calibri"/>
+              </a:rPr>
+              <a:t>Digital Support and Security T Level  ·  Health and Safety in Digital Work</a:t>
+            </a:r>
+          </a:p>
+        </p:txBody>
+      </p:sp>
+      <p:sp>
+        <p:nvSpPr>
+          <p:cNvPr id="5" name="TextBox 4"/>
+          <p:cNvSpPr txBox="1"/>
+          <p:nvPr/>
+        </p:nvSpPr>
+        <p:spPr>
+          <a:xfrm>
+            <a:off x="10728655" y="6446520"/>
+            <a:ext cx="914400" cy="274320"/>
+          </a:xfrm>
+          <a:prstGeom prst="rect">
+            <a:avLst/>
+          </a:prstGeom>
+          <a:noFill/>
+        </p:spPr>
+        <p:txBody>
+          <a:bodyPr wrap="square" anchor="t" lIns="0" rIns="0" tIns="0" bIns="0"/>
+          <a:lstStyle/>
+          <a:p>
+            <a:pPr algn="r"/>
+            <a:r>
+              <a:rPr sz="1000" b="0" i="0">
+                <a:solidFill>
+                  <a:srgbClr val="54595D"/>
+                </a:solidFill>
+                <a:latin typeface="Calibri"/>
+              </a:rPr>
+              <a:t>5</a:t>
+            </a:r>
+          </a:p>
+        </p:txBody>
+      </p:sp>
+      <p:sp>
+        <p:nvSpPr>
+          <p:cNvPr id="6" name="Oval 5"/>
+          <p:cNvSpPr/>
+          <p:nvPr/>
+        </p:nvSpPr>
+        <p:spPr>
+          <a:xfrm>
+            <a:off x="548640" y="1691640"/>
+            <a:ext cx="502920" cy="502920"/>
+          </a:xfrm>
+          <a:prstGeom prst="ellipse">
+            <a:avLst/>
+          </a:prstGeom>
+          <a:solidFill>
+            <a:srgbClr val="F2B705"/>
+          </a:solidFill>
+          <a:ln>
+            <a:noFill/>
+          </a:ln>
+          <a:effectLst/>
+        </p:spPr>
+        <p:style>
+          <a:lnRef idx="1">
+            <a:schemeClr val="accent1"/>
+          </a:lnRef>
+          <a:fillRef idx="3">
+            <a:schemeClr val="accent1"/>
+          </a:fillRef>
+          <a:effectRef idx="2">
+            <a:schemeClr val="accent1"/>
+          </a:effectRef>
+          <a:fontRef idx="minor">
+            <a:schemeClr val="lt1"/>
+          </a:fontRef>
+        </p:style>
+        <p:txBody>
+          <a:bodyPr rtlCol="0" anchor="ctr" lIns="0" rIns="0" tIns="0" bIns="0"/>
+          <a:lstStyle/>
+          <a:p>
+            <a:pPr algn="ctr"/>
+            <a:r>
+              <a:rPr sz="1600" b="1">
+                <a:solidFill>
+                  <a:srgbClr val="202122"/>
+                </a:solidFill>
+                <a:latin typeface="Calibri"/>
+              </a:rPr>
+              <a:t>1</a:t>
+            </a:r>
+          </a:p>
+        </p:txBody>
+      </p:sp>
+      <p:sp>
+        <p:nvSpPr>
+          <p:cNvPr id="7" name="TextBox 6"/>
+          <p:cNvSpPr txBox="1"/>
+          <p:nvPr/>
+        </p:nvSpPr>
+        <p:spPr>
+          <a:xfrm>
+            <a:off x="1371600" y="1645920"/>
+            <a:ext cx="10271455" cy="1188720"/>
+          </a:xfrm>
+          <a:prstGeom prst="rect">
+            <a:avLst/>
+          </a:prstGeom>
+          <a:noFill/>
+        </p:spPr>
+        <p:txBody>
+          <a:bodyPr wrap="square" anchor="t" lIns="0" rIns="0" tIns="0" bIns="0"/>
+          <a:lstStyle/>
+          <a:p>
+            <a:pPr algn="l"/>
+            <a:r>
+              <a:rPr sz="2400" b="0" i="0">
+                <a:solidFill>
+                  <a:srgbClr val="202122"/>
+                </a:solidFill>
+                <a:latin typeface="Calibri"/>
+              </a:rPr>
+              <a:t>Name two employer duties under the Act.</a:t>
+            </a:r>
+          </a:p>
+        </p:txBody>
+      </p:sp>
+      <p:sp>
+        <p:nvSpPr>
+          <p:cNvPr id="8" name="Oval 7"/>
+          <p:cNvSpPr/>
+          <p:nvPr/>
+        </p:nvSpPr>
+        <p:spPr>
+          <a:xfrm>
+            <a:off x="548640" y="3108960"/>
+            <a:ext cx="502920" cy="502920"/>
+          </a:xfrm>
+          <a:prstGeom prst="ellipse">
+            <a:avLst/>
+          </a:prstGeom>
+          <a:solidFill>
+            <a:srgbClr val="F2B705"/>
+          </a:solidFill>
+          <a:ln>
+            <a:noFill/>
+          </a:ln>
+          <a:effectLst/>
+        </p:spPr>
+        <p:style>
+          <a:lnRef idx="1">
+            <a:schemeClr val="accent1"/>
+          </a:lnRef>
+          <a:fillRef idx="3">
+            <a:schemeClr val="accent1"/>
+          </a:fillRef>
+          <a:effectRef idx="2">
+            <a:schemeClr val="accent1"/>
+          </a:effectRef>
+          <a:fontRef idx="minor">
+            <a:schemeClr val="lt1"/>
+          </a:fontRef>
+        </p:style>
+        <p:txBody>
+          <a:bodyPr rtlCol="0" anchor="ctr" lIns="0" rIns="0" tIns="0" bIns="0"/>
+          <a:lstStyle/>
+          <a:p>
+            <a:pPr algn="ctr"/>
+            <a:r>
+              <a:rPr sz="1600" b="1">
+                <a:solidFill>
+                  <a:srgbClr val="202122"/>
+                </a:solidFill>
+                <a:latin typeface="Calibri"/>
+              </a:rPr>
+              <a:t>2</a:t>
+            </a:r>
+          </a:p>
+        </p:txBody>
+      </p:sp>
+      <p:sp>
+        <p:nvSpPr>
+          <p:cNvPr id="9" name="TextBox 8"/>
+          <p:cNvSpPr txBox="1"/>
+          <p:nvPr/>
+        </p:nvSpPr>
+        <p:spPr>
+          <a:xfrm>
+            <a:off x="1371600" y="3063240"/>
+            <a:ext cx="10271455" cy="1188720"/>
+          </a:xfrm>
+          <a:prstGeom prst="rect">
+            <a:avLst/>
+          </a:prstGeom>
+          <a:noFill/>
+        </p:spPr>
+        <p:txBody>
+          <a:bodyPr wrap="square" anchor="t" lIns="0" rIns="0" tIns="0" bIns="0"/>
+          <a:lstStyle/>
+          <a:p>
+            <a:pPr algn="l"/>
+            <a:r>
+              <a:rPr sz="2400" b="0" i="0">
+                <a:solidFill>
+                  <a:srgbClr val="202122"/>
+                </a:solidFill>
+                <a:latin typeface="Calibri"/>
+              </a:rPr>
+              <a:t>Do employees have duties too?</a:t>
+            </a:r>
+          </a:p>
+        </p:txBody>
+      </p:sp>
+      <p:sp>
+        <p:nvSpPr>
+          <p:cNvPr id="10" name="Oval 9"/>
+          <p:cNvSpPr/>
+          <p:nvPr/>
+        </p:nvSpPr>
+        <p:spPr>
+          <a:xfrm>
+            <a:off x="548640" y="4526280"/>
+            <a:ext cx="502920" cy="502920"/>
+          </a:xfrm>
+          <a:prstGeom prst="ellipse">
+            <a:avLst/>
+          </a:prstGeom>
+          <a:solidFill>
+            <a:srgbClr val="F2B705"/>
+          </a:solidFill>
+          <a:ln>
+            <a:noFill/>
+          </a:ln>
+          <a:effectLst/>
+        </p:spPr>
+        <p:style>
+          <a:lnRef idx="1">
+            <a:schemeClr val="accent1"/>
+          </a:lnRef>
+          <a:fillRef idx="3">
+            <a:schemeClr val="accent1"/>
+          </a:fillRef>
+          <a:effectRef idx="2">
+            <a:schemeClr val="accent1"/>
+          </a:effectRef>
+          <a:fontRef idx="minor">
+            <a:schemeClr val="lt1"/>
+          </a:fontRef>
+        </p:style>
+        <p:txBody>
+          <a:bodyPr rtlCol="0" anchor="ctr" lIns="0" rIns="0" tIns="0" bIns="0"/>
+          <a:lstStyle/>
+          <a:p>
+            <a:pPr algn="ctr"/>
+            <a:r>
+              <a:rPr sz="1600" b="1">
+                <a:solidFill>
+                  <a:srgbClr val="202122"/>
+                </a:solidFill>
+                <a:latin typeface="Calibri"/>
+              </a:rPr>
+              <a:t>3</a:t>
+            </a:r>
+          </a:p>
+        </p:txBody>
+      </p:sp>
+      <p:sp>
+        <p:nvSpPr>
+          <p:cNvPr id="11" name="TextBox 10"/>
+          <p:cNvSpPr txBox="1"/>
+          <p:nvPr/>
+        </p:nvSpPr>
+        <p:spPr>
+          <a:xfrm>
+            <a:off x="1371600" y="4480560"/>
+            <a:ext cx="10271455" cy="1188720"/>
+          </a:xfrm>
+          <a:prstGeom prst="rect">
+            <a:avLst/>
+          </a:prstGeom>
+          <a:noFill/>
+        </p:spPr>
+        <p:txBody>
+          <a:bodyPr wrap="square" anchor="t" lIns="0" rIns="0" tIns="0" bIns="0"/>
+          <a:lstStyle/>
+          <a:p>
+            <a:pPr algn="l"/>
+            <a:r>
+              <a:rPr sz="2400" b="0" i="0">
+                <a:solidFill>
+                  <a:srgbClr val="202122"/>
+                </a:solidFill>
+                <a:latin typeface="Calibri"/>
+              </a:rPr>
+              <a:t>How do other regulations relate to the Act?</a:t>
+            </a:r>
+          </a:p>
+        </p:txBody>
+      </p:sp>
+      <p:sp>
+        <p:nvSpPr>
+          <p:cNvPr id="12" name="TextBox 11"/>
+          <p:cNvSpPr txBox="1"/>
+          <p:nvPr/>
+        </p:nvSpPr>
+        <p:spPr>
+          <a:xfrm>
+            <a:off x="548640" y="5852160"/>
+            <a:ext cx="11094415" cy="365760"/>
+          </a:xfrm>
+          <a:prstGeom prst="rect">
+            <a:avLst/>
+          </a:prstGeom>
+          <a:noFill/>
+        </p:spPr>
+        <p:txBody>
+          <a:bodyPr wrap="square" anchor="t" lIns="0" rIns="0" tIns="0" bIns="0"/>
+          <a:lstStyle/>
+          <a:p>
+            <a:pPr algn="l"/>
+            <a:r>
+              <a:rPr sz="1300" b="0" i="1">
+                <a:solidFill>
+                  <a:srgbClr val="54595D"/>
+                </a:solidFill>
+                <a:latin typeface="Calibri"/>
+              </a:rPr>
+              <a:t>Answer on mini whiteboards or in your book. Answers are in the speaker notes.</a:t>
+            </a:r>
+          </a:p>
+        </p:txBody>
+      </p:sp>
+    </p:spTree>
+  </p:cSld>
+  <p:clrMapOvr>
+    <a:masterClrMapping/>
+  </p:clrMapOvr>
+</p:sld>
+</file>
+
 <file path=ppt/slides/slide6.xml><?xml version="1.0" encoding="utf-8"?>
 <p:sld xmlns:a="http://schemas.openxmlformats.org/drawingml/2006/main" xmlns:p="http://schemas.openxmlformats.org/presentationml/2006/main" xmlns:r="http://schemas.openxmlformats.org/officeDocument/2006/relationships">
   <p:cSld>
@@ -6966,7 +10220,7 @@
                 </a:solidFill>
                 <a:latin typeface="Cambria"/>
               </a:rPr>
-              <a:t>Key terms</a:t>
+              <a:t>Key regulations</a:t>
             </a:r>
           </a:p>
         </p:txBody>
@@ -7039,14 +10293,103 @@
       </p:sp>
       <p:sp>
         <p:nvSpPr>
-          <p:cNvPr id="6" name="Rounded Rectangle 5"/>
+          <p:cNvPr id="6" name="TextBox 5"/>
+          <p:cNvSpPr txBox="1"/>
+          <p:nvPr/>
+        </p:nvSpPr>
+        <p:spPr>
+          <a:xfrm>
+            <a:off x="548640" y="1554480"/>
+            <a:ext cx="6720840" cy="4617720"/>
+          </a:xfrm>
+          <a:prstGeom prst="rect">
+            <a:avLst/>
+          </a:prstGeom>
+          <a:noFill/>
+        </p:spPr>
+        <p:txBody>
+          <a:bodyPr wrap="square" lIns="0" rIns="0" tIns="0" bIns="0">
+            <a:spAutoFit/>
+          </a:bodyPr>
+          <a:lstStyle/>
+          <a:p>
+            <a:pPr>
+              <a:spcAft>
+                <a:spcPts val="1200"/>
+              </a:spcAft>
+            </a:pPr>
+            <a:r>
+              <a:rPr sz="2000" b="1">
+                <a:solidFill>
+                  <a:srgbClr val="202122"/>
+                </a:solidFill>
+                <a:latin typeface="Calibri"/>
+              </a:rPr>
+              <a:t>Manual handling regulations:</a:t>
+            </a:r>
+            <a:r>
+              <a:rPr sz="2000" b="0">
+                <a:solidFill>
+                  <a:srgbClr val="202122"/>
+                </a:solidFill>
+                <a:latin typeface="Calibri"/>
+              </a:rPr>
+              <a:t> avoid hazardous lifting where possible. Where you can't, assess the risk, tell staff about the load's weight and centre of gravity, and reduce the risk, for example with trolleys or team lifts.</a:t>
+            </a:r>
+          </a:p>
+          <a:p>
+            <a:pPr>
+              <a:spcAft>
+                <a:spcPts val="1200"/>
+              </a:spcAft>
+            </a:pPr>
+            <a:r>
+              <a:rPr sz="2000" b="1">
+                <a:solidFill>
+                  <a:srgbClr val="202122"/>
+                </a:solidFill>
+                <a:latin typeface="Calibri"/>
+              </a:rPr>
+              <a:t>Work at height regulations:</a:t>
+            </a:r>
+            <a:r>
+              <a:rPr sz="2000" b="0">
+                <a:solidFill>
+                  <a:srgbClr val="202122"/>
+                </a:solidFill>
+                <a:latin typeface="Calibri"/>
+              </a:rPr>
+              <a:t> avoid it where you can. Otherwise plan and supervise the work, use competent people and suitable, stable equipment, protect against falling objects and plan for emergencies.</a:t>
+            </a:r>
+          </a:p>
+          <a:p>
+            <a:pPr>
+              <a:spcAft>
+                <a:spcPts val="1200"/>
+              </a:spcAft>
+            </a:pPr>
+            <a:r>
+              <a:rPr sz="2000" b="0">
+                <a:solidFill>
+                  <a:srgbClr val="202122"/>
+                </a:solidFill>
+                <a:latin typeface="Calibri"/>
+              </a:rPr>
+              <a:t>Display screen equipment (DSE) regulations: employers must assess workstations, reduce risks including regular breaks from the screen, provide eye tests on request, and give training.</a:t>
+            </a:r>
+          </a:p>
+        </p:txBody>
+      </p:sp>
+      <p:sp>
+        <p:nvSpPr>
+          <p:cNvPr id="7" name="Rounded Rectangle 6"/>
           <p:cNvSpPr/>
           <p:nvPr/>
         </p:nvSpPr>
         <p:spPr>
           <a:xfrm>
-            <a:off x="548640" y="1600200"/>
-            <a:ext cx="5432907" cy="2171700"/>
+            <a:off x="7772400" y="1554480"/>
+            <a:ext cx="3867912" cy="4526280"/>
           </a:xfrm>
           <a:prstGeom prst="roundRect">
             <a:avLst>
@@ -7054,7 +10397,7 @@
             </a:avLst>
           </a:prstGeom>
           <a:solidFill>
-            <a:srgbClr val="EAF3FF"/>
+            <a:srgbClr val="03306E"/>
           </a:solidFill>
           <a:ln>
             <a:noFill/>
@@ -7083,64 +10426,20 @@
       </p:sp>
       <p:sp>
         <p:nvSpPr>
-          <p:cNvPr id="7" name="TextBox 6"/>
-          <p:cNvSpPr txBox="1"/>
-          <p:nvPr/>
-        </p:nvSpPr>
-        <p:spPr>
-          <a:xfrm>
-            <a:off x="777240" y="1691640"/>
-            <a:ext cx="4975707" cy="1988819"/>
-          </a:xfrm>
-          <a:prstGeom prst="rect">
-            <a:avLst/>
-          </a:prstGeom>
-          <a:noFill/>
-        </p:spPr>
-        <p:txBody>
-          <a:bodyPr wrap="square" anchor="ctr" lIns="0" rIns="0" tIns="0" bIns="0"/>
-          <a:lstStyle/>
-          <a:p>
-            <a:pPr algn="l"/>
-            <a:r>
-              <a:rPr sz="1900" b="1" i="0">
-                <a:solidFill>
-                  <a:srgbClr val="03306E"/>
-                </a:solidFill>
-                <a:latin typeface="Calibri"/>
-              </a:rPr>
-              <a:t>DSE</a:t>
-            </a:r>
-            <a:r>
-              <a:rPr sz="1900">
-                <a:solidFill>
-                  <a:srgbClr val="202122"/>
-                </a:solidFill>
-                <a:latin typeface="Calibri"/>
-              </a:rPr>
-              <a:t>  display screen equipment, such as monitors and laptops.</a:t>
-            </a:r>
-          </a:p>
-        </p:txBody>
-      </p:sp>
-      <p:sp>
-        <p:nvSpPr>
-          <p:cNvPr id="8" name="Rounded Rectangle 7"/>
+          <p:cNvPr id="8" name="Oval 7"/>
           <p:cNvSpPr/>
           <p:nvPr/>
         </p:nvSpPr>
         <p:spPr>
           <a:xfrm>
-            <a:off x="6210147" y="1600200"/>
-            <a:ext cx="5432907" cy="2171700"/>
-          </a:xfrm>
-          <a:prstGeom prst="roundRect">
-            <a:avLst>
-              <a:gd name="adj" fmla="val 8000"/>
-            </a:avLst>
+            <a:off x="8046720" y="1828800"/>
+            <a:ext cx="548640" cy="548640"/>
+          </a:xfrm>
+          <a:prstGeom prst="ellipse">
+            <a:avLst/>
           </a:prstGeom>
           <a:solidFill>
-            <a:srgbClr val="EAF3FF"/>
+            <a:srgbClr val="F2B705"/>
           </a:solidFill>
           <a:ln>
             <a:noFill/>
@@ -7162,9 +10461,20 @@
           </a:fontRef>
         </p:style>
         <p:txBody>
-          <a:bodyPr rtlCol="0" anchor="ctr"/>
-          <a:lstStyle/>
-          <a:p/>
+          <a:bodyPr rtlCol="0" anchor="ctr" lIns="0" rIns="0" tIns="0" bIns="0"/>
+          <a:lstStyle/>
+          <a:p>
+            <a:pPr algn="ctr"/>
+            <a:r>
+              <a:rPr sz="1300" b="1">
+                <a:solidFill>
+                  <a:srgbClr val="202122"/>
+                </a:solidFill>
+                <a:latin typeface="Calibri"/>
+              </a:rPr>
+              <a:t>e.g.</a:t>
+            </a:r>
+          </a:p>
         </p:txBody>
       </p:sp>
       <p:sp>
@@ -7175,8 +10485,8 @@
         </p:nvSpPr>
         <p:spPr>
           <a:xfrm>
-            <a:off x="6438747" y="1691640"/>
-            <a:ext cx="4975707" cy="1988819"/>
+            <a:off x="8046720" y="2560320"/>
+            <a:ext cx="3291840" cy="365760"/>
           </a:xfrm>
           <a:prstGeom prst="rect">
             <a:avLst/>
@@ -7184,85 +10494,32 @@
           <a:noFill/>
         </p:spPr>
         <p:txBody>
-          <a:bodyPr wrap="square" anchor="ctr" lIns="0" rIns="0" tIns="0" bIns="0"/>
+          <a:bodyPr wrap="square" anchor="t" lIns="0" rIns="0" tIns="0" bIns="0"/>
           <a:lstStyle/>
           <a:p>
             <a:pPr algn="l"/>
             <a:r>
-              <a:rPr sz="1900" b="1" i="0">
-                <a:solidFill>
-                  <a:srgbClr val="03306E"/>
-                </a:solidFill>
-                <a:latin typeface="Calibri"/>
-              </a:rPr>
-              <a:t>Risk assessment</a:t>
-            </a:r>
-            <a:r>
-              <a:rPr sz="1900">
-                <a:solidFill>
-                  <a:srgbClr val="202122"/>
-                </a:solidFill>
-                <a:latin typeface="Calibri"/>
-              </a:rPr>
-              <a:t>  identifying hazards and deciding how to control them.</a:t>
-            </a:r>
-          </a:p>
-        </p:txBody>
-      </p:sp>
-      <p:sp>
-        <p:nvSpPr>
-          <p:cNvPr id="10" name="Rounded Rectangle 9"/>
-          <p:cNvSpPr/>
-          <p:nvPr/>
-        </p:nvSpPr>
-        <p:spPr>
-          <a:xfrm>
-            <a:off x="548640" y="4000500"/>
-            <a:ext cx="5432907" cy="2171700"/>
-          </a:xfrm>
-          <a:prstGeom prst="roundRect">
-            <a:avLst>
-              <a:gd name="adj" fmla="val 8000"/>
-            </a:avLst>
-          </a:prstGeom>
-          <a:solidFill>
-            <a:srgbClr val="EAF3FF"/>
-          </a:solidFill>
-          <a:ln>
-            <a:noFill/>
-          </a:ln>
-          <a:effectLst/>
-        </p:spPr>
-        <p:style>
-          <a:lnRef idx="1">
-            <a:schemeClr val="accent1"/>
-          </a:lnRef>
-          <a:fillRef idx="3">
-            <a:schemeClr val="accent1"/>
-          </a:fillRef>
-          <a:effectRef idx="2">
-            <a:schemeClr val="accent1"/>
-          </a:effectRef>
-          <a:fontRef idx="minor">
-            <a:schemeClr val="lt1"/>
-          </a:fontRef>
-        </p:style>
-        <p:txBody>
-          <a:bodyPr rtlCol="0" anchor="ctr"/>
-          <a:lstStyle/>
-          <a:p/>
-        </p:txBody>
-      </p:sp>
-      <p:sp>
-        <p:nvSpPr>
-          <p:cNvPr id="11" name="TextBox 10"/>
+              <a:rPr sz="1300" b="1" i="0">
+                <a:solidFill>
+                  <a:srgbClr val="A9C8F0"/>
+                </a:solidFill>
+                <a:latin typeface="Calibri"/>
+              </a:rPr>
+              <a:t>EXAMPLE</a:t>
+            </a:r>
+          </a:p>
+        </p:txBody>
+      </p:sp>
+      <p:sp>
+        <p:nvSpPr>
+          <p:cNvPr id="10" name="TextBox 9"/>
           <p:cNvSpPr txBox="1"/>
           <p:nvPr/>
         </p:nvSpPr>
         <p:spPr>
           <a:xfrm>
-            <a:off x="777240" y="4091939"/>
-            <a:ext cx="4975707" cy="1988819"/>
+            <a:off x="8046720" y="2971800"/>
+            <a:ext cx="3291840" cy="2971800"/>
           </a:xfrm>
           <a:prstGeom prst="rect">
             <a:avLst/>
@@ -7270,113 +10527,18 @@
           <a:noFill/>
         </p:spPr>
         <p:txBody>
-          <a:bodyPr wrap="square" anchor="ctr" lIns="0" rIns="0" tIns="0" bIns="0"/>
+          <a:bodyPr wrap="square" anchor="t" lIns="0" rIns="0" tIns="0" bIns="0"/>
           <a:lstStyle/>
           <a:p>
             <a:pPr algn="l"/>
             <a:r>
-              <a:rPr sz="1900" b="1" i="0">
-                <a:solidFill>
-                  <a:srgbClr val="03306E"/>
-                </a:solidFill>
-                <a:latin typeface="Calibri"/>
-              </a:rPr>
-              <a:t>PPE</a:t>
-            </a:r>
-            <a:r>
-              <a:rPr sz="1900">
-                <a:solidFill>
-                  <a:srgbClr val="202122"/>
-                </a:solidFill>
-                <a:latin typeface="Calibri"/>
-              </a:rPr>
-              <a:t>  personal protective equipment, such as gloves or hard hats.</a:t>
-            </a:r>
-          </a:p>
-        </p:txBody>
-      </p:sp>
-      <p:sp>
-        <p:nvSpPr>
-          <p:cNvPr id="12" name="Rounded Rectangle 11"/>
-          <p:cNvSpPr/>
-          <p:nvPr/>
-        </p:nvSpPr>
-        <p:spPr>
-          <a:xfrm>
-            <a:off x="6210147" y="4000500"/>
-            <a:ext cx="5432907" cy="2171700"/>
-          </a:xfrm>
-          <a:prstGeom prst="roundRect">
-            <a:avLst>
-              <a:gd name="adj" fmla="val 8000"/>
-            </a:avLst>
-          </a:prstGeom>
-          <a:solidFill>
-            <a:srgbClr val="EAF3FF"/>
-          </a:solidFill>
-          <a:ln>
-            <a:noFill/>
-          </a:ln>
-          <a:effectLst/>
-        </p:spPr>
-        <p:style>
-          <a:lnRef idx="1">
-            <a:schemeClr val="accent1"/>
-          </a:lnRef>
-          <a:fillRef idx="3">
-            <a:schemeClr val="accent1"/>
-          </a:fillRef>
-          <a:effectRef idx="2">
-            <a:schemeClr val="accent1"/>
-          </a:effectRef>
-          <a:fontRef idx="minor">
-            <a:schemeClr val="lt1"/>
-          </a:fontRef>
-        </p:style>
-        <p:txBody>
-          <a:bodyPr rtlCol="0" anchor="ctr"/>
-          <a:lstStyle/>
-          <a:p/>
-        </p:txBody>
-      </p:sp>
-      <p:sp>
-        <p:nvSpPr>
-          <p:cNvPr id="13" name="TextBox 12"/>
-          <p:cNvSpPr txBox="1"/>
-          <p:nvPr/>
-        </p:nvSpPr>
-        <p:spPr>
-          <a:xfrm>
-            <a:off x="6438747" y="4091939"/>
-            <a:ext cx="4975707" cy="1988819"/>
-          </a:xfrm>
-          <a:prstGeom prst="rect">
-            <a:avLst/>
-          </a:prstGeom>
-          <a:noFill/>
-        </p:spPr>
-        <p:txBody>
-          <a:bodyPr wrap="square" anchor="ctr" lIns="0" rIns="0" tIns="0" bIns="0"/>
-          <a:lstStyle/>
-          <a:p>
-            <a:pPr algn="l"/>
-            <a:r>
-              <a:rPr sz="1900" b="1" i="0">
-                <a:solidFill>
-                  <a:srgbClr val="03306E"/>
-                </a:solidFill>
-                <a:latin typeface="Calibri"/>
-              </a:rPr>
-              <a:t>Competent person</a:t>
-            </a:r>
-            <a:r>
-              <a:rPr sz="1900">
-                <a:solidFill>
-                  <a:srgbClr val="202122"/>
-                </a:solidFill>
-                <a:latin typeface="Calibri"/>
-              </a:rPr>
-              <a:t>  someone with the training and experience to do the task safely.</a:t>
+              <a:rPr sz="1900" b="0" i="0">
+                <a:solidFill>
+                  <a:srgbClr val="FFFFFF"/>
+                </a:solidFill>
+                <a:latin typeface="Cambria"/>
+              </a:rPr>
+              <a:t>Fitting a wireless access point on a 3 m ceiling: use a podium step or tower rather than a chair, have a second person present, and keep tools tethered.</a:t>
             </a:r>
           </a:p>
         </p:txBody>
@@ -7468,7 +10630,7 @@
                 </a:solidFill>
                 <a:latin typeface="Cambria"/>
               </a:rPr>
-              <a:t>Check your understanding</a:t>
+              <a:t>Key regulations</a:t>
             </a:r>
           </a:p>
         </p:txBody>
@@ -7541,14 +10703,58 @@
       </p:sp>
       <p:sp>
         <p:nvSpPr>
-          <p:cNvPr id="6" name="Oval 5"/>
+          <p:cNvPr id="6" name="Rounded Rectangle 5"/>
           <p:cNvSpPr/>
           <p:nvPr/>
         </p:nvSpPr>
         <p:spPr>
           <a:xfrm>
-            <a:off x="548640" y="1618488"/>
-            <a:ext cx="411480" cy="411480"/>
+            <a:off x="548640" y="1600200"/>
+            <a:ext cx="3515258" cy="4572000"/>
+          </a:xfrm>
+          <a:prstGeom prst="roundRect">
+            <a:avLst>
+              <a:gd name="adj" fmla="val 6000"/>
+            </a:avLst>
+          </a:prstGeom>
+          <a:solidFill>
+            <a:srgbClr val="EAF3FF"/>
+          </a:solidFill>
+          <a:ln>
+            <a:noFill/>
+          </a:ln>
+          <a:effectLst/>
+        </p:spPr>
+        <p:style>
+          <a:lnRef idx="1">
+            <a:schemeClr val="accent1"/>
+          </a:lnRef>
+          <a:fillRef idx="3">
+            <a:schemeClr val="accent1"/>
+          </a:fillRef>
+          <a:effectRef idx="2">
+            <a:schemeClr val="accent1"/>
+          </a:effectRef>
+          <a:fontRef idx="minor">
+            <a:schemeClr val="lt1"/>
+          </a:fontRef>
+        </p:style>
+        <p:txBody>
+          <a:bodyPr rtlCol="0" anchor="ctr"/>
+          <a:lstStyle/>
+          <a:p/>
+        </p:txBody>
+      </p:sp>
+      <p:sp>
+        <p:nvSpPr>
+          <p:cNvPr id="7" name="Oval 6"/>
+          <p:cNvSpPr/>
+          <p:nvPr/>
+        </p:nvSpPr>
+        <p:spPr>
+          <a:xfrm>
+            <a:off x="777240" y="1828800"/>
+            <a:ext cx="457200" cy="457200"/>
           </a:xfrm>
           <a:prstGeom prst="ellipse">
             <a:avLst/>
@@ -7581,7 +10787,7 @@
           <a:p>
             <a:pPr algn="ctr"/>
             <a:r>
-              <a:rPr sz="1400" b="1">
+              <a:rPr sz="1500" b="1">
                 <a:solidFill>
                   <a:srgbClr val="202122"/>
                 </a:solidFill>
@@ -7594,14 +10800,14 @@
       </p:sp>
       <p:sp>
         <p:nvSpPr>
-          <p:cNvPr id="7" name="TextBox 6"/>
+          <p:cNvPr id="8" name="TextBox 7"/>
           <p:cNvSpPr txBox="1"/>
           <p:nvPr/>
         </p:nvSpPr>
         <p:spPr>
           <a:xfrm>
-            <a:off x="1234440" y="1600200"/>
-            <a:ext cx="10408615" cy="1030986"/>
+            <a:off x="1371600" y="1801368"/>
+            <a:ext cx="2509418" cy="512064"/>
           </a:xfrm>
           <a:prstGeom prst="rect">
             <a:avLst/>
@@ -7609,32 +10815,109 @@
           <a:noFill/>
         </p:spPr>
         <p:txBody>
+          <a:bodyPr wrap="square" anchor="ctr" lIns="0" rIns="0" tIns="0" bIns="0"/>
+          <a:lstStyle/>
+          <a:p>
+            <a:pPr algn="l"/>
+            <a:r>
+              <a:rPr sz="1900" b="1" i="0">
+                <a:solidFill>
+                  <a:srgbClr val="03306E"/>
+                </a:solidFill>
+                <a:latin typeface="Calibri"/>
+              </a:rPr>
+              <a:t>Manual handling</a:t>
+            </a:r>
+          </a:p>
+        </p:txBody>
+      </p:sp>
+      <p:sp>
+        <p:nvSpPr>
+          <p:cNvPr id="9" name="TextBox 8"/>
+          <p:cNvSpPr txBox="1"/>
+          <p:nvPr/>
+        </p:nvSpPr>
+        <p:spPr>
+          <a:xfrm>
+            <a:off x="777240" y="2468880"/>
+            <a:ext cx="3058058" cy="3566160"/>
+          </a:xfrm>
+          <a:prstGeom prst="rect">
+            <a:avLst/>
+          </a:prstGeom>
+          <a:noFill/>
+        </p:spPr>
+        <p:txBody>
           <a:bodyPr wrap="square" anchor="t" lIns="0" rIns="0" tIns="0" bIns="0"/>
           <a:lstStyle/>
           <a:p>
             <a:pPr algn="l"/>
             <a:r>
-              <a:rPr sz="2200" b="0" i="0">
+              <a:rPr sz="2000" b="0" i="0">
                 <a:solidFill>
                   <a:srgbClr val="202122"/>
                 </a:solidFill>
                 <a:latin typeface="Calibri"/>
               </a:rPr>
-              <a:t>Name two duties employers have under the Health and Safety at Work Act.</a:t>
-            </a:r>
-          </a:p>
-        </p:txBody>
-      </p:sp>
-      <p:sp>
-        <p:nvSpPr>
-          <p:cNvPr id="8" name="Oval 7"/>
+              <a:t>Avoid hazardous lifting where possible. Otherwise assess the risk, give information on the load and its centre of gravity, and reduce the risk of injury.</a:t>
+            </a:r>
+          </a:p>
+        </p:txBody>
+      </p:sp>
+      <p:sp>
+        <p:nvSpPr>
+          <p:cNvPr id="10" name="Rounded Rectangle 9"/>
           <p:cNvSpPr/>
           <p:nvPr/>
         </p:nvSpPr>
         <p:spPr>
           <a:xfrm>
-            <a:off x="548640" y="2814066"/>
-            <a:ext cx="411480" cy="411480"/>
+            <a:off x="4338218" y="1600200"/>
+            <a:ext cx="3515258" cy="4572000"/>
+          </a:xfrm>
+          <a:prstGeom prst="roundRect">
+            <a:avLst>
+              <a:gd name="adj" fmla="val 6000"/>
+            </a:avLst>
+          </a:prstGeom>
+          <a:solidFill>
+            <a:srgbClr val="EAF3FF"/>
+          </a:solidFill>
+          <a:ln>
+            <a:noFill/>
+          </a:ln>
+          <a:effectLst/>
+        </p:spPr>
+        <p:style>
+          <a:lnRef idx="1">
+            <a:schemeClr val="accent1"/>
+          </a:lnRef>
+          <a:fillRef idx="3">
+            <a:schemeClr val="accent1"/>
+          </a:fillRef>
+          <a:effectRef idx="2">
+            <a:schemeClr val="accent1"/>
+          </a:effectRef>
+          <a:fontRef idx="minor">
+            <a:schemeClr val="lt1"/>
+          </a:fontRef>
+        </p:style>
+        <p:txBody>
+          <a:bodyPr rtlCol="0" anchor="ctr"/>
+          <a:lstStyle/>
+          <a:p/>
+        </p:txBody>
+      </p:sp>
+      <p:sp>
+        <p:nvSpPr>
+          <p:cNvPr id="11" name="Oval 10"/>
+          <p:cNvSpPr/>
+          <p:nvPr/>
+        </p:nvSpPr>
+        <p:spPr>
+          <a:xfrm>
+            <a:off x="4566818" y="1828800"/>
+            <a:ext cx="457200" cy="457200"/>
           </a:xfrm>
           <a:prstGeom prst="ellipse">
             <a:avLst/>
@@ -7667,7 +10950,7 @@
           <a:p>
             <a:pPr algn="ctr"/>
             <a:r>
-              <a:rPr sz="1400" b="1">
+              <a:rPr sz="1500" b="1">
                 <a:solidFill>
                   <a:srgbClr val="202122"/>
                 </a:solidFill>
@@ -7680,14 +10963,14 @@
       </p:sp>
       <p:sp>
         <p:nvSpPr>
-          <p:cNvPr id="9" name="TextBox 8"/>
+          <p:cNvPr id="12" name="TextBox 11"/>
           <p:cNvSpPr txBox="1"/>
           <p:nvPr/>
         </p:nvSpPr>
         <p:spPr>
           <a:xfrm>
-            <a:off x="1234440" y="2795778"/>
-            <a:ext cx="10408615" cy="1030986"/>
+            <a:off x="5161178" y="1801368"/>
+            <a:ext cx="2509418" cy="512064"/>
           </a:xfrm>
           <a:prstGeom prst="rect">
             <a:avLst/>
@@ -7695,32 +10978,109 @@
           <a:noFill/>
         </p:spPr>
         <p:txBody>
+          <a:bodyPr wrap="square" anchor="ctr" lIns="0" rIns="0" tIns="0" bIns="0"/>
+          <a:lstStyle/>
+          <a:p>
+            <a:pPr algn="l"/>
+            <a:r>
+              <a:rPr sz="1900" b="1" i="0">
+                <a:solidFill>
+                  <a:srgbClr val="03306E"/>
+                </a:solidFill>
+                <a:latin typeface="Calibri"/>
+              </a:rPr>
+              <a:t>Work at height</a:t>
+            </a:r>
+          </a:p>
+        </p:txBody>
+      </p:sp>
+      <p:sp>
+        <p:nvSpPr>
+          <p:cNvPr id="13" name="TextBox 12"/>
+          <p:cNvSpPr txBox="1"/>
+          <p:nvPr/>
+        </p:nvSpPr>
+        <p:spPr>
+          <a:xfrm>
+            <a:off x="4566818" y="2468880"/>
+            <a:ext cx="3058058" cy="3566160"/>
+          </a:xfrm>
+          <a:prstGeom prst="rect">
+            <a:avLst/>
+          </a:prstGeom>
+          <a:noFill/>
+        </p:spPr>
+        <p:txBody>
           <a:bodyPr wrap="square" anchor="t" lIns="0" rIns="0" tIns="0" bIns="0"/>
           <a:lstStyle/>
           <a:p>
             <a:pPr algn="l"/>
             <a:r>
-              <a:rPr sz="2200" b="0" i="0">
+              <a:rPr sz="2000" b="0" i="0">
                 <a:solidFill>
                   <a:srgbClr val="202122"/>
                 </a:solidFill>
                 <a:latin typeface="Calibri"/>
               </a:rPr>
-              <a:t>What must an employer provide on request under the DSE regulations?</a:t>
-            </a:r>
-          </a:p>
-        </p:txBody>
-      </p:sp>
-      <p:sp>
-        <p:nvSpPr>
-          <p:cNvPr id="10" name="Oval 9"/>
+              <a:t>Plan and supervise the work, use competent people, do as much as possible from the ground, use suitable, stable equipment, protect against falling objects, plan for emergencies.</a:t>
+            </a:r>
+          </a:p>
+        </p:txBody>
+      </p:sp>
+      <p:sp>
+        <p:nvSpPr>
+          <p:cNvPr id="14" name="Rounded Rectangle 13"/>
           <p:cNvSpPr/>
           <p:nvPr/>
         </p:nvSpPr>
         <p:spPr>
           <a:xfrm>
-            <a:off x="548640" y="4009644"/>
-            <a:ext cx="411480" cy="411480"/>
+            <a:off x="8127796" y="1600200"/>
+            <a:ext cx="3515258" cy="4572000"/>
+          </a:xfrm>
+          <a:prstGeom prst="roundRect">
+            <a:avLst>
+              <a:gd name="adj" fmla="val 6000"/>
+            </a:avLst>
+          </a:prstGeom>
+          <a:solidFill>
+            <a:srgbClr val="EAF3FF"/>
+          </a:solidFill>
+          <a:ln>
+            <a:noFill/>
+          </a:ln>
+          <a:effectLst/>
+        </p:spPr>
+        <p:style>
+          <a:lnRef idx="1">
+            <a:schemeClr val="accent1"/>
+          </a:lnRef>
+          <a:fillRef idx="3">
+            <a:schemeClr val="accent1"/>
+          </a:fillRef>
+          <a:effectRef idx="2">
+            <a:schemeClr val="accent1"/>
+          </a:effectRef>
+          <a:fontRef idx="minor">
+            <a:schemeClr val="lt1"/>
+          </a:fontRef>
+        </p:style>
+        <p:txBody>
+          <a:bodyPr rtlCol="0" anchor="ctr"/>
+          <a:lstStyle/>
+          <a:p/>
+        </p:txBody>
+      </p:sp>
+      <p:sp>
+        <p:nvSpPr>
+          <p:cNvPr id="15" name="Oval 14"/>
+          <p:cNvSpPr/>
+          <p:nvPr/>
+        </p:nvSpPr>
+        <p:spPr>
+          <a:xfrm>
+            <a:off x="8356396" y="1828800"/>
+            <a:ext cx="457200" cy="457200"/>
           </a:xfrm>
           <a:prstGeom prst="ellipse">
             <a:avLst/>
@@ -7753,7 +11113,7 @@
           <a:p>
             <a:pPr algn="ctr"/>
             <a:r>
-              <a:rPr sz="1400" b="1">
+              <a:rPr sz="1500" b="1">
                 <a:solidFill>
                   <a:srgbClr val="202122"/>
                 </a:solidFill>
@@ -7766,14 +11126,14 @@
       </p:sp>
       <p:sp>
         <p:nvSpPr>
-          <p:cNvPr id="11" name="TextBox 10"/>
+          <p:cNvPr id="16" name="TextBox 15"/>
           <p:cNvSpPr txBox="1"/>
           <p:nvPr/>
         </p:nvSpPr>
         <p:spPr>
           <a:xfrm>
-            <a:off x="1234440" y="3991356"/>
-            <a:ext cx="10408615" cy="1030986"/>
+            <a:off x="8950756" y="1801368"/>
+            <a:ext cx="2509418" cy="512064"/>
           </a:xfrm>
           <a:prstGeom prst="rect">
             <a:avLst/>
@@ -7781,104 +11141,51 @@
           <a:noFill/>
         </p:spPr>
         <p:txBody>
+          <a:bodyPr wrap="square" anchor="ctr" lIns="0" rIns="0" tIns="0" bIns="0"/>
+          <a:lstStyle/>
+          <a:p>
+            <a:pPr algn="l"/>
+            <a:r>
+              <a:rPr sz="1600" b="1" i="0">
+                <a:solidFill>
+                  <a:srgbClr val="03306E"/>
+                </a:solidFill>
+                <a:latin typeface="Calibri"/>
+              </a:rPr>
+              <a:t>Display screen equipment</a:t>
+            </a:r>
+          </a:p>
+        </p:txBody>
+      </p:sp>
+      <p:sp>
+        <p:nvSpPr>
+          <p:cNvPr id="17" name="TextBox 16"/>
+          <p:cNvSpPr txBox="1"/>
+          <p:nvPr/>
+        </p:nvSpPr>
+        <p:spPr>
+          <a:xfrm>
+            <a:off x="8356396" y="2468880"/>
+            <a:ext cx="3058058" cy="3566160"/>
+          </a:xfrm>
+          <a:prstGeom prst="rect">
+            <a:avLst/>
+          </a:prstGeom>
+          <a:noFill/>
+        </p:spPr>
+        <p:txBody>
           <a:bodyPr wrap="square" anchor="t" lIns="0" rIns="0" tIns="0" bIns="0"/>
           <a:lstStyle/>
           <a:p>
             <a:pPr algn="l"/>
             <a:r>
-              <a:rPr sz="2200" b="0" i="0">
+              <a:rPr sz="2000" b="0" i="0">
                 <a:solidFill>
                   <a:srgbClr val="202122"/>
                 </a:solidFill>
                 <a:latin typeface="Calibri"/>
               </a:rPr>
-              <a:t>What is the first rule of the Work at Height Regulations?</a:t>
-            </a:r>
-          </a:p>
-        </p:txBody>
-      </p:sp>
-      <p:sp>
-        <p:nvSpPr>
-          <p:cNvPr id="12" name="Oval 11"/>
-          <p:cNvSpPr/>
-          <p:nvPr/>
-        </p:nvSpPr>
-        <p:spPr>
-          <a:xfrm>
-            <a:off x="548640" y="5205221"/>
-            <a:ext cx="411480" cy="411480"/>
-          </a:xfrm>
-          <a:prstGeom prst="ellipse">
-            <a:avLst/>
-          </a:prstGeom>
-          <a:solidFill>
-            <a:srgbClr val="F2B705"/>
-          </a:solidFill>
-          <a:ln>
-            <a:noFill/>
-          </a:ln>
-          <a:effectLst/>
-        </p:spPr>
-        <p:style>
-          <a:lnRef idx="1">
-            <a:schemeClr val="accent1"/>
-          </a:lnRef>
-          <a:fillRef idx="3">
-            <a:schemeClr val="accent1"/>
-          </a:fillRef>
-          <a:effectRef idx="2">
-            <a:schemeClr val="accent1"/>
-          </a:effectRef>
-          <a:fontRef idx="minor">
-            <a:schemeClr val="lt1"/>
-          </a:fontRef>
-        </p:style>
-        <p:txBody>
-          <a:bodyPr rtlCol="0" anchor="ctr" lIns="0" rIns="0" tIns="0" bIns="0"/>
-          <a:lstStyle/>
-          <a:p>
-            <a:pPr algn="ctr"/>
-            <a:r>
-              <a:rPr sz="1400" b="1">
-                <a:solidFill>
-                  <a:srgbClr val="202122"/>
-                </a:solidFill>
-                <a:latin typeface="Calibri"/>
-              </a:rPr>
-              <a:t>4</a:t>
-            </a:r>
-          </a:p>
-        </p:txBody>
-      </p:sp>
-      <p:sp>
-        <p:nvSpPr>
-          <p:cNvPr id="13" name="TextBox 12"/>
-          <p:cNvSpPr txBox="1"/>
-          <p:nvPr/>
-        </p:nvSpPr>
-        <p:spPr>
-          <a:xfrm>
-            <a:off x="1234440" y="5186933"/>
-            <a:ext cx="10408615" cy="1030986"/>
-          </a:xfrm>
-          <a:prstGeom prst="rect">
-            <a:avLst/>
-          </a:prstGeom>
-          <a:noFill/>
-        </p:spPr>
-        <p:txBody>
-          <a:bodyPr wrap="square" anchor="t" lIns="0" rIns="0" tIns="0" bIns="0"/>
-          <a:lstStyle/>
-          <a:p>
-            <a:pPr algn="l"/>
-            <a:r>
-              <a:rPr sz="2200" b="0" i="0">
-                <a:solidFill>
-                  <a:srgbClr val="202122"/>
-                </a:solidFill>
-                <a:latin typeface="Calibri"/>
-              </a:rPr>
-              <a:t>Give one mitigation for manual handling risks.</a:t>
+              <a:t>Assess workstations, reduce risks including regular breaks, provide eye tests on request, and give training and information.</a:t>
             </a:r>
           </a:p>
         </p:txBody>
@@ -7970,7 +11277,7 @@
                 </a:solidFill>
                 <a:latin typeface="Cambria"/>
               </a:rPr>
-              <a:t>Answers</a:t>
+              <a:t>Quick check: Key regulations</a:t>
             </a:r>
           </a:p>
         </p:txBody>
@@ -8049,8 +11356,8 @@
         </p:nvSpPr>
         <p:spPr>
           <a:xfrm>
-            <a:off x="548640" y="1618488"/>
-            <a:ext cx="411480" cy="411480"/>
+            <a:off x="548640" y="1691640"/>
+            <a:ext cx="502920" cy="502920"/>
           </a:xfrm>
           <a:prstGeom prst="ellipse">
             <a:avLst/>
@@ -8083,7 +11390,7 @@
           <a:p>
             <a:pPr algn="ctr"/>
             <a:r>
-              <a:rPr sz="1400" b="1">
+              <a:rPr sz="1600" b="1">
                 <a:solidFill>
                   <a:srgbClr val="202122"/>
                 </a:solidFill>
@@ -8102,8 +11409,8 @@
         </p:nvSpPr>
         <p:spPr>
           <a:xfrm>
-            <a:off x="1234440" y="1600200"/>
-            <a:ext cx="10408615" cy="1030986"/>
+            <a:off x="1371600" y="1645920"/>
+            <a:ext cx="10271455" cy="1188720"/>
           </a:xfrm>
           <a:prstGeom prst="rect">
             <a:avLst/>
@@ -8116,24 +11423,13 @@
           <a:p>
             <a:pPr algn="l"/>
             <a:r>
-              <a:rPr sz="1800" b="0" i="0">
-                <a:solidFill>
-                  <a:srgbClr val="54595D"/>
-                </a:solidFill>
-                <a:latin typeface="Calibri"/>
-              </a:rPr>
-              <a:t>Name two duties employers have under the Health and Safety at Work Act.</a:t>
-            </a:r>
-          </a:p>
-          <a:p>
-            <a:r>
-              <a:rPr sz="1800" b="1">
-                <a:solidFill>
-                  <a:srgbClr val="03306E"/>
-                </a:solidFill>
-                <a:latin typeface="Calibri"/>
-              </a:rPr>
-              <a:t>Any two of: safe environment, training, welfare provision, information, instruction and supervision.</a:t>
+              <a:rPr sz="2400" b="0" i="0">
+                <a:solidFill>
+                  <a:srgbClr val="202122"/>
+                </a:solidFill>
+                <a:latin typeface="Calibri"/>
+              </a:rPr>
+              <a:t>What is the first rule of the work at height regulations?</a:t>
             </a:r>
           </a:p>
         </p:txBody>
@@ -8146,8 +11442,8 @@
         </p:nvSpPr>
         <p:spPr>
           <a:xfrm>
-            <a:off x="548640" y="2814066"/>
-            <a:ext cx="411480" cy="411480"/>
+            <a:off x="548640" y="3108960"/>
+            <a:ext cx="502920" cy="502920"/>
           </a:xfrm>
           <a:prstGeom prst="ellipse">
             <a:avLst/>
@@ -8180,7 +11476,7 @@
           <a:p>
             <a:pPr algn="ctr"/>
             <a:r>
-              <a:rPr sz="1400" b="1">
+              <a:rPr sz="1600" b="1">
                 <a:solidFill>
                   <a:srgbClr val="202122"/>
                 </a:solidFill>
@@ -8199,8 +11495,8 @@
         </p:nvSpPr>
         <p:spPr>
           <a:xfrm>
-            <a:off x="1234440" y="2795778"/>
-            <a:ext cx="10408615" cy="1030986"/>
+            <a:off x="1371600" y="3063240"/>
+            <a:ext cx="10271455" cy="1188720"/>
           </a:xfrm>
           <a:prstGeom prst="rect">
             <a:avLst/>
@@ -8213,24 +11509,13 @@
           <a:p>
             <a:pPr algn="l"/>
             <a:r>
-              <a:rPr sz="1800" b="0" i="0">
-                <a:solidFill>
-                  <a:srgbClr val="54595D"/>
-                </a:solidFill>
-                <a:latin typeface="Calibri"/>
-              </a:rPr>
-              <a:t>What must an employer provide on request under the DSE regulations?</a:t>
-            </a:r>
-          </a:p>
-          <a:p>
-            <a:r>
-              <a:rPr sz="1800" b="1">
-                <a:solidFill>
-                  <a:srgbClr val="03306E"/>
-                </a:solidFill>
-                <a:latin typeface="Calibri"/>
-              </a:rPr>
-              <a:t>An eye test.</a:t>
+              <a:rPr sz="2400" b="0" i="0">
+                <a:solidFill>
+                  <a:srgbClr val="202122"/>
+                </a:solidFill>
+                <a:latin typeface="Calibri"/>
+              </a:rPr>
+              <a:t>What must employers provide DSE users on request?</a:t>
             </a:r>
           </a:p>
         </p:txBody>
@@ -8243,8 +11528,8 @@
         </p:nvSpPr>
         <p:spPr>
           <a:xfrm>
-            <a:off x="548640" y="4009644"/>
-            <a:ext cx="411480" cy="411480"/>
+            <a:off x="548640" y="4526280"/>
+            <a:ext cx="502920" cy="502920"/>
           </a:xfrm>
           <a:prstGeom prst="ellipse">
             <a:avLst/>
@@ -8277,7 +11562,7 @@
           <a:p>
             <a:pPr algn="ctr"/>
             <a:r>
-              <a:rPr sz="1400" b="1">
+              <a:rPr sz="1600" b="1">
                 <a:solidFill>
                   <a:srgbClr val="202122"/>
                 </a:solidFill>
@@ -8296,8 +11581,8 @@
         </p:nvSpPr>
         <p:spPr>
           <a:xfrm>
-            <a:off x="1234440" y="3991356"/>
-            <a:ext cx="10408615" cy="1030986"/>
+            <a:off x="1371600" y="4480560"/>
+            <a:ext cx="10271455" cy="1188720"/>
           </a:xfrm>
           <a:prstGeom prst="rect">
             <a:avLst/>
@@ -8310,121 +11595,46 @@
           <a:p>
             <a:pPr algn="l"/>
             <a:r>
-              <a:rPr sz="1800" b="0" i="0">
+              <a:rPr sz="2400" b="0" i="0">
+                <a:solidFill>
+                  <a:srgbClr val="202122"/>
+                </a:solidFill>
+                <a:latin typeface="Calibri"/>
+              </a:rPr>
+              <a:t>Give one way to reduce manual handling risk.</a:t>
+            </a:r>
+          </a:p>
+        </p:txBody>
+      </p:sp>
+      <p:sp>
+        <p:nvSpPr>
+          <p:cNvPr id="12" name="TextBox 11"/>
+          <p:cNvSpPr txBox="1"/>
+          <p:nvPr/>
+        </p:nvSpPr>
+        <p:spPr>
+          <a:xfrm>
+            <a:off x="548640" y="5852160"/>
+            <a:ext cx="11094415" cy="365760"/>
+          </a:xfrm>
+          <a:prstGeom prst="rect">
+            <a:avLst/>
+          </a:prstGeom>
+          <a:noFill/>
+        </p:spPr>
+        <p:txBody>
+          <a:bodyPr wrap="square" anchor="t" lIns="0" rIns="0" tIns="0" bIns="0"/>
+          <a:lstStyle/>
+          <a:p>
+            <a:pPr algn="l"/>
+            <a:r>
+              <a:rPr sz="1300" b="0" i="1">
                 <a:solidFill>
                   <a:srgbClr val="54595D"/>
                 </a:solidFill>
                 <a:latin typeface="Calibri"/>
               </a:rPr>
-              <a:t>What is the first rule of the Work at Height Regulations?</a:t>
-            </a:r>
-          </a:p>
-          <a:p>
-            <a:r>
-              <a:rPr sz="1800" b="1">
-                <a:solidFill>
-                  <a:srgbClr val="03306E"/>
-                </a:solidFill>
-                <a:latin typeface="Calibri"/>
-              </a:rPr>
-              <a:t>Avoid working at height where possible; do as much as possible from the ground.</a:t>
-            </a:r>
-          </a:p>
-        </p:txBody>
-      </p:sp>
-      <p:sp>
-        <p:nvSpPr>
-          <p:cNvPr id="12" name="Oval 11"/>
-          <p:cNvSpPr/>
-          <p:nvPr/>
-        </p:nvSpPr>
-        <p:spPr>
-          <a:xfrm>
-            <a:off x="548640" y="5205221"/>
-            <a:ext cx="411480" cy="411480"/>
-          </a:xfrm>
-          <a:prstGeom prst="ellipse">
-            <a:avLst/>
-          </a:prstGeom>
-          <a:solidFill>
-            <a:srgbClr val="F2B705"/>
-          </a:solidFill>
-          <a:ln>
-            <a:noFill/>
-          </a:ln>
-          <a:effectLst/>
-        </p:spPr>
-        <p:style>
-          <a:lnRef idx="1">
-            <a:schemeClr val="accent1"/>
-          </a:lnRef>
-          <a:fillRef idx="3">
-            <a:schemeClr val="accent1"/>
-          </a:fillRef>
-          <a:effectRef idx="2">
-            <a:schemeClr val="accent1"/>
-          </a:effectRef>
-          <a:fontRef idx="minor">
-            <a:schemeClr val="lt1"/>
-          </a:fontRef>
-        </p:style>
-        <p:txBody>
-          <a:bodyPr rtlCol="0" anchor="ctr" lIns="0" rIns="0" tIns="0" bIns="0"/>
-          <a:lstStyle/>
-          <a:p>
-            <a:pPr algn="ctr"/>
-            <a:r>
-              <a:rPr sz="1400" b="1">
-                <a:solidFill>
-                  <a:srgbClr val="202122"/>
-                </a:solidFill>
-                <a:latin typeface="Calibri"/>
-              </a:rPr>
-              <a:t>4</a:t>
-            </a:r>
-          </a:p>
-        </p:txBody>
-      </p:sp>
-      <p:sp>
-        <p:nvSpPr>
-          <p:cNvPr id="13" name="TextBox 12"/>
-          <p:cNvSpPr txBox="1"/>
-          <p:nvPr/>
-        </p:nvSpPr>
-        <p:spPr>
-          <a:xfrm>
-            <a:off x="1234440" y="5186933"/>
-            <a:ext cx="10408615" cy="1030986"/>
-          </a:xfrm>
-          <a:prstGeom prst="rect">
-            <a:avLst/>
-          </a:prstGeom>
-          <a:noFill/>
-        </p:spPr>
-        <p:txBody>
-          <a:bodyPr wrap="square" anchor="t" lIns="0" rIns="0" tIns="0" bIns="0"/>
-          <a:lstStyle/>
-          <a:p>
-            <a:pPr algn="l"/>
-            <a:r>
-              <a:rPr sz="1800" b="0" i="0">
-                <a:solidFill>
-                  <a:srgbClr val="54595D"/>
-                </a:solidFill>
-                <a:latin typeface="Calibri"/>
-              </a:rPr>
-              <a:t>Give one mitigation for manual handling risks.</a:t>
-            </a:r>
-          </a:p>
-          <a:p>
-            <a:r>
-              <a:rPr sz="1800" b="1">
-                <a:solidFill>
-                  <a:srgbClr val="03306E"/>
-                </a:solidFill>
-                <a:latin typeface="Calibri"/>
-              </a:rPr>
-              <a:t>Trolleys, team lifts or manual handling training.</a:t>
+              <a:t>Answer on mini whiteboards or in your book. Answers are in the speaker notes.</a:t>
             </a:r>
           </a:p>
         </p:txBody>
@@ -8516,7 +11726,7 @@
                 </a:solidFill>
                 <a:latin typeface="Cambria"/>
               </a:rPr>
-              <a:t>Activity: Risk assess a server room move</a:t>
+              <a:t>Risks in digital work and how to reduce them</a:t>
             </a:r>
           </a:p>
         </p:txBody>
@@ -8589,19 +11799,164 @@
       </p:sp>
       <p:sp>
         <p:nvSpPr>
-          <p:cNvPr id="6" name="Rounded Rectangle 5"/>
+          <p:cNvPr id="6" name="TextBox 5"/>
+          <p:cNvSpPr txBox="1"/>
+          <p:nvPr/>
+        </p:nvSpPr>
+        <p:spPr>
+          <a:xfrm>
+            <a:off x="548640" y="1554480"/>
+            <a:ext cx="6720840" cy="4617720"/>
+          </a:xfrm>
+          <a:prstGeom prst="rect">
+            <a:avLst/>
+          </a:prstGeom>
+          <a:noFill/>
+        </p:spPr>
+        <p:txBody>
+          <a:bodyPr wrap="square" lIns="0" rIns="0" tIns="0" bIns="0">
+            <a:spAutoFit/>
+          </a:bodyPr>
+          <a:lstStyle/>
+          <a:p>
+            <a:pPr>
+              <a:spcAft>
+                <a:spcPts val="1200"/>
+              </a:spcAft>
+            </a:pPr>
+            <a:r>
+              <a:rPr sz="2000" b="0">
+                <a:solidFill>
+                  <a:srgbClr val="202122"/>
+                </a:solidFill>
+                <a:latin typeface="Calibri"/>
+              </a:rPr>
+              <a:t>IT work has real physical risks.</a:t>
+            </a:r>
+          </a:p>
+          <a:p>
+            <a:pPr>
+              <a:spcAft>
+                <a:spcPts val="1200"/>
+              </a:spcAft>
+            </a:pPr>
+            <a:r>
+              <a:rPr sz="2000" b="0">
+                <a:solidFill>
+                  <a:srgbClr val="202122"/>
+                </a:solidFill>
+                <a:latin typeface="Calibri"/>
+              </a:rPr>
+              <a:t>Long hours at a screen cause eye strain and back, neck and wrist pain. Workstation assessments, adjustable chairs, correct screen height and regular breaks reduce this.</a:t>
+            </a:r>
+          </a:p>
+          <a:p>
+            <a:pPr>
+              <a:spcAft>
+                <a:spcPts val="1200"/>
+              </a:spcAft>
+            </a:pPr>
+            <a:r>
+              <a:rPr sz="2000" b="0">
+                <a:solidFill>
+                  <a:srgbClr val="202122"/>
+                </a:solidFill>
+                <a:latin typeface="Calibri"/>
+              </a:rPr>
+              <a:t>Cable installation risks trips, cuts from cable ties and trunking, and electric shock. Keep cables tidy, wear gloves and isolate power first.</a:t>
+            </a:r>
+          </a:p>
+          <a:p>
+            <a:pPr>
+              <a:spcAft>
+                <a:spcPts val="1200"/>
+              </a:spcAft>
+            </a:pPr>
+            <a:r>
+              <a:rPr sz="2000" b="0">
+                <a:solidFill>
+                  <a:srgbClr val="202122"/>
+                </a:solidFill>
+                <a:latin typeface="Calibri"/>
+              </a:rPr>
+              <a:t>Lifting servers and boxes of equipment risks back injury. Use trolleys and team lifts.</a:t>
+            </a:r>
+          </a:p>
+          <a:p>
+            <a:pPr>
+              <a:spcAft>
+                <a:spcPts val="1200"/>
+              </a:spcAft>
+            </a:pPr>
+            <a:r>
+              <a:rPr sz="2000" b="0">
+                <a:solidFill>
+                  <a:srgbClr val="202122"/>
+                </a:solidFill>
+                <a:latin typeface="Calibri"/>
+              </a:rPr>
+              <a:t>The four main mitigations are training, a safe environment and practices, safety equipment and supervision.</a:t>
+            </a:r>
+          </a:p>
+        </p:txBody>
+      </p:sp>
+      <p:sp>
+        <p:nvSpPr>
+          <p:cNvPr id="7" name="Rounded Rectangle 6"/>
           <p:cNvSpPr/>
           <p:nvPr/>
         </p:nvSpPr>
         <p:spPr>
           <a:xfrm>
-            <a:off x="548640" y="1508760"/>
-            <a:ext cx="2011680" cy="457200"/>
+            <a:off x="7772400" y="1554480"/>
+            <a:ext cx="3867912" cy="4526280"/>
           </a:xfrm>
           <a:prstGeom prst="roundRect">
             <a:avLst>
-              <a:gd name="adj" fmla="val 50000"/>
+              <a:gd name="adj" fmla="val 8000"/>
             </a:avLst>
+          </a:prstGeom>
+          <a:solidFill>
+            <a:srgbClr val="03306E"/>
+          </a:solidFill>
+          <a:ln>
+            <a:noFill/>
+          </a:ln>
+          <a:effectLst/>
+        </p:spPr>
+        <p:style>
+          <a:lnRef idx="1">
+            <a:schemeClr val="accent1"/>
+          </a:lnRef>
+          <a:fillRef idx="3">
+            <a:schemeClr val="accent1"/>
+          </a:fillRef>
+          <a:effectRef idx="2">
+            <a:schemeClr val="accent1"/>
+          </a:effectRef>
+          <a:fontRef idx="minor">
+            <a:schemeClr val="lt1"/>
+          </a:fontRef>
+        </p:style>
+        <p:txBody>
+          <a:bodyPr rtlCol="0" anchor="ctr"/>
+          <a:lstStyle/>
+          <a:p/>
+        </p:txBody>
+      </p:sp>
+      <p:sp>
+        <p:nvSpPr>
+          <p:cNvPr id="8" name="Oval 7"/>
+          <p:cNvSpPr/>
+          <p:nvPr/>
+        </p:nvSpPr>
+        <p:spPr>
+          <a:xfrm>
+            <a:off x="8046720" y="1828800"/>
+            <a:ext cx="548640" cy="548640"/>
+          </a:xfrm>
+          <a:prstGeom prst="ellipse">
+            <a:avLst/>
           </a:prstGeom>
           <a:solidFill>
             <a:srgbClr val="F2B705"/>
@@ -8626,21 +11981,32 @@
           </a:fontRef>
         </p:style>
         <p:txBody>
-          <a:bodyPr rtlCol="0" anchor="ctr"/>
-          <a:lstStyle/>
-          <a:p/>
-        </p:txBody>
-      </p:sp>
-      <p:sp>
-        <p:nvSpPr>
-          <p:cNvPr id="7" name="TextBox 6"/>
+          <a:bodyPr rtlCol="0" anchor="ctr" lIns="0" rIns="0" tIns="0" bIns="0"/>
+          <a:lstStyle/>
+          <a:p>
+            <a:pPr algn="ctr"/>
+            <a:r>
+              <a:rPr sz="1300" b="1">
+                <a:solidFill>
+                  <a:srgbClr val="202122"/>
+                </a:solidFill>
+                <a:latin typeface="Calibri"/>
+              </a:rPr>
+              <a:t>e.g.</a:t>
+            </a:r>
+          </a:p>
+        </p:txBody>
+      </p:sp>
+      <p:sp>
+        <p:nvSpPr>
+          <p:cNvPr id="9" name="TextBox 8"/>
           <p:cNvSpPr txBox="1"/>
           <p:nvPr/>
         </p:nvSpPr>
         <p:spPr>
           <a:xfrm>
-            <a:off x="548640" y="1508760"/>
-            <a:ext cx="2011680" cy="457200"/>
+            <a:off x="8046720" y="2560320"/>
+            <a:ext cx="3291840" cy="365760"/>
           </a:xfrm>
           <a:prstGeom prst="rect">
             <a:avLst/>
@@ -8648,104 +12014,18 @@
           <a:noFill/>
         </p:spPr>
         <p:txBody>
-          <a:bodyPr wrap="square" anchor="ctr" lIns="0" rIns="0" tIns="0" bIns="0"/>
-          <a:lstStyle/>
-          <a:p>
-            <a:pPr algn="ctr"/>
-            <a:r>
-              <a:rPr sz="1400" b="1" i="0">
-                <a:solidFill>
-                  <a:srgbClr val="202122"/>
-                </a:solidFill>
-                <a:latin typeface="Calibri"/>
-              </a:rPr>
-              <a:t>20 minutes</a:t>
-            </a:r>
-          </a:p>
-        </p:txBody>
-      </p:sp>
-      <p:sp>
-        <p:nvSpPr>
-          <p:cNvPr id="8" name="TextBox 7"/>
-          <p:cNvSpPr txBox="1"/>
-          <p:nvPr/>
-        </p:nvSpPr>
-        <p:spPr>
-          <a:xfrm>
-            <a:off x="2743200" y="1508760"/>
-            <a:ext cx="4754880" cy="457200"/>
-          </a:xfrm>
-          <a:prstGeom prst="rect">
-            <a:avLst/>
-          </a:prstGeom>
-          <a:noFill/>
-        </p:spPr>
-        <p:txBody>
-          <a:bodyPr wrap="square" anchor="ctr" lIns="0" rIns="0" tIns="0" bIns="0"/>
+          <a:bodyPr wrap="square" anchor="t" lIns="0" rIns="0" tIns="0" bIns="0"/>
           <a:lstStyle/>
           <a:p>
             <a:pPr algn="l"/>
             <a:r>
-              <a:rPr sz="1400" b="0" i="1">
-                <a:solidFill>
-                  <a:srgbClr val="54595D"/>
-                </a:solidFill>
-                <a:latin typeface="Calibri"/>
-              </a:rPr>
-              <a:t>Small groups</a:t>
-            </a:r>
-          </a:p>
-        </p:txBody>
-      </p:sp>
-      <p:sp>
-        <p:nvSpPr>
-          <p:cNvPr id="9" name="Oval 8"/>
-          <p:cNvSpPr/>
-          <p:nvPr/>
-        </p:nvSpPr>
-        <p:spPr>
-          <a:xfrm>
-            <a:off x="548640" y="2482596"/>
-            <a:ext cx="384048" cy="384048"/>
-          </a:xfrm>
-          <a:prstGeom prst="ellipse">
-            <a:avLst/>
-          </a:prstGeom>
-          <a:solidFill>
-            <a:srgbClr val="0645AD"/>
-          </a:solidFill>
-          <a:ln>
-            <a:noFill/>
-          </a:ln>
-          <a:effectLst/>
-        </p:spPr>
-        <p:style>
-          <a:lnRef idx="1">
-            <a:schemeClr val="accent1"/>
-          </a:lnRef>
-          <a:fillRef idx="3">
-            <a:schemeClr val="accent1"/>
-          </a:fillRef>
-          <a:effectRef idx="2">
-            <a:schemeClr val="accent1"/>
-          </a:effectRef>
-          <a:fontRef idx="minor">
-            <a:schemeClr val="lt1"/>
-          </a:fontRef>
-        </p:style>
-        <p:txBody>
-          <a:bodyPr rtlCol="0" anchor="ctr" lIns="0" rIns="0" tIns="0" bIns="0"/>
-          <a:lstStyle/>
-          <a:p>
-            <a:pPr algn="ctr"/>
-            <a:r>
-              <a:rPr sz="1300" b="1">
-                <a:solidFill>
-                  <a:srgbClr val="FFFFFF"/>
-                </a:solidFill>
-                <a:latin typeface="Calibri"/>
-              </a:rPr>
-              <a:t>1</a:t>
+              <a:rPr sz="1300" b="1" i="0">
+                <a:solidFill>
+                  <a:srgbClr val="A9C8F0"/>
+                </a:solidFill>
+                <a:latin typeface="Calibri"/>
+              </a:rPr>
+              <a:t>EXAMPLE</a:t>
             </a:r>
           </a:p>
         </p:txBody>
@@ -8758,8 +12038,8 @@
         </p:nvSpPr>
         <p:spPr>
           <a:xfrm>
-            <a:off x="1143000" y="2240280"/>
-            <a:ext cx="5943600" cy="868680"/>
+            <a:off x="8046720" y="2971800"/>
+            <a:ext cx="3291840" cy="2971800"/>
           </a:xfrm>
           <a:prstGeom prst="rect">
             <a:avLst/>
@@ -8767,439 +12047,18 @@
           <a:noFill/>
         </p:spPr>
         <p:txBody>
-          <a:bodyPr wrap="square" anchor="ctr" lIns="0" rIns="0" tIns="0" bIns="0"/>
+          <a:bodyPr wrap="square" anchor="t" lIns="0" rIns="0" tIns="0" bIns="0"/>
           <a:lstStyle/>
           <a:p>
             <a:pPr algn="l"/>
             <a:r>
-              <a:rPr sz="1700" b="0" i="0">
-                <a:solidFill>
-                  <a:srgbClr val="202122"/>
-                </a:solidFill>
-                <a:latin typeface="Calibri"/>
-              </a:rPr>
-              <a:t>Your team is moving three rack servers and re-cabling a comms cabinet on a mezzanine floor.</a:t>
-            </a:r>
-          </a:p>
-        </p:txBody>
-      </p:sp>
-      <p:sp>
-        <p:nvSpPr>
-          <p:cNvPr id="11" name="Oval 10"/>
-          <p:cNvSpPr/>
-          <p:nvPr/>
-        </p:nvSpPr>
-        <p:spPr>
-          <a:xfrm>
-            <a:off x="548640" y="3461004"/>
-            <a:ext cx="384048" cy="384048"/>
-          </a:xfrm>
-          <a:prstGeom prst="ellipse">
-            <a:avLst/>
-          </a:prstGeom>
-          <a:solidFill>
-            <a:srgbClr val="0645AD"/>
-          </a:solidFill>
-          <a:ln>
-            <a:noFill/>
-          </a:ln>
-          <a:effectLst/>
-        </p:spPr>
-        <p:style>
-          <a:lnRef idx="1">
-            <a:schemeClr val="accent1"/>
-          </a:lnRef>
-          <a:fillRef idx="3">
-            <a:schemeClr val="accent1"/>
-          </a:fillRef>
-          <a:effectRef idx="2">
-            <a:schemeClr val="accent1"/>
-          </a:effectRef>
-          <a:fontRef idx="minor">
-            <a:schemeClr val="lt1"/>
-          </a:fontRef>
-        </p:style>
-        <p:txBody>
-          <a:bodyPr rtlCol="0" anchor="ctr" lIns="0" rIns="0" tIns="0" bIns="0"/>
-          <a:lstStyle/>
-          <a:p>
-            <a:pPr algn="ctr"/>
-            <a:r>
-              <a:rPr sz="1300" b="1">
+              <a:rPr sz="1900" b="0" i="0">
                 <a:solidFill>
                   <a:srgbClr val="FFFFFF"/>
                 </a:solidFill>
-                <a:latin typeface="Calibri"/>
-              </a:rPr>
-              <a:t>2</a:t>
-            </a:r>
-          </a:p>
-        </p:txBody>
-      </p:sp>
-      <p:sp>
-        <p:nvSpPr>
-          <p:cNvPr id="12" name="TextBox 11"/>
-          <p:cNvSpPr txBox="1"/>
-          <p:nvPr/>
-        </p:nvSpPr>
-        <p:spPr>
-          <a:xfrm>
-            <a:off x="1143000" y="3218688"/>
-            <a:ext cx="5943600" cy="868680"/>
-          </a:xfrm>
-          <a:prstGeom prst="rect">
-            <a:avLst/>
-          </a:prstGeom>
-          <a:noFill/>
-        </p:spPr>
-        <p:txBody>
-          <a:bodyPr wrap="square" anchor="ctr" lIns="0" rIns="0" tIns="0" bIns="0"/>
-          <a:lstStyle/>
-          <a:p>
-            <a:pPr algn="l"/>
-            <a:r>
-              <a:rPr sz="1700" b="0" i="0">
-                <a:solidFill>
-                  <a:srgbClr val="202122"/>
-                </a:solidFill>
-                <a:latin typeface="Calibri"/>
-              </a:rPr>
-              <a:t>Identify at least five hazards.</a:t>
-            </a:r>
-          </a:p>
-        </p:txBody>
-      </p:sp>
-      <p:sp>
-        <p:nvSpPr>
-          <p:cNvPr id="13" name="Oval 12"/>
-          <p:cNvSpPr/>
-          <p:nvPr/>
-        </p:nvSpPr>
-        <p:spPr>
-          <a:xfrm>
-            <a:off x="548640" y="4439412"/>
-            <a:ext cx="384048" cy="384048"/>
-          </a:xfrm>
-          <a:prstGeom prst="ellipse">
-            <a:avLst/>
-          </a:prstGeom>
-          <a:solidFill>
-            <a:srgbClr val="0645AD"/>
-          </a:solidFill>
-          <a:ln>
-            <a:noFill/>
-          </a:ln>
-          <a:effectLst/>
-        </p:spPr>
-        <p:style>
-          <a:lnRef idx="1">
-            <a:schemeClr val="accent1"/>
-          </a:lnRef>
-          <a:fillRef idx="3">
-            <a:schemeClr val="accent1"/>
-          </a:fillRef>
-          <a:effectRef idx="2">
-            <a:schemeClr val="accent1"/>
-          </a:effectRef>
-          <a:fontRef idx="minor">
-            <a:schemeClr val="lt1"/>
-          </a:fontRef>
-        </p:style>
-        <p:txBody>
-          <a:bodyPr rtlCol="0" anchor="ctr" lIns="0" rIns="0" tIns="0" bIns="0"/>
-          <a:lstStyle/>
-          <a:p>
-            <a:pPr algn="ctr"/>
-            <a:r>
-              <a:rPr sz="1300" b="1">
-                <a:solidFill>
-                  <a:srgbClr val="FFFFFF"/>
-                </a:solidFill>
-                <a:latin typeface="Calibri"/>
-              </a:rPr>
-              <a:t>3</a:t>
-            </a:r>
-          </a:p>
-        </p:txBody>
-      </p:sp>
-      <p:sp>
-        <p:nvSpPr>
-          <p:cNvPr id="14" name="TextBox 13"/>
-          <p:cNvSpPr txBox="1"/>
-          <p:nvPr/>
-        </p:nvSpPr>
-        <p:spPr>
-          <a:xfrm>
-            <a:off x="1143000" y="4197096"/>
-            <a:ext cx="5943600" cy="868680"/>
-          </a:xfrm>
-          <a:prstGeom prst="rect">
-            <a:avLst/>
-          </a:prstGeom>
-          <a:noFill/>
-        </p:spPr>
-        <p:txBody>
-          <a:bodyPr wrap="square" anchor="ctr" lIns="0" rIns="0" tIns="0" bIns="0"/>
-          <a:lstStyle/>
-          <a:p>
-            <a:pPr algn="l"/>
-            <a:r>
-              <a:rPr sz="1700" b="0" i="0">
-                <a:solidFill>
-                  <a:srgbClr val="202122"/>
-                </a:solidFill>
-                <a:latin typeface="Calibri"/>
-              </a:rPr>
-              <a:t>Link each one to the law or regulation that applies.</a:t>
-            </a:r>
-          </a:p>
-        </p:txBody>
-      </p:sp>
-      <p:sp>
-        <p:nvSpPr>
-          <p:cNvPr id="15" name="Oval 14"/>
-          <p:cNvSpPr/>
-          <p:nvPr/>
-        </p:nvSpPr>
-        <p:spPr>
-          <a:xfrm>
-            <a:off x="548640" y="5417820"/>
-            <a:ext cx="384048" cy="384048"/>
-          </a:xfrm>
-          <a:prstGeom prst="ellipse">
-            <a:avLst/>
-          </a:prstGeom>
-          <a:solidFill>
-            <a:srgbClr val="0645AD"/>
-          </a:solidFill>
-          <a:ln>
-            <a:noFill/>
-          </a:ln>
-          <a:effectLst/>
-        </p:spPr>
-        <p:style>
-          <a:lnRef idx="1">
-            <a:schemeClr val="accent1"/>
-          </a:lnRef>
-          <a:fillRef idx="3">
-            <a:schemeClr val="accent1"/>
-          </a:fillRef>
-          <a:effectRef idx="2">
-            <a:schemeClr val="accent1"/>
-          </a:effectRef>
-          <a:fontRef idx="minor">
-            <a:schemeClr val="lt1"/>
-          </a:fontRef>
-        </p:style>
-        <p:txBody>
-          <a:bodyPr rtlCol="0" anchor="ctr" lIns="0" rIns="0" tIns="0" bIns="0"/>
-          <a:lstStyle/>
-          <a:p>
-            <a:pPr algn="ctr"/>
-            <a:r>
-              <a:rPr sz="1300" b="1">
-                <a:solidFill>
-                  <a:srgbClr val="FFFFFF"/>
-                </a:solidFill>
-                <a:latin typeface="Calibri"/>
-              </a:rPr>
-              <a:t>4</a:t>
-            </a:r>
-          </a:p>
-        </p:txBody>
-      </p:sp>
-      <p:sp>
-        <p:nvSpPr>
-          <p:cNvPr id="16" name="TextBox 15"/>
-          <p:cNvSpPr txBox="1"/>
-          <p:nvPr/>
-        </p:nvSpPr>
-        <p:spPr>
-          <a:xfrm>
-            <a:off x="1143000" y="5175504"/>
-            <a:ext cx="5943600" cy="868680"/>
-          </a:xfrm>
-          <a:prstGeom prst="rect">
-            <a:avLst/>
-          </a:prstGeom>
-          <a:noFill/>
-        </p:spPr>
-        <p:txBody>
-          <a:bodyPr wrap="square" anchor="ctr" lIns="0" rIns="0" tIns="0" bIns="0"/>
-          <a:lstStyle/>
-          <a:p>
-            <a:pPr algn="l"/>
-            <a:r>
-              <a:rPr sz="1700" b="0" i="0">
-                <a:solidFill>
-                  <a:srgbClr val="202122"/>
-                </a:solidFill>
-                <a:latin typeface="Calibri"/>
-              </a:rPr>
-              <a:t>Suggest a mitigation for each.</a:t>
-            </a:r>
-          </a:p>
-        </p:txBody>
-      </p:sp>
-      <p:sp>
-        <p:nvSpPr>
-          <p:cNvPr id="17" name="Rounded Rectangle 16"/>
-          <p:cNvSpPr/>
-          <p:nvPr/>
-        </p:nvSpPr>
-        <p:spPr>
-          <a:xfrm>
-            <a:off x="7772400" y="1508760"/>
-            <a:ext cx="3867912" cy="4572000"/>
-          </a:xfrm>
-          <a:prstGeom prst="roundRect">
-            <a:avLst>
-              <a:gd name="adj" fmla="val 8000"/>
-            </a:avLst>
-          </a:prstGeom>
-          <a:solidFill>
-            <a:srgbClr val="EAF3FF"/>
-          </a:solidFill>
-          <a:ln>
-            <a:noFill/>
-          </a:ln>
-          <a:effectLst/>
-        </p:spPr>
-        <p:style>
-          <a:lnRef idx="1">
-            <a:schemeClr val="accent1"/>
-          </a:lnRef>
-          <a:fillRef idx="3">
-            <a:schemeClr val="accent1"/>
-          </a:fillRef>
-          <a:effectRef idx="2">
-            <a:schemeClr val="accent1"/>
-          </a:effectRef>
-          <a:fontRef idx="minor">
-            <a:schemeClr val="lt1"/>
-          </a:fontRef>
-        </p:style>
-        <p:txBody>
-          <a:bodyPr rtlCol="0" anchor="ctr"/>
-          <a:lstStyle/>
-          <a:p/>
-        </p:txBody>
-      </p:sp>
-      <p:sp>
-        <p:nvSpPr>
-          <p:cNvPr id="18" name="TextBox 17"/>
-          <p:cNvSpPr txBox="1"/>
-          <p:nvPr/>
-        </p:nvSpPr>
-        <p:spPr>
-          <a:xfrm>
-            <a:off x="8046720" y="1737360"/>
-            <a:ext cx="3291840" cy="365760"/>
-          </a:xfrm>
-          <a:prstGeom prst="rect">
-            <a:avLst/>
-          </a:prstGeom>
-          <a:noFill/>
-        </p:spPr>
-        <p:txBody>
-          <a:bodyPr wrap="square" anchor="t" lIns="0" rIns="0" tIns="0" bIns="0"/>
-          <a:lstStyle/>
-          <a:p>
-            <a:pPr algn="l"/>
-            <a:r>
-              <a:rPr sz="1300" b="1" i="0">
-                <a:solidFill>
-                  <a:srgbClr val="0645AD"/>
-                </a:solidFill>
-                <a:latin typeface="Calibri"/>
-              </a:rPr>
-              <a:t>SUCCESS CRITERIA</a:t>
-            </a:r>
-          </a:p>
-        </p:txBody>
-      </p:sp>
-      <p:sp>
-        <p:nvSpPr>
-          <p:cNvPr id="19" name="TextBox 18"/>
-          <p:cNvSpPr txBox="1"/>
-          <p:nvPr/>
-        </p:nvSpPr>
-        <p:spPr>
-          <a:xfrm>
-            <a:off x="8046720" y="2240280"/>
-            <a:ext cx="3337560" cy="3657600"/>
-          </a:xfrm>
-          <a:prstGeom prst="rect">
-            <a:avLst/>
-          </a:prstGeom>
-          <a:noFill/>
-        </p:spPr>
-        <p:txBody>
-          <a:bodyPr wrap="square" lIns="0" rIns="0" tIns="0" bIns="0">
-            <a:spAutoFit/>
-          </a:bodyPr>
-          <a:lstStyle/>
-          <a:p>
-            <a:pPr marL="274320" indent="-274320">
-              <a:spcAft>
-                <a:spcPts val="810"/>
-              </a:spcAft>
-              <a:buClr>
-                <a:srgbClr val="0645AD"/>
-              </a:buClr>
-              <a:buFont typeface="Arial"/>
-              <a:buChar char="•"/>
-            </a:pPr>
-            <a:r>
-              <a:rPr sz="1800" b="0">
-                <a:solidFill>
-                  <a:srgbClr val="202122"/>
-                </a:solidFill>
-                <a:latin typeface="Calibri"/>
-              </a:rPr>
-              <a:t>Covers lifting, height and electrical hazards</a:t>
-            </a:r>
-          </a:p>
-          <a:p>
-            <a:pPr marL="274320" indent="-274320">
-              <a:spcAft>
-                <a:spcPts val="810"/>
-              </a:spcAft>
-              <a:buClr>
-                <a:srgbClr val="0645AD"/>
-              </a:buClr>
-              <a:buFont typeface="Arial"/>
-              <a:buChar char="•"/>
-            </a:pPr>
-            <a:r>
-              <a:rPr sz="1800" b="0">
-                <a:solidFill>
-                  <a:srgbClr val="202122"/>
-                </a:solidFill>
-                <a:latin typeface="Calibri"/>
-              </a:rPr>
-              <a:t>Correct regulation named for each</a:t>
-            </a:r>
-          </a:p>
-          <a:p>
-            <a:pPr marL="274320" indent="-274320">
-              <a:spcAft>
-                <a:spcPts val="810"/>
-              </a:spcAft>
-              <a:buClr>
-                <a:srgbClr val="0645AD"/>
-              </a:buClr>
-              <a:buFont typeface="Arial"/>
-              <a:buChar char="•"/>
-            </a:pPr>
-            <a:r>
-              <a:rPr sz="1800" b="0">
-                <a:solidFill>
-                  <a:srgbClr val="202122"/>
-                </a:solidFill>
-                <a:latin typeface="Calibri"/>
-              </a:rPr>
-              <a:t>Mitigations are practical</a:t>
+                <a:latin typeface="Cambria"/>
+              </a:rPr>
+              <a:t>A technician re-cabling a comms cabinet isolates power, wears gloves, uses a trolley for the new switch and routes cables away from walkways.</a:t>
             </a:r>
           </a:p>
         </p:txBody>
